--- a/Java/lab2/Presentation.pptx
+++ b/Java/lab2/Presentation.pptx
@@ -5,7 +5,7 @@
     <p:sldMasterId id="2147483648" r:id="rId1"/>
   </p:sldMasterIdLst>
   <p:notesMasterIdLst>
-    <p:notesMasterId r:id="rId12"/>
+    <p:notesMasterId r:id="rId15"/>
   </p:notesMasterIdLst>
   <p:sldIdLst>
     <p:sldId id="256" r:id="rId2"/>
@@ -13,11 +13,14 @@
     <p:sldId id="258" r:id="rId4"/>
     <p:sldId id="259" r:id="rId5"/>
     <p:sldId id="260" r:id="rId6"/>
-    <p:sldId id="261" r:id="rId7"/>
-    <p:sldId id="262" r:id="rId8"/>
-    <p:sldId id="263" r:id="rId9"/>
-    <p:sldId id="264" r:id="rId10"/>
-    <p:sldId id="265" r:id="rId11"/>
+    <p:sldId id="267" r:id="rId7"/>
+    <p:sldId id="266" r:id="rId8"/>
+    <p:sldId id="261" r:id="rId9"/>
+    <p:sldId id="262" r:id="rId10"/>
+    <p:sldId id="268" r:id="rId11"/>
+    <p:sldId id="263" r:id="rId12"/>
+    <p:sldId id="264" r:id="rId13"/>
+    <p:sldId id="265" r:id="rId14"/>
   </p:sldIdLst>
   <p:sldSz cx="12192000" cy="6858000"/>
   <p:notesSz cx="6858000" cy="12192000"/>
@@ -330,6 +333,282 @@
 </p:notes>
 </file>
 
+<file path=ppt/notesSlides/notesSlide10.xml><?xml version="1.0" encoding="utf-8"?>
+<p:notes xmlns:a="http://schemas.openxmlformats.org/drawingml/2006/main" xmlns:r="http://schemas.openxmlformats.org/officeDocument/2006/relationships" xmlns:p="http://schemas.openxmlformats.org/presentationml/2006/main">
+  <p:cSld>
+    <p:spTree>
+      <p:nvGrpSpPr>
+        <p:cNvPr id="1" name="">
+          <a:extLst>
+            <a:ext uri="{FF2B5EF4-FFF2-40B4-BE49-F238E27FC236}">
+              <a16:creationId xmlns:a16="http://schemas.microsoft.com/office/drawing/2014/main" id="{62B45CD5-6BDC-06CB-B7FF-DA32721F27FD}"/>
+            </a:ext>
+          </a:extLst>
+        </p:cNvPr>
+        <p:cNvGrpSpPr/>
+        <p:nvPr/>
+      </p:nvGrpSpPr>
+      <p:grpSpPr>
+        <a:xfrm>
+          <a:off x="0" y="0"/>
+          <a:ext cx="0" cy="0"/>
+          <a:chOff x="0" y="0"/>
+          <a:chExt cx="0" cy="0"/>
+        </a:xfrm>
+      </p:grpSpPr>
+      <p:sp>
+        <p:nvSpPr>
+          <p:cNvPr id="2" name="Slide Image Placeholder 1">
+            <a:extLst>
+              <a:ext uri="{FF2B5EF4-FFF2-40B4-BE49-F238E27FC236}">
+                <a16:creationId xmlns:a16="http://schemas.microsoft.com/office/drawing/2014/main" id="{79E2C024-2130-EF5B-CC5D-044C44F36E42}"/>
+              </a:ext>
+            </a:extLst>
+          </p:cNvPr>
+          <p:cNvSpPr>
+            <a:spLocks noGrp="1" noRot="1" noChangeAspect="1"/>
+          </p:cNvSpPr>
+          <p:nvPr>
+            <p:ph type="sldImg"/>
+          </p:nvPr>
+        </p:nvSpPr>
+        <p:spPr/>
+      </p:sp>
+      <p:sp>
+        <p:nvSpPr>
+          <p:cNvPr id="3" name="Notes Placeholder 2">
+            <a:extLst>
+              <a:ext uri="{FF2B5EF4-FFF2-40B4-BE49-F238E27FC236}">
+                <a16:creationId xmlns:a16="http://schemas.microsoft.com/office/drawing/2014/main" id="{FFE53550-DA3C-57A1-F17D-F9BD2F22373D}"/>
+              </a:ext>
+            </a:extLst>
+          </p:cNvPr>
+          <p:cNvSpPr>
+            <a:spLocks noGrp="1"/>
+          </p:cNvSpPr>
+          <p:nvPr>
+            <p:ph type="body" idx="1"/>
+          </p:nvPr>
+        </p:nvSpPr>
+        <p:spPr/>
+        <p:txBody>
+          <a:bodyPr/>
+          <a:lstStyle/>
+          <a:p>
+            <a:endParaRPr lang="en-US" dirty="0"/>
+          </a:p>
+        </p:txBody>
+      </p:sp>
+      <p:sp>
+        <p:nvSpPr>
+          <p:cNvPr id="4" name="Slide Number Placeholder 3">
+            <a:extLst>
+              <a:ext uri="{FF2B5EF4-FFF2-40B4-BE49-F238E27FC236}">
+                <a16:creationId xmlns:a16="http://schemas.microsoft.com/office/drawing/2014/main" id="{C744E053-DF47-7B81-599E-6A0F2259DBD3}"/>
+              </a:ext>
+            </a:extLst>
+          </p:cNvPr>
+          <p:cNvSpPr>
+            <a:spLocks noGrp="1"/>
+          </p:cNvSpPr>
+          <p:nvPr>
+            <p:ph type="sldNum" sz="quarter" idx="10"/>
+          </p:nvPr>
+        </p:nvSpPr>
+        <p:spPr/>
+        <p:txBody>
+          <a:bodyPr/>
+          <a:lstStyle/>
+          <a:p>
+            <a:fld id="{F7021451-1387-4CA6-816F-3879F97B5CBC}" type="slidenum">
+              <a:rPr lang="en-US"/>
+              <a:t>10</a:t>
+            </a:fld>
+            <a:endParaRPr lang="en-US"/>
+          </a:p>
+        </p:txBody>
+      </p:sp>
+    </p:spTree>
+    <p:extLst>
+      <p:ext uri="{BB962C8B-B14F-4D97-AF65-F5344CB8AC3E}">
+        <p14:creationId xmlns:p14="http://schemas.microsoft.com/office/powerpoint/2010/main" val="3354989199"/>
+      </p:ext>
+    </p:extLst>
+  </p:cSld>
+  <p:clrMapOvr>
+    <a:masterClrMapping/>
+  </p:clrMapOvr>
+</p:notes>
+</file>
+
+<file path=ppt/notesSlides/notesSlide11.xml><?xml version="1.0" encoding="utf-8"?>
+<p:notes xmlns:a="http://schemas.openxmlformats.org/drawingml/2006/main" xmlns:r="http://schemas.openxmlformats.org/officeDocument/2006/relationships" xmlns:p="http://schemas.openxmlformats.org/presentationml/2006/main">
+  <p:cSld>
+    <p:spTree>
+      <p:nvGrpSpPr>
+        <p:cNvPr id="1" name=""/>
+        <p:cNvGrpSpPr/>
+        <p:nvPr/>
+      </p:nvGrpSpPr>
+      <p:grpSpPr>
+        <a:xfrm>
+          <a:off x="0" y="0"/>
+          <a:ext cx="0" cy="0"/>
+          <a:chOff x="0" y="0"/>
+          <a:chExt cx="0" cy="0"/>
+        </a:xfrm>
+      </p:grpSpPr>
+      <p:sp>
+        <p:nvSpPr>
+          <p:cNvPr id="2" name="Slide Image Placeholder 1"/>
+          <p:cNvSpPr>
+            <a:spLocks noGrp="1" noRot="1" noChangeAspect="1"/>
+          </p:cNvSpPr>
+          <p:nvPr>
+            <p:ph type="sldImg"/>
+          </p:nvPr>
+        </p:nvSpPr>
+        <p:spPr/>
+      </p:sp>
+      <p:sp>
+        <p:nvSpPr>
+          <p:cNvPr id="3" name="Notes Placeholder 2"/>
+          <p:cNvSpPr>
+            <a:spLocks noGrp="1"/>
+          </p:cNvSpPr>
+          <p:nvPr>
+            <p:ph type="body" idx="1"/>
+          </p:nvPr>
+        </p:nvSpPr>
+        <p:spPr/>
+        <p:txBody>
+          <a:bodyPr/>
+          <a:lstStyle/>
+          <a:p>
+            <a:endParaRPr lang="en-US" dirty="0"/>
+          </a:p>
+        </p:txBody>
+      </p:sp>
+      <p:sp>
+        <p:nvSpPr>
+          <p:cNvPr id="4" name="Slide Number Placeholder 3"/>
+          <p:cNvSpPr>
+            <a:spLocks noGrp="1"/>
+          </p:cNvSpPr>
+          <p:nvPr>
+            <p:ph type="sldNum" sz="quarter" idx="10"/>
+          </p:nvPr>
+        </p:nvSpPr>
+        <p:spPr/>
+        <p:txBody>
+          <a:bodyPr/>
+          <a:lstStyle/>
+          <a:p>
+            <a:fld id="{F7021451-1387-4CA6-816F-3879F97B5CBC}" type="slidenum">
+              <a:rPr lang="en-US"/>
+              <a:t>11</a:t>
+            </a:fld>
+            <a:endParaRPr lang="en-US"/>
+          </a:p>
+        </p:txBody>
+      </p:sp>
+    </p:spTree>
+    <p:extLst>
+      <p:ext uri="{BB962C8B-B14F-4D97-AF65-F5344CB8AC3E}">
+        <p14:creationId xmlns:p14="http://schemas.microsoft.com/office/powerpoint/2010/main" val="1024086991"/>
+      </p:ext>
+    </p:extLst>
+  </p:cSld>
+  <p:clrMapOvr>
+    <a:masterClrMapping/>
+  </p:clrMapOvr>
+</p:notes>
+</file>
+
+<file path=ppt/notesSlides/notesSlide12.xml><?xml version="1.0" encoding="utf-8"?>
+<p:notes xmlns:a="http://schemas.openxmlformats.org/drawingml/2006/main" xmlns:r="http://schemas.openxmlformats.org/officeDocument/2006/relationships" xmlns:p="http://schemas.openxmlformats.org/presentationml/2006/main">
+  <p:cSld>
+    <p:spTree>
+      <p:nvGrpSpPr>
+        <p:cNvPr id="1" name=""/>
+        <p:cNvGrpSpPr/>
+        <p:nvPr/>
+      </p:nvGrpSpPr>
+      <p:grpSpPr>
+        <a:xfrm>
+          <a:off x="0" y="0"/>
+          <a:ext cx="0" cy="0"/>
+          <a:chOff x="0" y="0"/>
+          <a:chExt cx="0" cy="0"/>
+        </a:xfrm>
+      </p:grpSpPr>
+      <p:sp>
+        <p:nvSpPr>
+          <p:cNvPr id="2" name="Slide Image Placeholder 1"/>
+          <p:cNvSpPr>
+            <a:spLocks noGrp="1" noRot="1" noChangeAspect="1"/>
+          </p:cNvSpPr>
+          <p:nvPr>
+            <p:ph type="sldImg"/>
+          </p:nvPr>
+        </p:nvSpPr>
+        <p:spPr/>
+      </p:sp>
+      <p:sp>
+        <p:nvSpPr>
+          <p:cNvPr id="3" name="Notes Placeholder 2"/>
+          <p:cNvSpPr>
+            <a:spLocks noGrp="1"/>
+          </p:cNvSpPr>
+          <p:nvPr>
+            <p:ph type="body" idx="1"/>
+          </p:nvPr>
+        </p:nvSpPr>
+        <p:spPr/>
+        <p:txBody>
+          <a:bodyPr/>
+          <a:lstStyle/>
+          <a:p>
+            <a:endParaRPr lang="en-US" dirty="0"/>
+          </a:p>
+        </p:txBody>
+      </p:sp>
+      <p:sp>
+        <p:nvSpPr>
+          <p:cNvPr id="4" name="Slide Number Placeholder 3"/>
+          <p:cNvSpPr>
+            <a:spLocks noGrp="1"/>
+          </p:cNvSpPr>
+          <p:nvPr>
+            <p:ph type="sldNum" sz="quarter" idx="10"/>
+          </p:nvPr>
+        </p:nvSpPr>
+        <p:spPr/>
+        <p:txBody>
+          <a:bodyPr/>
+          <a:lstStyle/>
+          <a:p>
+            <a:fld id="{F7021451-1387-4CA6-816F-3879F97B5CBC}" type="slidenum">
+              <a:rPr lang="en-US"/>
+              <a:t>12</a:t>
+            </a:fld>
+            <a:endParaRPr lang="en-US"/>
+          </a:p>
+        </p:txBody>
+      </p:sp>
+    </p:spTree>
+    <p:extLst>
+      <p:ext uri="{BB962C8B-B14F-4D97-AF65-F5344CB8AC3E}">
+        <p14:creationId xmlns:p14="http://schemas.microsoft.com/office/powerpoint/2010/main" val="1024086991"/>
+      </p:ext>
+    </p:extLst>
+  </p:cSld>
+  <p:clrMapOvr>
+    <a:masterClrMapping/>
+  </p:clrMapOvr>
+</p:notes>
+</file>
+
 <file path=ppt/notesSlides/notesSlide2.xml><?xml version="1.0" encoding="utf-8"?>
 <p:notes xmlns:a="http://schemas.openxmlformats.org/drawingml/2006/main" xmlns:r="http://schemas.openxmlformats.org/officeDocument/2006/relationships" xmlns:p="http://schemas.openxmlformats.org/presentationml/2006/main">
   <p:cSld>
@@ -671,7 +950,13 @@
   <p:cSld>
     <p:spTree>
       <p:nvGrpSpPr>
-        <p:cNvPr id="1" name=""/>
+        <p:cNvPr id="1" name="">
+          <a:extLst>
+            <a:ext uri="{FF2B5EF4-FFF2-40B4-BE49-F238E27FC236}">
+              <a16:creationId xmlns:a16="http://schemas.microsoft.com/office/drawing/2014/main" id="{AE398CCF-F3B9-95A0-634E-171708BF97E4}"/>
+            </a:ext>
+          </a:extLst>
+        </p:cNvPr>
         <p:cNvGrpSpPr/>
         <p:nvPr/>
       </p:nvGrpSpPr>
@@ -685,7 +970,13 @@
       </p:grpSpPr>
       <p:sp>
         <p:nvSpPr>
-          <p:cNvPr id="2" name="Slide Image Placeholder 1"/>
+          <p:cNvPr id="2" name="Slide Image Placeholder 1">
+            <a:extLst>
+              <a:ext uri="{FF2B5EF4-FFF2-40B4-BE49-F238E27FC236}">
+                <a16:creationId xmlns:a16="http://schemas.microsoft.com/office/drawing/2014/main" id="{7AA50E37-5A3A-43A7-8CEA-164D2A4528E1}"/>
+              </a:ext>
+            </a:extLst>
+          </p:cNvPr>
           <p:cNvSpPr>
             <a:spLocks noGrp="1" noRot="1" noChangeAspect="1"/>
           </p:cNvSpPr>
@@ -697,7 +988,13 @@
       </p:sp>
       <p:sp>
         <p:nvSpPr>
-          <p:cNvPr id="3" name="Notes Placeholder 2"/>
+          <p:cNvPr id="3" name="Notes Placeholder 2">
+            <a:extLst>
+              <a:ext uri="{FF2B5EF4-FFF2-40B4-BE49-F238E27FC236}">
+                <a16:creationId xmlns:a16="http://schemas.microsoft.com/office/drawing/2014/main" id="{B2EBC766-300B-3181-673C-511EE4ED41DC}"/>
+              </a:ext>
+            </a:extLst>
+          </p:cNvPr>
           <p:cNvSpPr>
             <a:spLocks noGrp="1"/>
           </p:cNvSpPr>
@@ -716,7 +1013,13 @@
       </p:sp>
       <p:sp>
         <p:nvSpPr>
-          <p:cNvPr id="4" name="Slide Number Placeholder 3"/>
+          <p:cNvPr id="4" name="Slide Number Placeholder 3">
+            <a:extLst>
+              <a:ext uri="{FF2B5EF4-FFF2-40B4-BE49-F238E27FC236}">
+                <a16:creationId xmlns:a16="http://schemas.microsoft.com/office/drawing/2014/main" id="{6949AE36-ED6B-0971-5AF3-0E23474ADC0F}"/>
+              </a:ext>
+            </a:extLst>
+          </p:cNvPr>
           <p:cNvSpPr>
             <a:spLocks noGrp="1"/>
           </p:cNvSpPr>
@@ -740,7 +1043,7 @@
     </p:spTree>
     <p:extLst>
       <p:ext uri="{BB962C8B-B14F-4D97-AF65-F5344CB8AC3E}">
-        <p14:creationId xmlns:p14="http://schemas.microsoft.com/office/powerpoint/2010/main" val="1024086991"/>
+        <p14:creationId xmlns:p14="http://schemas.microsoft.com/office/powerpoint/2010/main" val="3102929024"/>
       </p:ext>
     </p:extLst>
   </p:cSld>
@@ -755,7 +1058,13 @@
   <p:cSld>
     <p:spTree>
       <p:nvGrpSpPr>
-        <p:cNvPr id="1" name=""/>
+        <p:cNvPr id="1" name="">
+          <a:extLst>
+            <a:ext uri="{FF2B5EF4-FFF2-40B4-BE49-F238E27FC236}">
+              <a16:creationId xmlns:a16="http://schemas.microsoft.com/office/drawing/2014/main" id="{ABCB5DE1-76C6-B09F-BE7E-55C0BA4D2570}"/>
+            </a:ext>
+          </a:extLst>
+        </p:cNvPr>
         <p:cNvGrpSpPr/>
         <p:nvPr/>
       </p:nvGrpSpPr>
@@ -769,7 +1078,13 @@
       </p:grpSpPr>
       <p:sp>
         <p:nvSpPr>
-          <p:cNvPr id="2" name="Slide Image Placeholder 1"/>
+          <p:cNvPr id="2" name="Slide Image Placeholder 1">
+            <a:extLst>
+              <a:ext uri="{FF2B5EF4-FFF2-40B4-BE49-F238E27FC236}">
+                <a16:creationId xmlns:a16="http://schemas.microsoft.com/office/drawing/2014/main" id="{35113475-8C76-2C4A-0CAE-024142C3265D}"/>
+              </a:ext>
+            </a:extLst>
+          </p:cNvPr>
           <p:cNvSpPr>
             <a:spLocks noGrp="1" noRot="1" noChangeAspect="1"/>
           </p:cNvSpPr>
@@ -781,7 +1096,13 @@
       </p:sp>
       <p:sp>
         <p:nvSpPr>
-          <p:cNvPr id="3" name="Notes Placeholder 2"/>
+          <p:cNvPr id="3" name="Notes Placeholder 2">
+            <a:extLst>
+              <a:ext uri="{FF2B5EF4-FFF2-40B4-BE49-F238E27FC236}">
+                <a16:creationId xmlns:a16="http://schemas.microsoft.com/office/drawing/2014/main" id="{F648CD84-63C0-BD37-F5E7-C56189FA00F0}"/>
+              </a:ext>
+            </a:extLst>
+          </p:cNvPr>
           <p:cNvSpPr>
             <a:spLocks noGrp="1"/>
           </p:cNvSpPr>
@@ -800,7 +1121,13 @@
       </p:sp>
       <p:sp>
         <p:nvSpPr>
-          <p:cNvPr id="4" name="Slide Number Placeholder 3"/>
+          <p:cNvPr id="4" name="Slide Number Placeholder 3">
+            <a:extLst>
+              <a:ext uri="{FF2B5EF4-FFF2-40B4-BE49-F238E27FC236}">
+                <a16:creationId xmlns:a16="http://schemas.microsoft.com/office/drawing/2014/main" id="{8F4598DC-4E6C-CC35-2CAD-9B469A457617}"/>
+              </a:ext>
+            </a:extLst>
+          </p:cNvPr>
           <p:cNvSpPr>
             <a:spLocks noGrp="1"/>
           </p:cNvSpPr>
@@ -824,7 +1151,7 @@
     </p:spTree>
     <p:extLst>
       <p:ext uri="{BB962C8B-B14F-4D97-AF65-F5344CB8AC3E}">
-        <p14:creationId xmlns:p14="http://schemas.microsoft.com/office/powerpoint/2010/main" val="1024086991"/>
+        <p14:creationId xmlns:p14="http://schemas.microsoft.com/office/powerpoint/2010/main" val="3816767574"/>
       </p:ext>
     </p:extLst>
   </p:cSld>
@@ -1723,9 +2050,23 @@
 <file path=ppt/slides/slide10.xml><?xml version="1.0" encoding="utf-8"?>
 <p:sld xmlns:a="http://schemas.openxmlformats.org/drawingml/2006/main" xmlns:r="http://schemas.openxmlformats.org/officeDocument/2006/relationships" xmlns:p="http://schemas.openxmlformats.org/presentationml/2006/main">
   <p:cSld>
+    <p:bg>
+      <p:bgPr>
+        <a:solidFill>
+          <a:srgbClr val="F6F4EF"/>
+        </a:solidFill>
+        <a:effectLst/>
+      </p:bgPr>
+    </p:bg>
     <p:spTree>
       <p:nvGrpSpPr>
-        <p:cNvPr id="1" name=""/>
+        <p:cNvPr id="1" name="">
+          <a:extLst>
+            <a:ext uri="{FF2B5EF4-FFF2-40B4-BE49-F238E27FC236}">
+              <a16:creationId xmlns:a16="http://schemas.microsoft.com/office/drawing/2014/main" id="{09116D22-B8B7-24BE-AF2E-901CC99CF1E3}"/>
+            </a:ext>
+          </a:extLst>
+        </p:cNvPr>
         <p:cNvGrpSpPr/>
         <p:nvPr/>
       </p:nvGrpSpPr>
@@ -1739,79 +2080,13 @@
       </p:grpSpPr>
       <p:sp>
         <p:nvSpPr>
-          <p:cNvPr id="2" name="Заголовок 1">
+          <p:cNvPr id="2" name="Text 0">
             <a:extLst>
               <a:ext uri="{FF2B5EF4-FFF2-40B4-BE49-F238E27FC236}">
-                <a16:creationId xmlns:a16="http://schemas.microsoft.com/office/drawing/2014/main" id="{C6BEAB6F-FEC2-7D84-3D5C-AF3756AE28E1}"/>
+                <a16:creationId xmlns:a16="http://schemas.microsoft.com/office/drawing/2014/main" id="{93D5D75B-24FC-6403-7F3A-89C11CD1E8A8}"/>
               </a:ext>
             </a:extLst>
           </p:cNvPr>
-          <p:cNvSpPr>
-            <a:spLocks noGrp="1"/>
-          </p:cNvSpPr>
-          <p:nvPr>
-            <p:ph type="title"/>
-          </p:nvPr>
-        </p:nvSpPr>
-        <p:spPr>
-          <a:xfrm>
-            <a:off x="812800" y="2794668"/>
-            <a:ext cx="10566400" cy="1268663"/>
-          </a:xfrm>
-        </p:spPr>
-        <p:txBody>
-          <a:bodyPr anchor="ctr"/>
-          <a:lstStyle/>
-          <a:p>
-            <a:pPr algn="ctr"/>
-            <a:r>
-              <a:rPr lang="ru-RU" sz="7200" dirty="0"/>
-              <a:t>Спасибо за внимание!</a:t>
-            </a:r>
-          </a:p>
-        </p:txBody>
-      </p:sp>
-    </p:spTree>
-    <p:extLst>
-      <p:ext uri="{BB962C8B-B14F-4D97-AF65-F5344CB8AC3E}">
-        <p14:creationId xmlns:p14="http://schemas.microsoft.com/office/powerpoint/2010/main" val="3955243229"/>
-      </p:ext>
-    </p:extLst>
-  </p:cSld>
-  <p:clrMapOvr>
-    <a:masterClrMapping/>
-  </p:clrMapOvr>
-</p:sld>
-</file>
-
-<file path=ppt/slides/slide2.xml><?xml version="1.0" encoding="utf-8"?>
-<p:sld xmlns:a="http://schemas.openxmlformats.org/drawingml/2006/main" xmlns:r="http://schemas.openxmlformats.org/officeDocument/2006/relationships" xmlns:p="http://schemas.openxmlformats.org/presentationml/2006/main">
-  <p:cSld name="Slide 2">
-    <p:bg>
-      <p:bgPr>
-        <a:solidFill>
-          <a:srgbClr val="F6F4EF"/>
-        </a:solidFill>
-        <a:effectLst/>
-      </p:bgPr>
-    </p:bg>
-    <p:spTree>
-      <p:nvGrpSpPr>
-        <p:cNvPr id="1" name=""/>
-        <p:cNvGrpSpPr/>
-        <p:nvPr/>
-      </p:nvGrpSpPr>
-      <p:grpSpPr>
-        <a:xfrm>
-          <a:off x="0" y="0"/>
-          <a:ext cx="0" cy="0"/>
-          <a:chOff x="0" y="0"/>
-          <a:chExt cx="0" cy="0"/>
-        </a:xfrm>
-      </p:grpSpPr>
-      <p:sp>
-        <p:nvSpPr>
-          <p:cNvPr id="2" name="Text 0"/>
           <p:cNvSpPr>
             <a:spLocks noGrp="1"/>
           </p:cNvSpPr>
@@ -1843,113 +2118,23 @@
               <a:buNone/>
             </a:pPr>
             <a:r>
-              <a:rPr lang="en-US" sz="3600" b="0" i="0" dirty="0">
-                <a:solidFill>
-                  <a:srgbClr val="1B1F3A"/>
-                </a:solidFill>
-                <a:latin typeface="Georgia" pitchFamily="18" charset="0"/>
-                <a:ea typeface="Georgia" pitchFamily="18" charset="-122"/>
-                <a:cs typeface="Georgia" pitchFamily="18" charset="-120"/>
-              </a:rPr>
-              <a:t>Проблема и подход</a:t>
+              <a:rPr lang="ru-RU" sz="3600" dirty="0"/>
+              <a:t>Диаграмма </a:t>
+            </a:r>
+            <a:r>
+              <a:rPr lang="ru-RU" dirty="0"/>
+              <a:t>классов</a:t>
             </a:r>
             <a:endParaRPr lang="en-US" sz="3600" dirty="0"/>
-          </a:p>
-        </p:txBody>
-      </p:sp>
-      <p:sp>
-        <p:nvSpPr>
-          <p:cNvPr id="3" name="Text 1"/>
-          <p:cNvSpPr/>
-          <p:nvPr/>
-        </p:nvSpPr>
-        <p:spPr>
-          <a:xfrm>
-            <a:off x="889508" y="2260600"/>
-            <a:ext cx="5076127" cy="2301081"/>
-          </a:xfrm>
-          <a:prstGeom prst="rect">
-            <a:avLst/>
-          </a:prstGeom>
-          <a:noFill/>
-          <a:ln/>
-        </p:spPr>
-        <p:txBody>
-          <a:bodyPr wrap="square" lIns="0" tIns="0" rIns="0" bIns="0" rtlCol="0" anchor="t">
-            <a:normAutofit/>
-          </a:bodyPr>
-          <a:lstStyle/>
-          <a:p>
-            <a:pPr marL="177292" indent="-177292" algn="l">
-              <a:lnSpc>
-                <a:spcPts val="2240"/>
-              </a:lnSpc>
-              <a:buSzPct val="100000"/>
-              <a:buChar char="•"/>
-            </a:pPr>
-            <a:r>
-              <a:rPr lang="en-US" sz="1600" dirty="0">
-                <a:solidFill>
-                  <a:srgbClr val="1B1F3A"/>
-                </a:solidFill>
-                <a:latin typeface="Georgia" pitchFamily="18" charset="0"/>
-                <a:ea typeface="Georgia" pitchFamily="18" charset="-122"/>
-                <a:cs typeface="Georgia" pitchFamily="18" charset="-120"/>
-              </a:rPr>
-              <a:t>Мышь ищет сыр в лабиринте и не знает его карты</a:t>
-            </a:r>
-            <a:endParaRPr lang="en-US" sz="1600" dirty="0"/>
-          </a:p>
-          <a:p>
-            <a:pPr marL="177292" indent="-177292" algn="l">
-              <a:lnSpc>
-                <a:spcPts val="2240"/>
-              </a:lnSpc>
-              <a:buSzPct val="100000"/>
-              <a:buChar char="•"/>
-            </a:pPr>
-            <a:r>
-              <a:rPr lang="en-US" sz="1600" dirty="0">
-                <a:solidFill>
-                  <a:srgbClr val="1B1F3A"/>
-                </a:solidFill>
-                <a:latin typeface="Georgia" pitchFamily="18" charset="0"/>
-                <a:ea typeface="Georgia" pitchFamily="18" charset="-122"/>
-                <a:cs typeface="Georgia" pitchFamily="18" charset="-120"/>
-              </a:rPr>
-              <a:t>На каждом шаге она выбирает направление, а среда сообщает выигрыш или проигрыш: это подкрепление</a:t>
-            </a:r>
-            <a:endParaRPr lang="en-US" sz="1600" dirty="0"/>
-          </a:p>
-          <a:p>
-            <a:pPr marL="177292" indent="-177292" algn="l">
-              <a:lnSpc>
-                <a:spcPts val="2240"/>
-              </a:lnSpc>
-              <a:buSzPct val="100000"/>
-              <a:buChar char="•"/>
-            </a:pPr>
-            <a:r>
-              <a:rPr lang="en-US" sz="1600" dirty="0">
-                <a:solidFill>
-                  <a:srgbClr val="1B1F3A"/>
-                </a:solidFill>
-                <a:latin typeface="Georgia" pitchFamily="18" charset="0"/>
-                <a:ea typeface="Georgia" pitchFamily="18" charset="-122"/>
-                <a:cs typeface="Georgia" pitchFamily="18" charset="-120"/>
-              </a:rPr>
-              <a:t>Цель: найти маршрут с максимальной суммарной наградой, к сыру через воду и в обход тока</a:t>
-            </a:r>
-            <a:endParaRPr lang="en-US" sz="1600" dirty="0"/>
           </a:p>
         </p:txBody>
       </p:sp>
       <p:pic>
         <p:nvPicPr>
-          <p:cNvPr id="8" name="Рисунок 7">
+          <p:cNvPr id="3" name="Рисунок 2">
             <a:extLst>
               <a:ext uri="{FF2B5EF4-FFF2-40B4-BE49-F238E27FC236}">
-                <a16:creationId xmlns:a16="http://schemas.microsoft.com/office/drawing/2014/main" id="{7BDDEAFF-834A-B396-9280-6B0E21057926}"/>
+                <a16:creationId xmlns:a16="http://schemas.microsoft.com/office/drawing/2014/main" id="{3DF38E79-E19A-91DB-3FC4-1F185B865C6B}"/>
               </a:ext>
             </a:extLst>
           </p:cNvPr>
@@ -1959,20 +2144,26 @@
           <p:nvPr/>
         </p:nvPicPr>
         <p:blipFill>
-          <a:blip r:embed="rId3"/>
-          <a:srcRect l="6786" t="2296" r="12871" b="5893"/>
+          <a:blip r:embed="rId3" cstate="print">
+            <a:extLst>
+              <a:ext uri="{28A0092B-C50C-407E-A947-70E740481C1C}">
+                <a14:useLocalDpi xmlns:a14="http://schemas.microsoft.com/office/drawing/2010/main" val="0"/>
+              </a:ext>
+            </a:extLst>
+          </a:blip>
+          <a:srcRect/>
           <a:stretch>
             <a:fillRect/>
           </a:stretch>
         </p:blipFill>
-        <p:spPr>
+        <p:spPr bwMode="auto">
           <a:xfrm>
-            <a:off x="6988413" y="1854200"/>
-            <a:ext cx="3508138" cy="4070350"/>
+            <a:off x="6096000" y="517806"/>
+            <a:ext cx="4969309" cy="6012041"/>
           </a:xfrm>
           <a:prstGeom prst="roundRect">
             <a:avLst>
-              <a:gd name="adj" fmla="val 6012"/>
+              <a:gd name="adj" fmla="val 2012"/>
             </a:avLst>
           </a:prstGeom>
           <a:solidFill>
@@ -1987,6 +2178,11 @@
         </p:spPr>
       </p:pic>
     </p:spTree>
+    <p:extLst>
+      <p:ext uri="{BB962C8B-B14F-4D97-AF65-F5344CB8AC3E}">
+        <p14:creationId xmlns:p14="http://schemas.microsoft.com/office/powerpoint/2010/main" val="4261419745"/>
+      </p:ext>
+    </p:extLst>
   </p:cSld>
   <p:clrMapOvr>
     <a:masterClrMapping/>
@@ -1994,2137 +2190,7 @@
 </p:sld>
 </file>
 
-<file path=ppt/slides/slide3.xml><?xml version="1.0" encoding="utf-8"?>
-<p:sld xmlns:a="http://schemas.openxmlformats.org/drawingml/2006/main" xmlns:r="http://schemas.openxmlformats.org/officeDocument/2006/relationships" xmlns:p="http://schemas.openxmlformats.org/presentationml/2006/main">
-  <p:cSld name="Slide 3">
-    <p:bg>
-      <p:bgPr>
-        <a:solidFill>
-          <a:srgbClr val="F6F4EF"/>
-        </a:solidFill>
-        <a:effectLst/>
-      </p:bgPr>
-    </p:bg>
-    <p:spTree>
-      <p:nvGrpSpPr>
-        <p:cNvPr id="1" name=""/>
-        <p:cNvGrpSpPr/>
-        <p:nvPr/>
-      </p:nvGrpSpPr>
-      <p:grpSpPr>
-        <a:xfrm>
-          <a:off x="0" y="0"/>
-          <a:ext cx="0" cy="0"/>
-          <a:chOff x="0" y="0"/>
-          <a:chExt cx="0" cy="0"/>
-        </a:xfrm>
-      </p:grpSpPr>
-      <p:sp>
-        <p:nvSpPr>
-          <p:cNvPr id="2" name="Text 0"/>
-          <p:cNvSpPr>
-            <a:spLocks noGrp="1"/>
-          </p:cNvSpPr>
-          <p:nvPr>
-            <p:ph type="title"/>
-          </p:nvPr>
-        </p:nvSpPr>
-        <p:spPr>
-          <a:xfrm>
-            <a:off x="812800" y="812800"/>
-            <a:ext cx="10883392" cy="528241"/>
-          </a:xfrm>
-          <a:prstGeom prst="rect">
-            <a:avLst/>
-          </a:prstGeom>
-          <a:noFill/>
-          <a:ln/>
-        </p:spPr>
-        <p:txBody>
-          <a:bodyPr wrap="square" lIns="0" tIns="0" rIns="0" bIns="0" rtlCol="0" anchor="t">
-            <a:normAutofit/>
-          </a:bodyPr>
-          <a:lstStyle/>
-          <a:p>
-            <a:pPr marL="0" indent="0" algn="l">
-              <a:lnSpc>
-                <a:spcPts val="3960"/>
-              </a:lnSpc>
-              <a:buNone/>
-            </a:pPr>
-            <a:r>
-              <a:rPr lang="en-US" sz="3600" b="0" i="0" dirty="0">
-                <a:solidFill>
-                  <a:srgbClr val="1B1F3A"/>
-                </a:solidFill>
-                <a:latin typeface="Georgia" pitchFamily="18" charset="0"/>
-                <a:ea typeface="Georgia" pitchFamily="18" charset="-122"/>
-                <a:cs typeface="Georgia" pitchFamily="18" charset="-120"/>
-              </a:rPr>
-              <a:t>Награды среды</a:t>
-            </a:r>
-            <a:endParaRPr lang="en-US" sz="3600" dirty="0"/>
-          </a:p>
-        </p:txBody>
-      </p:sp>
-      <p:sp>
-        <p:nvSpPr>
-          <p:cNvPr id="3" name="Shape 1"/>
-          <p:cNvSpPr/>
-          <p:nvPr/>
-        </p:nvSpPr>
-        <p:spPr>
-          <a:xfrm>
-            <a:off x="815975" y="1623616"/>
-            <a:ext cx="2482850" cy="2238375"/>
-          </a:xfrm>
-          <a:prstGeom prst="roundRect">
-            <a:avLst>
-              <a:gd name="adj" fmla="val 4397"/>
-            </a:avLst>
-          </a:prstGeom>
-          <a:solidFill>
-            <a:srgbClr val="FFFFFF"/>
-          </a:solidFill>
-          <a:ln w="6350">
-            <a:solidFill>
-              <a:srgbClr val="E0DCCF"/>
-            </a:solidFill>
-            <a:prstDash val="solid"/>
-          </a:ln>
-        </p:spPr>
-        <p:txBody>
-          <a:bodyPr/>
-          <a:lstStyle/>
-          <a:p>
-            <a:endParaRPr lang="ru-RU"/>
-          </a:p>
-        </p:txBody>
-      </p:sp>
-      <p:sp>
-        <p:nvSpPr>
-          <p:cNvPr id="4" name="Text 2"/>
-          <p:cNvSpPr/>
-          <p:nvPr/>
-        </p:nvSpPr>
-        <p:spPr>
-          <a:xfrm>
-            <a:off x="1073150" y="1880791"/>
-            <a:ext cx="2027555" cy="482600"/>
-          </a:xfrm>
-          <a:prstGeom prst="rect">
-            <a:avLst/>
-          </a:prstGeom>
-          <a:noFill/>
-          <a:ln/>
-        </p:spPr>
-        <p:txBody>
-          <a:bodyPr wrap="square" lIns="0" tIns="0" rIns="0" bIns="0" rtlCol="0" anchor="t">
-            <a:normAutofit/>
-          </a:bodyPr>
-          <a:lstStyle/>
-          <a:p>
-            <a:pPr marL="0" indent="0" algn="l">
-              <a:lnSpc>
-                <a:spcPts val="3600"/>
-              </a:lnSpc>
-              <a:buNone/>
-            </a:pPr>
-            <a:r>
-              <a:rPr lang="en-US" sz="3600" b="1" dirty="0">
-                <a:solidFill>
-                  <a:srgbClr val="B36B00"/>
-                </a:solidFill>
-                <a:latin typeface="Georgia" pitchFamily="18" charset="0"/>
-                <a:ea typeface="Georgia" pitchFamily="18" charset="-122"/>
-                <a:cs typeface="Georgia" pitchFamily="18" charset="-120"/>
-              </a:rPr>
-              <a:t>+10^7</a:t>
-            </a:r>
-            <a:endParaRPr lang="en-US" sz="3600" dirty="0"/>
-          </a:p>
-        </p:txBody>
-      </p:sp>
-      <p:sp>
-        <p:nvSpPr>
-          <p:cNvPr id="5" name="Text 3"/>
-          <p:cNvSpPr/>
-          <p:nvPr/>
-        </p:nvSpPr>
-        <p:spPr>
-          <a:xfrm>
-            <a:off x="1073150" y="2439591"/>
-            <a:ext cx="2027555" cy="317500"/>
-          </a:xfrm>
-          <a:prstGeom prst="rect">
-            <a:avLst/>
-          </a:prstGeom>
-          <a:noFill/>
-          <a:ln/>
-        </p:spPr>
-        <p:txBody>
-          <a:bodyPr wrap="square" lIns="0" tIns="0" rIns="0" bIns="0" rtlCol="0" anchor="t">
-            <a:normAutofit/>
-          </a:bodyPr>
-          <a:lstStyle/>
-          <a:p>
-            <a:pPr marL="0" indent="0" algn="l">
-              <a:lnSpc>
-                <a:spcPts val="2300"/>
-              </a:lnSpc>
-              <a:buNone/>
-            </a:pPr>
-            <a:r>
-              <a:rPr lang="en-US" sz="2000" b="1" dirty="0">
-                <a:solidFill>
-                  <a:srgbClr val="1B1F3A"/>
-                </a:solidFill>
-                <a:latin typeface="Georgia" pitchFamily="18" charset="0"/>
-                <a:ea typeface="Georgia" pitchFamily="18" charset="-122"/>
-                <a:cs typeface="Georgia" pitchFamily="18" charset="-120"/>
-              </a:rPr>
-              <a:t>Сыр</a:t>
-            </a:r>
-            <a:endParaRPr lang="en-US" sz="2000" dirty="0"/>
-          </a:p>
-        </p:txBody>
-      </p:sp>
-      <p:sp>
-        <p:nvSpPr>
-          <p:cNvPr id="6" name="Text 4"/>
-          <p:cNvSpPr/>
-          <p:nvPr/>
-        </p:nvSpPr>
-        <p:spPr>
-          <a:xfrm>
-            <a:off x="1073150" y="2833291"/>
-            <a:ext cx="2027555" cy="539750"/>
-          </a:xfrm>
-          <a:prstGeom prst="rect">
-            <a:avLst/>
-          </a:prstGeom>
-          <a:noFill/>
-          <a:ln/>
-        </p:spPr>
-        <p:txBody>
-          <a:bodyPr wrap="square" lIns="0" tIns="0" rIns="0" bIns="0" rtlCol="0" anchor="t">
-            <a:normAutofit/>
-          </a:bodyPr>
-          <a:lstStyle/>
-          <a:p>
-            <a:pPr marL="0" indent="0" algn="l">
-              <a:lnSpc>
-                <a:spcPts val="2025"/>
-              </a:lnSpc>
-              <a:buNone/>
-            </a:pPr>
-            <a:r>
-              <a:rPr lang="en-US" sz="1500" dirty="0">
-                <a:solidFill>
-                  <a:srgbClr val="3D4255"/>
-                </a:solidFill>
-                <a:latin typeface="Georgia" pitchFamily="18" charset="0"/>
-                <a:ea typeface="Georgia" pitchFamily="18" charset="-122"/>
-                <a:cs typeface="Georgia" pitchFamily="18" charset="-120"/>
-              </a:rPr>
-              <a:t>Главная награда, эпизод заканчивается</a:t>
-            </a:r>
-            <a:endParaRPr lang="en-US" sz="1500" dirty="0"/>
-          </a:p>
-        </p:txBody>
-      </p:sp>
-      <p:sp>
-        <p:nvSpPr>
-          <p:cNvPr id="7" name="Shape 5"/>
-          <p:cNvSpPr/>
-          <p:nvPr/>
-        </p:nvSpPr>
-        <p:spPr>
-          <a:xfrm>
-            <a:off x="3508375" y="1623616"/>
-            <a:ext cx="2482850" cy="2238375"/>
-          </a:xfrm>
-          <a:prstGeom prst="roundRect">
-            <a:avLst>
-              <a:gd name="adj" fmla="val 4397"/>
-            </a:avLst>
-          </a:prstGeom>
-          <a:solidFill>
-            <a:srgbClr val="FFFFFF"/>
-          </a:solidFill>
-          <a:ln w="6350">
-            <a:solidFill>
-              <a:srgbClr val="E0DCCF"/>
-            </a:solidFill>
-            <a:prstDash val="solid"/>
-          </a:ln>
-        </p:spPr>
-        <p:txBody>
-          <a:bodyPr/>
-          <a:lstStyle/>
-          <a:p>
-            <a:endParaRPr lang="ru-RU"/>
-          </a:p>
-        </p:txBody>
-      </p:sp>
-      <p:sp>
-        <p:nvSpPr>
-          <p:cNvPr id="8" name="Text 6"/>
-          <p:cNvSpPr/>
-          <p:nvPr/>
-        </p:nvSpPr>
-        <p:spPr>
-          <a:xfrm>
-            <a:off x="3765550" y="1880791"/>
-            <a:ext cx="2027555" cy="482600"/>
-          </a:xfrm>
-          <a:prstGeom prst="rect">
-            <a:avLst/>
-          </a:prstGeom>
-          <a:noFill/>
-          <a:ln/>
-        </p:spPr>
-        <p:txBody>
-          <a:bodyPr wrap="square" lIns="0" tIns="0" rIns="0" bIns="0" rtlCol="0" anchor="t">
-            <a:normAutofit/>
-          </a:bodyPr>
-          <a:lstStyle/>
-          <a:p>
-            <a:pPr marL="0" indent="0" algn="l">
-              <a:lnSpc>
-                <a:spcPts val="3600"/>
-              </a:lnSpc>
-              <a:buNone/>
-            </a:pPr>
-            <a:r>
-              <a:rPr lang="en-US" sz="3600" b="1" dirty="0">
-                <a:solidFill>
-                  <a:srgbClr val="B36B00"/>
-                </a:solidFill>
-                <a:latin typeface="Georgia" pitchFamily="18" charset="0"/>
-                <a:ea typeface="Georgia" pitchFamily="18" charset="-122"/>
-                <a:cs typeface="Georgia" pitchFamily="18" charset="-120"/>
-              </a:rPr>
-              <a:t>+10</a:t>
-            </a:r>
-            <a:endParaRPr lang="en-US" sz="3600" dirty="0"/>
-          </a:p>
-        </p:txBody>
-      </p:sp>
-      <p:sp>
-        <p:nvSpPr>
-          <p:cNvPr id="9" name="Text 7"/>
-          <p:cNvSpPr/>
-          <p:nvPr/>
-        </p:nvSpPr>
-        <p:spPr>
-          <a:xfrm>
-            <a:off x="3765550" y="2439591"/>
-            <a:ext cx="2027555" cy="317500"/>
-          </a:xfrm>
-          <a:prstGeom prst="rect">
-            <a:avLst/>
-          </a:prstGeom>
-          <a:noFill/>
-          <a:ln/>
-        </p:spPr>
-        <p:txBody>
-          <a:bodyPr wrap="square" lIns="0" tIns="0" rIns="0" bIns="0" rtlCol="0" anchor="t">
-            <a:normAutofit/>
-          </a:bodyPr>
-          <a:lstStyle/>
-          <a:p>
-            <a:pPr marL="0" indent="0" algn="l">
-              <a:lnSpc>
-                <a:spcPts val="2300"/>
-              </a:lnSpc>
-              <a:buNone/>
-            </a:pPr>
-            <a:r>
-              <a:rPr lang="en-US" sz="2000" b="1" dirty="0">
-                <a:solidFill>
-                  <a:srgbClr val="1B1F3A"/>
-                </a:solidFill>
-                <a:latin typeface="Georgia" pitchFamily="18" charset="0"/>
-                <a:ea typeface="Georgia" pitchFamily="18" charset="-122"/>
-                <a:cs typeface="Georgia" pitchFamily="18" charset="-120"/>
-              </a:rPr>
-              <a:t>Вода</a:t>
-            </a:r>
-            <a:endParaRPr lang="en-US" sz="2000" dirty="0"/>
-          </a:p>
-        </p:txBody>
-      </p:sp>
-      <p:sp>
-        <p:nvSpPr>
-          <p:cNvPr id="10" name="Text 8"/>
-          <p:cNvSpPr/>
-          <p:nvPr/>
-        </p:nvSpPr>
-        <p:spPr>
-          <a:xfrm>
-            <a:off x="3765550" y="2833291"/>
-            <a:ext cx="2027555" cy="282575"/>
-          </a:xfrm>
-          <a:prstGeom prst="rect">
-            <a:avLst/>
-          </a:prstGeom>
-          <a:noFill/>
-          <a:ln/>
-        </p:spPr>
-        <p:txBody>
-          <a:bodyPr wrap="square" lIns="0" tIns="0" rIns="0" bIns="0" rtlCol="0" anchor="t">
-            <a:normAutofit/>
-          </a:bodyPr>
-          <a:lstStyle/>
-          <a:p>
-            <a:pPr marL="0" indent="0" algn="l">
-              <a:lnSpc>
-                <a:spcPts val="2025"/>
-              </a:lnSpc>
-              <a:buNone/>
-            </a:pPr>
-            <a:r>
-              <a:rPr lang="en-US" sz="1500" dirty="0">
-                <a:solidFill>
-                  <a:srgbClr val="3D4255"/>
-                </a:solidFill>
-                <a:latin typeface="Georgia" pitchFamily="18" charset="0"/>
-                <a:ea typeface="Georgia" pitchFamily="18" charset="-122"/>
-                <a:cs typeface="Georgia" pitchFamily="18" charset="-120"/>
-              </a:rPr>
-              <a:t>Небольшая награда</a:t>
-            </a:r>
-            <a:endParaRPr lang="en-US" sz="1500" dirty="0"/>
-          </a:p>
-        </p:txBody>
-      </p:sp>
-      <p:sp>
-        <p:nvSpPr>
-          <p:cNvPr id="11" name="Shape 9"/>
-          <p:cNvSpPr/>
-          <p:nvPr/>
-        </p:nvSpPr>
-        <p:spPr>
-          <a:xfrm>
-            <a:off x="6200775" y="1623616"/>
-            <a:ext cx="2482850" cy="2238375"/>
-          </a:xfrm>
-          <a:prstGeom prst="roundRect">
-            <a:avLst>
-              <a:gd name="adj" fmla="val 4397"/>
-            </a:avLst>
-          </a:prstGeom>
-          <a:solidFill>
-            <a:srgbClr val="FFFFFF"/>
-          </a:solidFill>
-          <a:ln w="6350">
-            <a:solidFill>
-              <a:srgbClr val="E0DCCF"/>
-            </a:solidFill>
-            <a:prstDash val="solid"/>
-          </a:ln>
-        </p:spPr>
-        <p:txBody>
-          <a:bodyPr/>
-          <a:lstStyle/>
-          <a:p>
-            <a:endParaRPr lang="ru-RU"/>
-          </a:p>
-        </p:txBody>
-      </p:sp>
-      <p:sp>
-        <p:nvSpPr>
-          <p:cNvPr id="12" name="Text 10"/>
-          <p:cNvSpPr/>
-          <p:nvPr/>
-        </p:nvSpPr>
-        <p:spPr>
-          <a:xfrm>
-            <a:off x="6457950" y="1880791"/>
-            <a:ext cx="2027555" cy="482600"/>
-          </a:xfrm>
-          <a:prstGeom prst="rect">
-            <a:avLst/>
-          </a:prstGeom>
-          <a:noFill/>
-          <a:ln/>
-        </p:spPr>
-        <p:txBody>
-          <a:bodyPr wrap="square" lIns="0" tIns="0" rIns="0" bIns="0" rtlCol="0" anchor="t">
-            <a:normAutofit/>
-          </a:bodyPr>
-          <a:lstStyle/>
-          <a:p>
-            <a:pPr marL="0" indent="0" algn="l">
-              <a:lnSpc>
-                <a:spcPts val="3600"/>
-              </a:lnSpc>
-              <a:buNone/>
-            </a:pPr>
-            <a:r>
-              <a:rPr lang="en-US" sz="3600" b="1" dirty="0">
-                <a:solidFill>
-                  <a:srgbClr val="B36B00"/>
-                </a:solidFill>
-                <a:latin typeface="Georgia" pitchFamily="18" charset="0"/>
-                <a:ea typeface="Georgia" pitchFamily="18" charset="-122"/>
-                <a:cs typeface="Georgia" pitchFamily="18" charset="-120"/>
-              </a:rPr>
-              <a:t>−10</a:t>
-            </a:r>
-            <a:endParaRPr lang="en-US" sz="3600" dirty="0"/>
-          </a:p>
-        </p:txBody>
-      </p:sp>
-      <p:sp>
-        <p:nvSpPr>
-          <p:cNvPr id="13" name="Text 11"/>
-          <p:cNvSpPr/>
-          <p:nvPr/>
-        </p:nvSpPr>
-        <p:spPr>
-          <a:xfrm>
-            <a:off x="6457950" y="2439591"/>
-            <a:ext cx="2027555" cy="317500"/>
-          </a:xfrm>
-          <a:prstGeom prst="rect">
-            <a:avLst/>
-          </a:prstGeom>
-          <a:noFill/>
-          <a:ln/>
-        </p:spPr>
-        <p:txBody>
-          <a:bodyPr wrap="square" lIns="0" tIns="0" rIns="0" bIns="0" rtlCol="0" anchor="t">
-            <a:normAutofit/>
-          </a:bodyPr>
-          <a:lstStyle/>
-          <a:p>
-            <a:pPr marL="0" indent="0" algn="l">
-              <a:lnSpc>
-                <a:spcPts val="2300"/>
-              </a:lnSpc>
-              <a:buNone/>
-            </a:pPr>
-            <a:r>
-              <a:rPr lang="en-US" sz="2000" b="1" dirty="0">
-                <a:solidFill>
-                  <a:srgbClr val="1B1F3A"/>
-                </a:solidFill>
-                <a:latin typeface="Georgia" pitchFamily="18" charset="0"/>
-                <a:ea typeface="Georgia" pitchFamily="18" charset="-122"/>
-                <a:cs typeface="Georgia" pitchFamily="18" charset="-120"/>
-              </a:rPr>
-              <a:t>Шок</a:t>
-            </a:r>
-            <a:endParaRPr lang="en-US" sz="2000" dirty="0"/>
-          </a:p>
-        </p:txBody>
-      </p:sp>
-      <p:sp>
-        <p:nvSpPr>
-          <p:cNvPr id="14" name="Text 12"/>
-          <p:cNvSpPr/>
-          <p:nvPr/>
-        </p:nvSpPr>
-        <p:spPr>
-          <a:xfrm>
-            <a:off x="6457950" y="2833291"/>
-            <a:ext cx="2027555" cy="282575"/>
-          </a:xfrm>
-          <a:prstGeom prst="rect">
-            <a:avLst/>
-          </a:prstGeom>
-          <a:noFill/>
-          <a:ln/>
-        </p:spPr>
-        <p:txBody>
-          <a:bodyPr wrap="square" lIns="0" tIns="0" rIns="0" bIns="0" rtlCol="0" anchor="t">
-            <a:normAutofit/>
-          </a:bodyPr>
-          <a:lstStyle/>
-          <a:p>
-            <a:pPr marL="0" indent="0" algn="l">
-              <a:lnSpc>
-                <a:spcPts val="2025"/>
-              </a:lnSpc>
-              <a:buNone/>
-            </a:pPr>
-            <a:r>
-              <a:rPr lang="en-US" sz="1500" dirty="0">
-                <a:solidFill>
-                  <a:srgbClr val="3D4255"/>
-                </a:solidFill>
-                <a:latin typeface="Georgia" pitchFamily="18" charset="0"/>
-                <a:ea typeface="Georgia" pitchFamily="18" charset="-122"/>
-                <a:cs typeface="Georgia" pitchFamily="18" charset="-120"/>
-              </a:rPr>
-              <a:t>Штраф за травму</a:t>
-            </a:r>
-            <a:endParaRPr lang="en-US" sz="1500" dirty="0"/>
-          </a:p>
-        </p:txBody>
-      </p:sp>
-      <p:sp>
-        <p:nvSpPr>
-          <p:cNvPr id="15" name="Shape 13"/>
-          <p:cNvSpPr/>
-          <p:nvPr/>
-        </p:nvSpPr>
-        <p:spPr>
-          <a:xfrm>
-            <a:off x="8893175" y="1623616"/>
-            <a:ext cx="2482850" cy="2238375"/>
-          </a:xfrm>
-          <a:prstGeom prst="roundRect">
-            <a:avLst>
-              <a:gd name="adj" fmla="val 4397"/>
-            </a:avLst>
-          </a:prstGeom>
-          <a:solidFill>
-            <a:srgbClr val="FFFFFF"/>
-          </a:solidFill>
-          <a:ln w="6350">
-            <a:solidFill>
-              <a:srgbClr val="E0DCCF"/>
-            </a:solidFill>
-            <a:prstDash val="solid"/>
-          </a:ln>
-        </p:spPr>
-        <p:txBody>
-          <a:bodyPr/>
-          <a:lstStyle/>
-          <a:p>
-            <a:endParaRPr lang="ru-RU"/>
-          </a:p>
-        </p:txBody>
-      </p:sp>
-      <p:sp>
-        <p:nvSpPr>
-          <p:cNvPr id="16" name="Text 14"/>
-          <p:cNvSpPr/>
-          <p:nvPr/>
-        </p:nvSpPr>
-        <p:spPr>
-          <a:xfrm>
-            <a:off x="9150350" y="1880791"/>
-            <a:ext cx="2027555" cy="482600"/>
-          </a:xfrm>
-          <a:prstGeom prst="rect">
-            <a:avLst/>
-          </a:prstGeom>
-          <a:noFill/>
-          <a:ln/>
-        </p:spPr>
-        <p:txBody>
-          <a:bodyPr wrap="square" lIns="0" tIns="0" rIns="0" bIns="0" rtlCol="0" anchor="t">
-            <a:normAutofit/>
-          </a:bodyPr>
-          <a:lstStyle/>
-          <a:p>
-            <a:pPr marL="0" indent="0" algn="l">
-              <a:lnSpc>
-                <a:spcPts val="3600"/>
-              </a:lnSpc>
-              <a:buNone/>
-            </a:pPr>
-            <a:r>
-              <a:rPr lang="en-US" sz="3600" b="1" dirty="0">
-                <a:solidFill>
-                  <a:srgbClr val="B36B00"/>
-                </a:solidFill>
-                <a:latin typeface="Georgia" pitchFamily="18" charset="0"/>
-                <a:ea typeface="Georgia" pitchFamily="18" charset="-122"/>
-                <a:cs typeface="Georgia" pitchFamily="18" charset="-120"/>
-              </a:rPr>
-              <a:t>−1</a:t>
-            </a:r>
-            <a:endParaRPr lang="en-US" sz="3600" dirty="0"/>
-          </a:p>
-        </p:txBody>
-      </p:sp>
-      <p:sp>
-        <p:nvSpPr>
-          <p:cNvPr id="17" name="Text 15"/>
-          <p:cNvSpPr/>
-          <p:nvPr/>
-        </p:nvSpPr>
-        <p:spPr>
-          <a:xfrm>
-            <a:off x="9150350" y="2439591"/>
-            <a:ext cx="2222500" cy="317500"/>
-          </a:xfrm>
-          <a:prstGeom prst="rect">
-            <a:avLst/>
-          </a:prstGeom>
-          <a:noFill/>
-          <a:ln/>
-        </p:spPr>
-        <p:txBody>
-          <a:bodyPr wrap="square" lIns="0" tIns="0" rIns="0" bIns="0" rtlCol="0" anchor="t">
-            <a:normAutofit/>
-          </a:bodyPr>
-          <a:lstStyle/>
-          <a:p>
-            <a:pPr marL="0" indent="0" algn="l">
-              <a:lnSpc>
-                <a:spcPts val="2300"/>
-              </a:lnSpc>
-              <a:buNone/>
-            </a:pPr>
-            <a:r>
-              <a:rPr lang="en-US" sz="2000" b="1" dirty="0">
-                <a:solidFill>
-                  <a:srgbClr val="1B1F3A"/>
-                </a:solidFill>
-                <a:latin typeface="Georgia" pitchFamily="18" charset="0"/>
-                <a:ea typeface="Georgia" pitchFamily="18" charset="-122"/>
-                <a:cs typeface="Georgia" pitchFamily="18" charset="-120"/>
-              </a:rPr>
-              <a:t>Пустая клетка</a:t>
-            </a:r>
-            <a:endParaRPr lang="en-US" sz="2000" dirty="0"/>
-          </a:p>
-        </p:txBody>
-      </p:sp>
-      <p:sp>
-        <p:nvSpPr>
-          <p:cNvPr id="18" name="Text 16"/>
-          <p:cNvSpPr/>
-          <p:nvPr/>
-        </p:nvSpPr>
-        <p:spPr>
-          <a:xfrm>
-            <a:off x="9150350" y="2833291"/>
-            <a:ext cx="2027555" cy="796925"/>
-          </a:xfrm>
-          <a:prstGeom prst="rect">
-            <a:avLst/>
-          </a:prstGeom>
-          <a:noFill/>
-          <a:ln/>
-        </p:spPr>
-        <p:txBody>
-          <a:bodyPr wrap="square" lIns="0" tIns="0" rIns="0" bIns="0" rtlCol="0" anchor="t">
-            <a:normAutofit/>
-          </a:bodyPr>
-          <a:lstStyle/>
-          <a:p>
-            <a:pPr marL="0" indent="0" algn="l">
-              <a:lnSpc>
-                <a:spcPts val="2025"/>
-              </a:lnSpc>
-              <a:buNone/>
-            </a:pPr>
-            <a:r>
-              <a:rPr lang="en-US" sz="1500" dirty="0">
-                <a:solidFill>
-                  <a:srgbClr val="3D4255"/>
-                </a:solidFill>
-                <a:latin typeface="Georgia" pitchFamily="18" charset="0"/>
-                <a:ea typeface="Georgia" pitchFamily="18" charset="-122"/>
-                <a:cs typeface="Georgia" pitchFamily="18" charset="-120"/>
-              </a:rPr>
-              <a:t>Штраф за каждый шаг, чтобы путь был короче</a:t>
-            </a:r>
-            <a:endParaRPr lang="en-US" sz="1500" dirty="0"/>
-          </a:p>
-        </p:txBody>
-      </p:sp>
-      <p:sp>
-        <p:nvSpPr>
-          <p:cNvPr id="19" name="Text 17"/>
-          <p:cNvSpPr/>
-          <p:nvPr/>
-        </p:nvSpPr>
-        <p:spPr>
-          <a:xfrm>
-            <a:off x="812800" y="4169966"/>
-            <a:ext cx="10883392" cy="316805"/>
-          </a:xfrm>
-          <a:prstGeom prst="rect">
-            <a:avLst/>
-          </a:prstGeom>
-          <a:noFill/>
-          <a:ln/>
-        </p:spPr>
-        <p:txBody>
-          <a:bodyPr wrap="square" lIns="0" tIns="0" rIns="0" bIns="0" rtlCol="0" anchor="t">
-            <a:normAutofit/>
-          </a:bodyPr>
-          <a:lstStyle/>
-          <a:p>
-            <a:pPr marL="0" indent="0" algn="l">
-              <a:lnSpc>
-                <a:spcPts val="2295"/>
-              </a:lnSpc>
-              <a:buNone/>
-            </a:pPr>
-            <a:r>
-              <a:rPr lang="en-US" sz="1700" dirty="0">
-                <a:solidFill>
-                  <a:srgbClr val="1B1F3A"/>
-                </a:solidFill>
-                <a:latin typeface="Georgia" pitchFamily="18" charset="0"/>
-                <a:ea typeface="Georgia" pitchFamily="18" charset="-122"/>
-                <a:cs typeface="Georgia" pitchFamily="18" charset="-120"/>
-              </a:rPr>
-              <a:t>Агент учится максимизировать сумму наград за эпизод, а не отдельный выигрыш.</a:t>
-            </a:r>
-            <a:endParaRPr lang="en-US" sz="1700" dirty="0"/>
-          </a:p>
-        </p:txBody>
-      </p:sp>
-    </p:spTree>
-  </p:cSld>
-  <p:clrMapOvr>
-    <a:masterClrMapping/>
-  </p:clrMapOvr>
-</p:sld>
-</file>
-
-<file path=ppt/slides/slide4.xml><?xml version="1.0" encoding="utf-8"?>
-<p:sld xmlns:a="http://schemas.openxmlformats.org/drawingml/2006/main" xmlns:r="http://schemas.openxmlformats.org/officeDocument/2006/relationships" xmlns:p="http://schemas.openxmlformats.org/presentationml/2006/main">
-  <p:cSld name="Slide 4">
-    <p:bg>
-      <p:bgPr>
-        <a:solidFill>
-          <a:srgbClr val="1B1F3A"/>
-        </a:solidFill>
-        <a:effectLst/>
-      </p:bgPr>
-    </p:bg>
-    <p:spTree>
-      <p:nvGrpSpPr>
-        <p:cNvPr id="1" name=""/>
-        <p:cNvGrpSpPr/>
-        <p:nvPr/>
-      </p:nvGrpSpPr>
-      <p:grpSpPr>
-        <a:xfrm>
-          <a:off x="0" y="0"/>
-          <a:ext cx="0" cy="0"/>
-          <a:chOff x="0" y="0"/>
-          <a:chExt cx="0" cy="0"/>
-        </a:xfrm>
-      </p:grpSpPr>
-      <p:sp>
-        <p:nvSpPr>
-          <p:cNvPr id="2" name="Text 0"/>
-          <p:cNvSpPr>
-            <a:spLocks noGrp="1"/>
-          </p:cNvSpPr>
-          <p:nvPr>
-            <p:ph type="title"/>
-          </p:nvPr>
-        </p:nvSpPr>
-        <p:spPr>
-          <a:xfrm>
-            <a:off x="812800" y="812800"/>
-            <a:ext cx="10883392" cy="528241"/>
-          </a:xfrm>
-          <a:prstGeom prst="rect">
-            <a:avLst/>
-          </a:prstGeom>
-          <a:noFill/>
-          <a:ln/>
-        </p:spPr>
-        <p:txBody>
-          <a:bodyPr wrap="square" lIns="0" tIns="0" rIns="0" bIns="0" rtlCol="0" anchor="t">
-            <a:normAutofit/>
-          </a:bodyPr>
-          <a:lstStyle/>
-          <a:p>
-            <a:pPr marL="0" indent="0" algn="l">
-              <a:lnSpc>
-                <a:spcPts val="3960"/>
-              </a:lnSpc>
-              <a:buNone/>
-            </a:pPr>
-            <a:r>
-              <a:rPr lang="en-US" sz="3600" b="0" i="0" dirty="0">
-                <a:solidFill>
-                  <a:srgbClr val="F6F4EF"/>
-                </a:solidFill>
-                <a:latin typeface="Georgia" pitchFamily="18" charset="0"/>
-                <a:ea typeface="Georgia" pitchFamily="18" charset="-122"/>
-                <a:cs typeface="Georgia" pitchFamily="18" charset="-120"/>
-              </a:rPr>
-              <a:t>Q-обучение</a:t>
-            </a:r>
-            <a:endParaRPr lang="en-US" sz="3600" dirty="0"/>
-          </a:p>
-        </p:txBody>
-      </p:sp>
-      <p:sp>
-        <p:nvSpPr>
-          <p:cNvPr id="3" name="Text 1"/>
-          <p:cNvSpPr/>
-          <p:nvPr/>
-        </p:nvSpPr>
-        <p:spPr>
-          <a:xfrm>
-            <a:off x="812800" y="1620441"/>
-            <a:ext cx="10883392" cy="454620"/>
-          </a:xfrm>
-          <a:prstGeom prst="rect">
-            <a:avLst/>
-          </a:prstGeom>
-          <a:noFill/>
-          <a:ln/>
-        </p:spPr>
-        <p:txBody>
-          <a:bodyPr wrap="square" lIns="0" tIns="0" rIns="0" bIns="0" rtlCol="0" anchor="t">
-            <a:normAutofit/>
-          </a:bodyPr>
-          <a:lstStyle/>
-          <a:p>
-            <a:pPr marL="0" indent="0" algn="l">
-              <a:lnSpc>
-                <a:spcPts val="3380"/>
-              </a:lnSpc>
-              <a:buNone/>
-            </a:pPr>
-            <a:r>
-              <a:rPr lang="en-US" sz="2600" dirty="0">
-                <a:solidFill>
-                  <a:srgbClr val="F2B134"/>
-                </a:solidFill>
-                <a:latin typeface="Georgia" pitchFamily="18" charset="0"/>
-                <a:ea typeface="Georgia" pitchFamily="18" charset="-122"/>
-                <a:cs typeface="Georgia" pitchFamily="18" charset="-120"/>
-              </a:rPr>
-              <a:t>Q(s,a) += α · (r + γ · max Q(s′,·) − Q(s,a))</a:t>
-            </a:r>
-            <a:endParaRPr lang="en-US" sz="2600" dirty="0"/>
-          </a:p>
-        </p:txBody>
-      </p:sp>
-      <p:sp>
-        <p:nvSpPr>
-          <p:cNvPr id="4" name="Text 2"/>
-          <p:cNvSpPr/>
-          <p:nvPr/>
-        </p:nvSpPr>
-        <p:spPr>
-          <a:xfrm>
-            <a:off x="812800" y="2354461"/>
-            <a:ext cx="10883392" cy="282575"/>
-          </a:xfrm>
-          <a:prstGeom prst="rect">
-            <a:avLst/>
-          </a:prstGeom>
-          <a:noFill/>
-          <a:ln/>
-        </p:spPr>
-        <p:txBody>
-          <a:bodyPr wrap="square" lIns="0" tIns="0" rIns="0" bIns="0" rtlCol="0" anchor="t">
-            <a:normAutofit/>
-          </a:bodyPr>
-          <a:lstStyle/>
-          <a:p>
-            <a:pPr marL="0" indent="0" algn="l">
-              <a:lnSpc>
-                <a:spcPts val="2025"/>
-              </a:lnSpc>
-              <a:buNone/>
-            </a:pPr>
-            <a:r>
-              <a:rPr lang="en-US" sz="1500" dirty="0">
-                <a:solidFill>
-                  <a:srgbClr val="C9C6D6"/>
-                </a:solidFill>
-                <a:latin typeface="Georgia" pitchFamily="18" charset="0"/>
-                <a:ea typeface="Georgia" pitchFamily="18" charset="-122"/>
-                <a:cs typeface="Georgia" pitchFamily="18" charset="-120"/>
-              </a:rPr>
-              <a:t>Q-таблица хранит ценность каждого из 4 действий в каждой клетке лабиринта</a:t>
-            </a:r>
-            <a:endParaRPr lang="en-US" sz="1500" dirty="0"/>
-          </a:p>
-        </p:txBody>
-      </p:sp>
-      <p:sp>
-        <p:nvSpPr>
-          <p:cNvPr id="5" name="Text 3"/>
-          <p:cNvSpPr/>
-          <p:nvPr/>
-        </p:nvSpPr>
-        <p:spPr>
-          <a:xfrm>
-            <a:off x="812800" y="2916436"/>
-            <a:ext cx="3488233" cy="317500"/>
-          </a:xfrm>
-          <a:prstGeom prst="rect">
-            <a:avLst/>
-          </a:prstGeom>
-          <a:noFill/>
-          <a:ln/>
-        </p:spPr>
-        <p:txBody>
-          <a:bodyPr wrap="square" lIns="0" tIns="0" rIns="0" bIns="0" rtlCol="0" anchor="t">
-            <a:normAutofit/>
-          </a:bodyPr>
-          <a:lstStyle/>
-          <a:p>
-            <a:pPr marL="0" indent="0" algn="l">
-              <a:lnSpc>
-                <a:spcPts val="2300"/>
-              </a:lnSpc>
-              <a:buNone/>
-            </a:pPr>
-            <a:r>
-              <a:rPr lang="en-US" sz="2000" b="1" dirty="0">
-                <a:solidFill>
-                  <a:srgbClr val="F6F4EF"/>
-                </a:solidFill>
-                <a:latin typeface="Georgia" pitchFamily="18" charset="0"/>
-                <a:ea typeface="Georgia" pitchFamily="18" charset="-122"/>
-                <a:cs typeface="Georgia" pitchFamily="18" charset="-120"/>
-              </a:rPr>
-              <a:t>α = 0,5</a:t>
-            </a:r>
-            <a:endParaRPr lang="en-US" sz="2000" dirty="0"/>
-          </a:p>
-        </p:txBody>
-      </p:sp>
-      <p:sp>
-        <p:nvSpPr>
-          <p:cNvPr id="6" name="Text 4"/>
-          <p:cNvSpPr/>
-          <p:nvPr/>
-        </p:nvSpPr>
-        <p:spPr>
-          <a:xfrm>
-            <a:off x="812800" y="3284736"/>
-            <a:ext cx="3488233" cy="539750"/>
-          </a:xfrm>
-          <a:prstGeom prst="rect">
-            <a:avLst/>
-          </a:prstGeom>
-          <a:noFill/>
-          <a:ln/>
-        </p:spPr>
-        <p:txBody>
-          <a:bodyPr wrap="square" lIns="0" tIns="0" rIns="0" bIns="0" rtlCol="0" anchor="t">
-            <a:normAutofit/>
-          </a:bodyPr>
-          <a:lstStyle/>
-          <a:p>
-            <a:pPr marL="0" indent="0" algn="l">
-              <a:lnSpc>
-                <a:spcPts val="2025"/>
-              </a:lnSpc>
-              <a:buNone/>
-            </a:pPr>
-            <a:r>
-              <a:rPr lang="en-US" sz="1500" dirty="0">
-                <a:solidFill>
-                  <a:srgbClr val="C9C6D6"/>
-                </a:solidFill>
-                <a:latin typeface="Georgia" pitchFamily="18" charset="0"/>
-                <a:ea typeface="Georgia" pitchFamily="18" charset="-122"/>
-                <a:cs typeface="Georgia" pitchFamily="18" charset="-120"/>
-              </a:rPr>
-              <a:t>Скорость обучения: насколько новый опыт вытесняет старый</a:t>
-            </a:r>
-            <a:endParaRPr lang="en-US" sz="1500" dirty="0"/>
-          </a:p>
-        </p:txBody>
-      </p:sp>
-      <p:sp>
-        <p:nvSpPr>
-          <p:cNvPr id="7" name="Text 5"/>
-          <p:cNvSpPr/>
-          <p:nvPr/>
-        </p:nvSpPr>
-        <p:spPr>
-          <a:xfrm>
-            <a:off x="4402634" y="2916436"/>
-            <a:ext cx="3488335" cy="317500"/>
-          </a:xfrm>
-          <a:prstGeom prst="rect">
-            <a:avLst/>
-          </a:prstGeom>
-          <a:noFill/>
-          <a:ln/>
-        </p:spPr>
-        <p:txBody>
-          <a:bodyPr wrap="square" lIns="0" tIns="0" rIns="0" bIns="0" rtlCol="0" anchor="t">
-            <a:normAutofit/>
-          </a:bodyPr>
-          <a:lstStyle/>
-          <a:p>
-            <a:pPr marL="0" indent="0" algn="l">
-              <a:lnSpc>
-                <a:spcPts val="2300"/>
-              </a:lnSpc>
-              <a:buNone/>
-            </a:pPr>
-            <a:r>
-              <a:rPr lang="en-US" sz="2000" b="1" dirty="0">
-                <a:solidFill>
-                  <a:srgbClr val="F6F4EF"/>
-                </a:solidFill>
-                <a:latin typeface="Georgia" pitchFamily="18" charset="0"/>
-                <a:ea typeface="Georgia" pitchFamily="18" charset="-122"/>
-                <a:cs typeface="Georgia" pitchFamily="18" charset="-120"/>
-              </a:rPr>
-              <a:t>γ = 0,9</a:t>
-            </a:r>
-            <a:endParaRPr lang="en-US" sz="2000" dirty="0"/>
-          </a:p>
-        </p:txBody>
-      </p:sp>
-      <p:sp>
-        <p:nvSpPr>
-          <p:cNvPr id="8" name="Text 6"/>
-          <p:cNvSpPr/>
-          <p:nvPr/>
-        </p:nvSpPr>
-        <p:spPr>
-          <a:xfrm>
-            <a:off x="4402634" y="3284736"/>
-            <a:ext cx="3488335" cy="539750"/>
-          </a:xfrm>
-          <a:prstGeom prst="rect">
-            <a:avLst/>
-          </a:prstGeom>
-          <a:noFill/>
-          <a:ln/>
-        </p:spPr>
-        <p:txBody>
-          <a:bodyPr wrap="square" lIns="0" tIns="0" rIns="0" bIns="0" rtlCol="0" anchor="t">
-            <a:normAutofit/>
-          </a:bodyPr>
-          <a:lstStyle/>
-          <a:p>
-            <a:pPr marL="0" indent="0" algn="l">
-              <a:lnSpc>
-                <a:spcPts val="2025"/>
-              </a:lnSpc>
-              <a:buNone/>
-            </a:pPr>
-            <a:r>
-              <a:rPr lang="en-US" sz="1500" dirty="0">
-                <a:solidFill>
-                  <a:srgbClr val="C9C6D6"/>
-                </a:solidFill>
-                <a:latin typeface="Georgia" pitchFamily="18" charset="0"/>
-                <a:ea typeface="Georgia" pitchFamily="18" charset="-122"/>
-                <a:cs typeface="Georgia" pitchFamily="18" charset="-120"/>
-              </a:rPr>
-              <a:t>Дисконт: насколько важны награды в будущем</a:t>
-            </a:r>
-            <a:endParaRPr lang="en-US" sz="1500" dirty="0"/>
-          </a:p>
-        </p:txBody>
-      </p:sp>
-      <p:sp>
-        <p:nvSpPr>
-          <p:cNvPr id="9" name="Text 7"/>
-          <p:cNvSpPr/>
-          <p:nvPr/>
-        </p:nvSpPr>
-        <p:spPr>
-          <a:xfrm>
-            <a:off x="7992566" y="2916436"/>
-            <a:ext cx="3488233" cy="317500"/>
-          </a:xfrm>
-          <a:prstGeom prst="rect">
-            <a:avLst/>
-          </a:prstGeom>
-          <a:noFill/>
-          <a:ln/>
-        </p:spPr>
-        <p:txBody>
-          <a:bodyPr wrap="square" lIns="0" tIns="0" rIns="0" bIns="0" rtlCol="0" anchor="t">
-            <a:normAutofit/>
-          </a:bodyPr>
-          <a:lstStyle/>
-          <a:p>
-            <a:pPr marL="0" indent="0" algn="l">
-              <a:lnSpc>
-                <a:spcPts val="2300"/>
-              </a:lnSpc>
-              <a:buNone/>
-            </a:pPr>
-            <a:r>
-              <a:rPr lang="en-US" sz="2000" b="1" dirty="0">
-                <a:solidFill>
-                  <a:srgbClr val="F6F4EF"/>
-                </a:solidFill>
-                <a:latin typeface="Georgia" pitchFamily="18" charset="0"/>
-                <a:ea typeface="Georgia" pitchFamily="18" charset="-122"/>
-                <a:cs typeface="Georgia" pitchFamily="18" charset="-120"/>
-              </a:rPr>
-              <a:t>ε = 0,1</a:t>
-            </a:r>
-            <a:endParaRPr lang="en-US" sz="2000" dirty="0"/>
-          </a:p>
-        </p:txBody>
-      </p:sp>
-      <p:sp>
-        <p:nvSpPr>
-          <p:cNvPr id="10" name="Text 8"/>
-          <p:cNvSpPr/>
-          <p:nvPr/>
-        </p:nvSpPr>
-        <p:spPr>
-          <a:xfrm>
-            <a:off x="7992566" y="3284736"/>
-            <a:ext cx="3488233" cy="539750"/>
-          </a:xfrm>
-          <a:prstGeom prst="rect">
-            <a:avLst/>
-          </a:prstGeom>
-          <a:noFill/>
-          <a:ln/>
-        </p:spPr>
-        <p:txBody>
-          <a:bodyPr wrap="square" lIns="0" tIns="0" rIns="0" bIns="0" rtlCol="0" anchor="t">
-            <a:normAutofit/>
-          </a:bodyPr>
-          <a:lstStyle/>
-          <a:p>
-            <a:pPr marL="0" indent="0" algn="l">
-              <a:lnSpc>
-                <a:spcPts val="2025"/>
-              </a:lnSpc>
-              <a:buNone/>
-            </a:pPr>
-            <a:r>
-              <a:rPr lang="en-US" sz="1500" dirty="0">
-                <a:solidFill>
-                  <a:srgbClr val="C9C6D6"/>
-                </a:solidFill>
-                <a:latin typeface="Georgia" pitchFamily="18" charset="0"/>
-                <a:ea typeface="Georgia" pitchFamily="18" charset="-122"/>
-                <a:cs typeface="Georgia" pitchFamily="18" charset="-120"/>
-              </a:rPr>
-              <a:t>Доля случайных ходов, чтобы исследовать лабиринт</a:t>
-            </a:r>
-            <a:endParaRPr lang="en-US" sz="1500" dirty="0"/>
-          </a:p>
-        </p:txBody>
-      </p:sp>
-    </p:spTree>
-  </p:cSld>
-  <p:clrMapOvr>
-    <a:masterClrMapping/>
-  </p:clrMapOvr>
-</p:sld>
-</file>
-
-<file path=ppt/slides/slide5.xml><?xml version="1.0" encoding="utf-8"?>
-<p:sld xmlns:a="http://schemas.openxmlformats.org/drawingml/2006/main" xmlns:r="http://schemas.openxmlformats.org/officeDocument/2006/relationships" xmlns:p="http://schemas.openxmlformats.org/presentationml/2006/main">
-  <p:cSld name="Slide 5">
-    <p:bg>
-      <p:bgPr>
-        <a:solidFill>
-          <a:srgbClr val="F6F4EF"/>
-        </a:solidFill>
-        <a:effectLst/>
-      </p:bgPr>
-    </p:bg>
-    <p:spTree>
-      <p:nvGrpSpPr>
-        <p:cNvPr id="1" name=""/>
-        <p:cNvGrpSpPr/>
-        <p:nvPr/>
-      </p:nvGrpSpPr>
-      <p:grpSpPr>
-        <a:xfrm>
-          <a:off x="0" y="0"/>
-          <a:ext cx="0" cy="0"/>
-          <a:chOff x="0" y="0"/>
-          <a:chExt cx="0" cy="0"/>
-        </a:xfrm>
-      </p:grpSpPr>
-      <p:sp>
-        <p:nvSpPr>
-          <p:cNvPr id="2" name="Text 0"/>
-          <p:cNvSpPr>
-            <a:spLocks noGrp="1"/>
-          </p:cNvSpPr>
-          <p:nvPr>
-            <p:ph type="title"/>
-          </p:nvPr>
-        </p:nvSpPr>
-        <p:spPr>
-          <a:xfrm>
-            <a:off x="812800" y="812800"/>
-            <a:ext cx="10883392" cy="528241"/>
-          </a:xfrm>
-          <a:prstGeom prst="rect">
-            <a:avLst/>
-          </a:prstGeom>
-          <a:noFill/>
-          <a:ln/>
-        </p:spPr>
-        <p:txBody>
-          <a:bodyPr wrap="square" lIns="0" tIns="0" rIns="0" bIns="0" rtlCol="0" anchor="t">
-            <a:normAutofit/>
-          </a:bodyPr>
-          <a:lstStyle/>
-          <a:p>
-            <a:pPr marL="0" indent="0" algn="l">
-              <a:lnSpc>
-                <a:spcPts val="3960"/>
-              </a:lnSpc>
-              <a:buNone/>
-            </a:pPr>
-            <a:r>
-              <a:rPr lang="en-US" sz="3600" b="0" i="0" dirty="0">
-                <a:solidFill>
-                  <a:srgbClr val="1B1F3A"/>
-                </a:solidFill>
-                <a:latin typeface="Georgia" pitchFamily="18" charset="0"/>
-                <a:ea typeface="Georgia" pitchFamily="18" charset="-122"/>
-                <a:cs typeface="Georgia" pitchFamily="18" charset="-120"/>
-              </a:rPr>
-              <a:t>Архитектура</a:t>
-            </a:r>
-            <a:endParaRPr lang="en-US" sz="3600" dirty="0"/>
-          </a:p>
-        </p:txBody>
-      </p:sp>
-      <p:sp>
-        <p:nvSpPr>
-          <p:cNvPr id="3" name="Text 1"/>
-          <p:cNvSpPr/>
-          <p:nvPr/>
-        </p:nvSpPr>
-        <p:spPr>
-          <a:xfrm>
-            <a:off x="889508" y="2545060"/>
-            <a:ext cx="4630759" cy="1732161"/>
-          </a:xfrm>
-          <a:prstGeom prst="rect">
-            <a:avLst/>
-          </a:prstGeom>
-          <a:noFill/>
-          <a:ln/>
-        </p:spPr>
-        <p:txBody>
-          <a:bodyPr wrap="square" lIns="0" tIns="0" rIns="0" bIns="0" rtlCol="0" anchor="t">
-            <a:normAutofit/>
-          </a:bodyPr>
-          <a:lstStyle/>
-          <a:p>
-            <a:pPr marL="177292" indent="-177292" algn="l">
-              <a:lnSpc>
-                <a:spcPts val="2240"/>
-              </a:lnSpc>
-              <a:buSzPct val="100000"/>
-              <a:buChar char="•"/>
-            </a:pPr>
-            <a:r>
-              <a:rPr lang="en-US" sz="1600" b="1" dirty="0">
-                <a:solidFill>
-                  <a:srgbClr val="1B1F3A"/>
-                </a:solidFill>
-                <a:latin typeface="Georgia" pitchFamily="18" charset="0"/>
-                <a:ea typeface="Georgia" pitchFamily="18" charset="-122"/>
-                <a:cs typeface="Georgia" pitchFamily="18" charset="-120"/>
-              </a:rPr>
-              <a:t>Maze, MazeGenerator</a:t>
-            </a:r>
-            <a:r>
-              <a:rPr lang="en-US" sz="1600" dirty="0">
-                <a:solidFill>
-                  <a:srgbClr val="1B1F3A"/>
-                </a:solidFill>
-                <a:latin typeface="Georgia" pitchFamily="18" charset="0"/>
-                <a:ea typeface="Georgia" pitchFamily="18" charset="-122"/>
-                <a:cs typeface="Georgia" pitchFamily="18" charset="-120"/>
-              </a:rPr>
-              <a:t>: лабиринт и его генерация</a:t>
-            </a:r>
-            <a:endParaRPr lang="en-US" sz="1600" dirty="0"/>
-          </a:p>
-          <a:p>
-            <a:pPr marL="177292" indent="-177292" algn="l">
-              <a:lnSpc>
-                <a:spcPts val="2240"/>
-              </a:lnSpc>
-              <a:buSzPct val="100000"/>
-              <a:buChar char="•"/>
-            </a:pPr>
-            <a:r>
-              <a:rPr lang="en-US" sz="1600" b="1" dirty="0">
-                <a:solidFill>
-                  <a:srgbClr val="1B1F3A"/>
-                </a:solidFill>
-                <a:latin typeface="Georgia" pitchFamily="18" charset="0"/>
-                <a:ea typeface="Georgia" pitchFamily="18" charset="-122"/>
-                <a:cs typeface="Georgia" pitchFamily="18" charset="-120"/>
-              </a:rPr>
-              <a:t>Environment</a:t>
-            </a:r>
-            <a:r>
-              <a:rPr lang="en-US" sz="1600" dirty="0">
-                <a:solidFill>
-                  <a:srgbClr val="1B1F3A"/>
-                </a:solidFill>
-                <a:latin typeface="Georgia" pitchFamily="18" charset="0"/>
-                <a:ea typeface="Georgia" pitchFamily="18" charset="-122"/>
-                <a:cs typeface="Georgia" pitchFamily="18" charset="-120"/>
-              </a:rPr>
-              <a:t>: шаги, награды, эпохи</a:t>
-            </a:r>
-            <a:endParaRPr lang="en-US" sz="1600" dirty="0"/>
-          </a:p>
-          <a:p>
-            <a:pPr marL="177292" indent="-177292" algn="l">
-              <a:lnSpc>
-                <a:spcPts val="2240"/>
-              </a:lnSpc>
-              <a:buSzPct val="100000"/>
-              <a:buChar char="•"/>
-            </a:pPr>
-            <a:r>
-              <a:rPr lang="en-US" sz="1600" b="1" dirty="0">
-                <a:solidFill>
-                  <a:srgbClr val="1B1F3A"/>
-                </a:solidFill>
-                <a:latin typeface="Georgia" pitchFamily="18" charset="0"/>
-                <a:ea typeface="Georgia" pitchFamily="18" charset="-122"/>
-                <a:cs typeface="Georgia" pitchFamily="18" charset="-120"/>
-              </a:rPr>
-              <a:t>Agent, Policy</a:t>
-            </a:r>
-            <a:r>
-              <a:rPr lang="en-US" sz="1600" dirty="0">
-                <a:solidFill>
-                  <a:srgbClr val="1B1F3A"/>
-                </a:solidFill>
-                <a:latin typeface="Georgia" pitchFamily="18" charset="0"/>
-                <a:ea typeface="Georgia" pitchFamily="18" charset="-122"/>
-                <a:cs typeface="Georgia" pitchFamily="18" charset="-120"/>
-              </a:rPr>
-              <a:t>: выбор действия и Q-таблица</a:t>
-            </a:r>
-            <a:endParaRPr lang="en-US" sz="1600" dirty="0"/>
-          </a:p>
-          <a:p>
-            <a:pPr marL="177292" indent="-177292" algn="l">
-              <a:lnSpc>
-                <a:spcPts val="2240"/>
-              </a:lnSpc>
-              <a:buSzPct val="100000"/>
-              <a:buChar char="•"/>
-            </a:pPr>
-            <a:r>
-              <a:rPr lang="en-US" sz="1600" b="1" dirty="0">
-                <a:solidFill>
-                  <a:srgbClr val="1B1F3A"/>
-                </a:solidFill>
-                <a:latin typeface="Georgia" pitchFamily="18" charset="0"/>
-                <a:ea typeface="Georgia" pitchFamily="18" charset="-122"/>
-                <a:cs typeface="Georgia" pitchFamily="18" charset="-120"/>
-              </a:rPr>
-              <a:t>MazeTrainerFrame, MazePanel</a:t>
-            </a:r>
-            <a:r>
-              <a:rPr lang="en-US" sz="1600" dirty="0">
-                <a:solidFill>
-                  <a:srgbClr val="1B1F3A"/>
-                </a:solidFill>
-                <a:latin typeface="Georgia" pitchFamily="18" charset="0"/>
-                <a:ea typeface="Georgia" pitchFamily="18" charset="-122"/>
-                <a:cs typeface="Georgia" pitchFamily="18" charset="-120"/>
-              </a:rPr>
-              <a:t>: окно и отрисовка</a:t>
-            </a:r>
-            <a:endParaRPr lang="en-US" sz="1600" dirty="0"/>
-          </a:p>
-        </p:txBody>
-      </p:sp>
-      <p:pic>
-        <p:nvPicPr>
-          <p:cNvPr id="6" name="Рисунок 5">
-            <a:extLst>
-              <a:ext uri="{FF2B5EF4-FFF2-40B4-BE49-F238E27FC236}">
-                <a16:creationId xmlns:a16="http://schemas.microsoft.com/office/drawing/2014/main" id="{56B0C0E1-72CC-356E-96D6-6788BD159C27}"/>
-              </a:ext>
-            </a:extLst>
-          </p:cNvPr>
-          <p:cNvPicPr>
-            <a:picLocks noChangeAspect="1"/>
-          </p:cNvPicPr>
-          <p:nvPr/>
-        </p:nvPicPr>
-        <p:blipFill>
-          <a:blip r:embed="rId3"/>
-          <a:stretch>
-            <a:fillRect/>
-          </a:stretch>
-        </p:blipFill>
-        <p:spPr>
-          <a:xfrm>
-            <a:off x="6631499" y="1464733"/>
-            <a:ext cx="4294752" cy="3928533"/>
-          </a:xfrm>
-          <a:prstGeom prst="roundRect">
-            <a:avLst>
-              <a:gd name="adj" fmla="val 2290"/>
-            </a:avLst>
-          </a:prstGeom>
-          <a:solidFill>
-            <a:srgbClr val="FFFFFF">
-              <a:shade val="85000"/>
-            </a:srgbClr>
-          </a:solidFill>
-          <a:ln>
-            <a:noFill/>
-          </a:ln>
-          <a:effectLst/>
-        </p:spPr>
-      </p:pic>
-    </p:spTree>
-  </p:cSld>
-  <p:clrMapOvr>
-    <a:masterClrMapping/>
-  </p:clrMapOvr>
-</p:sld>
-</file>
-
-<file path=ppt/slides/slide6.xml><?xml version="1.0" encoding="utf-8"?>
-<p:sld xmlns:a="http://schemas.openxmlformats.org/drawingml/2006/main" xmlns:r="http://schemas.openxmlformats.org/officeDocument/2006/relationships" xmlns:p="http://schemas.openxmlformats.org/presentationml/2006/main">
-  <p:cSld name="Slide 6">
-    <p:bg>
-      <p:bgPr>
-        <a:solidFill>
-          <a:srgbClr val="F6F4EF"/>
-        </a:solidFill>
-        <a:effectLst/>
-      </p:bgPr>
-    </p:bg>
-    <p:spTree>
-      <p:nvGrpSpPr>
-        <p:cNvPr id="1" name=""/>
-        <p:cNvGrpSpPr/>
-        <p:nvPr/>
-      </p:nvGrpSpPr>
-      <p:grpSpPr>
-        <a:xfrm>
-          <a:off x="0" y="0"/>
-          <a:ext cx="0" cy="0"/>
-          <a:chOff x="0" y="0"/>
-          <a:chExt cx="0" cy="0"/>
-        </a:xfrm>
-      </p:grpSpPr>
-      <p:sp>
-        <p:nvSpPr>
-          <p:cNvPr id="2" name="Text 0"/>
-          <p:cNvSpPr>
-            <a:spLocks noGrp="1"/>
-          </p:cNvSpPr>
-          <p:nvPr>
-            <p:ph type="title"/>
-          </p:nvPr>
-        </p:nvSpPr>
-        <p:spPr>
-          <a:xfrm>
-            <a:off x="812800" y="812800"/>
-            <a:ext cx="10883392" cy="528241"/>
-          </a:xfrm>
-          <a:prstGeom prst="rect">
-            <a:avLst/>
-          </a:prstGeom>
-          <a:noFill/>
-          <a:ln/>
-        </p:spPr>
-        <p:txBody>
-          <a:bodyPr wrap="square" lIns="0" tIns="0" rIns="0" bIns="0" rtlCol="0" anchor="t">
-            <a:normAutofit/>
-          </a:bodyPr>
-          <a:lstStyle/>
-          <a:p>
-            <a:pPr marL="0" indent="0" algn="l">
-              <a:lnSpc>
-                <a:spcPts val="3960"/>
-              </a:lnSpc>
-              <a:buNone/>
-            </a:pPr>
-            <a:r>
-              <a:rPr lang="en-US" sz="3600" b="0" i="0" dirty="0">
-                <a:solidFill>
-                  <a:srgbClr val="1B1F3A"/>
-                </a:solidFill>
-                <a:latin typeface="Georgia" pitchFamily="18" charset="0"/>
-                <a:ea typeface="Georgia" pitchFamily="18" charset="-122"/>
-                <a:cs typeface="Georgia" pitchFamily="18" charset="-120"/>
-              </a:rPr>
-              <a:t>Один шаг обучения</a:t>
-            </a:r>
-            <a:endParaRPr lang="en-US" sz="3600" dirty="0"/>
-          </a:p>
-        </p:txBody>
-      </p:sp>
-      <p:sp>
-        <p:nvSpPr>
-          <p:cNvPr id="5" name="Text 3"/>
-          <p:cNvSpPr/>
-          <p:nvPr/>
-        </p:nvSpPr>
-        <p:spPr>
-          <a:xfrm>
-            <a:off x="765429" y="1626592"/>
-            <a:ext cx="4492371" cy="3604816"/>
-          </a:xfrm>
-          <a:prstGeom prst="rect">
-            <a:avLst/>
-          </a:prstGeom>
-          <a:noFill/>
-          <a:ln/>
-        </p:spPr>
-        <p:txBody>
-          <a:bodyPr wrap="square" lIns="0" tIns="0" rIns="0" bIns="0" rtlCol="0" anchor="t">
-            <a:normAutofit/>
-          </a:bodyPr>
-          <a:lstStyle/>
-          <a:p>
-            <a:pPr marL="342900" indent="-342900" algn="l">
-              <a:lnSpc>
-                <a:spcPct val="150000"/>
-              </a:lnSpc>
-              <a:buFont typeface="+mj-lt"/>
-              <a:buAutoNum type="arabicPeriod"/>
-            </a:pPr>
-            <a:r>
-              <a:rPr lang="en-US" sz="2000" dirty="0">
-                <a:solidFill>
-                  <a:srgbClr val="1B1F3A"/>
-                </a:solidFill>
-                <a:latin typeface="Georgia" pitchFamily="18" charset="0"/>
-                <a:ea typeface="Georgia" pitchFamily="18" charset="-122"/>
-                <a:cs typeface="Georgia" pitchFamily="18" charset="-120"/>
-              </a:rPr>
-              <a:t>Среда находит </a:t>
-            </a:r>
-            <a:r>
-              <a:rPr lang="en-US" sz="2000" dirty="0" err="1">
-                <a:solidFill>
-                  <a:srgbClr val="1B1F3A"/>
-                </a:solidFill>
-                <a:latin typeface="Georgia" pitchFamily="18" charset="0"/>
-                <a:ea typeface="Georgia" pitchFamily="18" charset="-122"/>
-                <a:cs typeface="Georgia" pitchFamily="18" charset="-120"/>
-              </a:rPr>
-              <a:t>доступные</a:t>
-            </a:r>
-            <a:r>
-              <a:rPr lang="en-US" sz="2000" dirty="0">
-                <a:solidFill>
-                  <a:srgbClr val="1B1F3A"/>
-                </a:solidFill>
-                <a:latin typeface="Georgia" pitchFamily="18" charset="0"/>
-                <a:ea typeface="Georgia" pitchFamily="18" charset="-122"/>
-                <a:cs typeface="Georgia" pitchFamily="18" charset="-120"/>
-              </a:rPr>
-              <a:t> </a:t>
-            </a:r>
-            <a:r>
-              <a:rPr lang="en-US" sz="2000" dirty="0" err="1">
-                <a:solidFill>
-                  <a:srgbClr val="1B1F3A"/>
-                </a:solidFill>
-                <a:latin typeface="Georgia" pitchFamily="18" charset="0"/>
-                <a:ea typeface="Georgia" pitchFamily="18" charset="-122"/>
-                <a:cs typeface="Georgia" pitchFamily="18" charset="-120"/>
-              </a:rPr>
-              <a:t>ходы</a:t>
-            </a:r>
-            <a:r>
-              <a:rPr lang="en-US" sz="2000" dirty="0">
-                <a:solidFill>
-                  <a:srgbClr val="1B1F3A"/>
-                </a:solidFill>
-                <a:latin typeface="Georgia" pitchFamily="18" charset="0"/>
-                <a:ea typeface="Georgia" pitchFamily="18" charset="-122"/>
-                <a:cs typeface="Georgia" pitchFamily="18" charset="-120"/>
-              </a:rPr>
-              <a:t> </a:t>
-            </a:r>
-          </a:p>
-          <a:p>
-            <a:pPr marL="342900" indent="-342900" algn="l">
-              <a:lnSpc>
-                <a:spcPct val="150000"/>
-              </a:lnSpc>
-              <a:buFont typeface="+mj-lt"/>
-              <a:buAutoNum type="arabicPeriod"/>
-            </a:pPr>
-            <a:r>
-              <a:rPr lang="ru-RU" sz="2000" dirty="0">
-                <a:solidFill>
-                  <a:srgbClr val="1B1F3A"/>
-                </a:solidFill>
-                <a:latin typeface="Georgia" pitchFamily="18" charset="0"/>
-                <a:ea typeface="Georgia" pitchFamily="18" charset="-122"/>
-                <a:cs typeface="Georgia" pitchFamily="18" charset="-120"/>
-              </a:rPr>
-              <a:t>А</a:t>
-            </a:r>
-            <a:r>
-              <a:rPr lang="en-US" sz="2000" dirty="0" err="1">
-                <a:solidFill>
-                  <a:srgbClr val="1B1F3A"/>
-                </a:solidFill>
-                <a:latin typeface="Georgia" pitchFamily="18" charset="0"/>
-                <a:ea typeface="Georgia" pitchFamily="18" charset="-122"/>
-                <a:cs typeface="Georgia" pitchFamily="18" charset="-120"/>
-              </a:rPr>
-              <a:t>гент</a:t>
-            </a:r>
-            <a:r>
-              <a:rPr lang="en-US" sz="2000" dirty="0">
-                <a:solidFill>
-                  <a:srgbClr val="1B1F3A"/>
-                </a:solidFill>
-                <a:latin typeface="Georgia" pitchFamily="18" charset="0"/>
-                <a:ea typeface="Georgia" pitchFamily="18" charset="-122"/>
-                <a:cs typeface="Georgia" pitchFamily="18" charset="-120"/>
-              </a:rPr>
-              <a:t> выбирает </a:t>
-            </a:r>
-            <a:r>
-              <a:rPr lang="en-US" sz="2000" dirty="0" err="1">
-                <a:solidFill>
-                  <a:srgbClr val="1B1F3A"/>
-                </a:solidFill>
-                <a:latin typeface="Georgia" pitchFamily="18" charset="0"/>
-                <a:ea typeface="Georgia" pitchFamily="18" charset="-122"/>
-                <a:cs typeface="Georgia" pitchFamily="18" charset="-120"/>
-              </a:rPr>
-              <a:t>действие</a:t>
-            </a:r>
-            <a:r>
-              <a:rPr lang="en-US" sz="2000" dirty="0">
-                <a:solidFill>
-                  <a:srgbClr val="1B1F3A"/>
-                </a:solidFill>
-                <a:latin typeface="Georgia" pitchFamily="18" charset="0"/>
-                <a:ea typeface="Georgia" pitchFamily="18" charset="-122"/>
-                <a:cs typeface="Georgia" pitchFamily="18" charset="-120"/>
-              </a:rPr>
-              <a:t> ε-</a:t>
-            </a:r>
-            <a:r>
-              <a:rPr lang="en-US" sz="2000" dirty="0" err="1">
-                <a:solidFill>
-                  <a:srgbClr val="1B1F3A"/>
-                </a:solidFill>
-                <a:latin typeface="Georgia" pitchFamily="18" charset="0"/>
-                <a:ea typeface="Georgia" pitchFamily="18" charset="-122"/>
-                <a:cs typeface="Georgia" pitchFamily="18" charset="-120"/>
-              </a:rPr>
-              <a:t>жадно</a:t>
-            </a:r>
-            <a:endParaRPr lang="ru-RU" sz="2000" dirty="0">
-              <a:solidFill>
-                <a:srgbClr val="1B1F3A"/>
-              </a:solidFill>
-              <a:latin typeface="Georgia" pitchFamily="18" charset="0"/>
-              <a:ea typeface="Georgia" pitchFamily="18" charset="-122"/>
-              <a:cs typeface="Georgia" pitchFamily="18" charset="-120"/>
-            </a:endParaRPr>
-          </a:p>
-          <a:p>
-            <a:pPr marL="342900" indent="-342900" algn="l">
-              <a:lnSpc>
-                <a:spcPct val="150000"/>
-              </a:lnSpc>
-              <a:buFont typeface="+mj-lt"/>
-              <a:buAutoNum type="arabicPeriod"/>
-            </a:pPr>
-            <a:r>
-              <a:rPr lang="ru-RU" sz="2000" dirty="0">
-                <a:solidFill>
-                  <a:srgbClr val="1B1F3A"/>
-                </a:solidFill>
-                <a:latin typeface="Georgia" pitchFamily="18" charset="0"/>
-                <a:ea typeface="Georgia" pitchFamily="18" charset="-122"/>
-                <a:cs typeface="Georgia" pitchFamily="18" charset="-120"/>
-              </a:rPr>
-              <a:t>С</a:t>
-            </a:r>
-            <a:r>
-              <a:rPr lang="en-US" sz="2000" dirty="0" err="1">
-                <a:solidFill>
-                  <a:srgbClr val="1B1F3A"/>
-                </a:solidFill>
-                <a:latin typeface="Georgia" pitchFamily="18" charset="0"/>
-                <a:ea typeface="Georgia" pitchFamily="18" charset="-122"/>
-                <a:cs typeface="Georgia" pitchFamily="18" charset="-120"/>
-              </a:rPr>
-              <a:t>реда</a:t>
-            </a:r>
-            <a:r>
-              <a:rPr lang="en-US" sz="2000" dirty="0">
-                <a:solidFill>
-                  <a:srgbClr val="1B1F3A"/>
-                </a:solidFill>
-                <a:latin typeface="Georgia" pitchFamily="18" charset="0"/>
-                <a:ea typeface="Georgia" pitchFamily="18" charset="-122"/>
-                <a:cs typeface="Georgia" pitchFamily="18" charset="-120"/>
-              </a:rPr>
-              <a:t> </a:t>
-            </a:r>
-            <a:r>
-              <a:rPr lang="en-US" sz="2000" dirty="0" err="1">
-                <a:solidFill>
-                  <a:srgbClr val="1B1F3A"/>
-                </a:solidFill>
-                <a:latin typeface="Georgia" pitchFamily="18" charset="0"/>
-                <a:ea typeface="Georgia" pitchFamily="18" charset="-122"/>
-                <a:cs typeface="Georgia" pitchFamily="18" charset="-120"/>
-              </a:rPr>
-              <a:t>выдаёт</a:t>
-            </a:r>
-            <a:r>
-              <a:rPr lang="en-US" sz="2000" dirty="0">
-                <a:solidFill>
-                  <a:srgbClr val="1B1F3A"/>
-                </a:solidFill>
-                <a:latin typeface="Georgia" pitchFamily="18" charset="0"/>
-                <a:ea typeface="Georgia" pitchFamily="18" charset="-122"/>
-                <a:cs typeface="Georgia" pitchFamily="18" charset="-120"/>
-              </a:rPr>
-              <a:t> </a:t>
-            </a:r>
-            <a:r>
-              <a:rPr lang="en-US" sz="2000" dirty="0" err="1">
-                <a:solidFill>
-                  <a:srgbClr val="1B1F3A"/>
-                </a:solidFill>
-                <a:latin typeface="Georgia" pitchFamily="18" charset="0"/>
-                <a:ea typeface="Georgia" pitchFamily="18" charset="-122"/>
-                <a:cs typeface="Georgia" pitchFamily="18" charset="-120"/>
-              </a:rPr>
-              <a:t>награду</a:t>
-            </a:r>
-            <a:r>
-              <a:rPr lang="en-US" sz="2000" dirty="0">
-                <a:solidFill>
-                  <a:srgbClr val="1B1F3A"/>
-                </a:solidFill>
-                <a:latin typeface="Georgia" pitchFamily="18" charset="0"/>
-                <a:ea typeface="Georgia" pitchFamily="18" charset="-122"/>
-                <a:cs typeface="Georgia" pitchFamily="18" charset="-120"/>
-              </a:rPr>
-              <a:t> </a:t>
-            </a:r>
-          </a:p>
-          <a:p>
-            <a:pPr marL="342900" indent="-342900" algn="l">
-              <a:lnSpc>
-                <a:spcPct val="150000"/>
-              </a:lnSpc>
-              <a:buFont typeface="+mj-lt"/>
-              <a:buAutoNum type="arabicPeriod"/>
-            </a:pPr>
-            <a:r>
-              <a:rPr lang="en-US" sz="2000" dirty="0">
-                <a:solidFill>
-                  <a:srgbClr val="1B1F3A"/>
-                </a:solidFill>
-                <a:latin typeface="Georgia" pitchFamily="18" charset="0"/>
-                <a:ea typeface="Georgia" pitchFamily="18" charset="-122"/>
-                <a:cs typeface="Georgia" pitchFamily="18" charset="-120"/>
-              </a:rPr>
-              <a:t>Q-</a:t>
-            </a:r>
-            <a:r>
-              <a:rPr lang="en-US" sz="2000" dirty="0" err="1">
-                <a:solidFill>
-                  <a:srgbClr val="1B1F3A"/>
-                </a:solidFill>
-                <a:latin typeface="Georgia" pitchFamily="18" charset="0"/>
-                <a:ea typeface="Georgia" pitchFamily="18" charset="-122"/>
-                <a:cs typeface="Georgia" pitchFamily="18" charset="-120"/>
-              </a:rPr>
-              <a:t>таблица</a:t>
-            </a:r>
-            <a:r>
-              <a:rPr lang="en-US" sz="2000" dirty="0">
-                <a:solidFill>
-                  <a:srgbClr val="1B1F3A"/>
-                </a:solidFill>
-                <a:latin typeface="Georgia" pitchFamily="18" charset="0"/>
-                <a:ea typeface="Georgia" pitchFamily="18" charset="-122"/>
-                <a:cs typeface="Georgia" pitchFamily="18" charset="-120"/>
-              </a:rPr>
-              <a:t> обновляется.</a:t>
-            </a:r>
-            <a:endParaRPr lang="en-US" sz="2000" dirty="0"/>
-          </a:p>
-        </p:txBody>
-      </p:sp>
-      <p:pic>
-        <p:nvPicPr>
-          <p:cNvPr id="7" name="Рисунок 6">
-            <a:extLst>
-              <a:ext uri="{FF2B5EF4-FFF2-40B4-BE49-F238E27FC236}">
-                <a16:creationId xmlns:a16="http://schemas.microsoft.com/office/drawing/2014/main" id="{D7254567-1044-3F4C-5791-AF9D5FA54352}"/>
-              </a:ext>
-            </a:extLst>
-          </p:cNvPr>
-          <p:cNvPicPr>
-            <a:picLocks noChangeAspect="1"/>
-          </p:cNvPicPr>
-          <p:nvPr/>
-        </p:nvPicPr>
-        <p:blipFill>
-          <a:blip r:embed="rId3"/>
-          <a:stretch>
-            <a:fillRect/>
-          </a:stretch>
-        </p:blipFill>
-        <p:spPr>
-          <a:xfrm>
-            <a:off x="6141180" y="812800"/>
-            <a:ext cx="5076582" cy="5573521"/>
-          </a:xfrm>
-          <a:prstGeom prst="roundRect">
-            <a:avLst>
-              <a:gd name="adj" fmla="val 4967"/>
-            </a:avLst>
-          </a:prstGeom>
-          <a:solidFill>
-            <a:srgbClr val="FFFFFF">
-              <a:shade val="85000"/>
-            </a:srgbClr>
-          </a:solidFill>
-          <a:ln>
-            <a:noFill/>
-          </a:ln>
-          <a:effectLst/>
-        </p:spPr>
-      </p:pic>
-    </p:spTree>
-  </p:cSld>
-  <p:clrMapOvr>
-    <a:masterClrMapping/>
-  </p:clrMapOvr>
-</p:sld>
-</file>
-
-<file path=ppt/slides/slide7.xml><?xml version="1.0" encoding="utf-8"?>
-<p:sld xmlns:a="http://schemas.openxmlformats.org/drawingml/2006/main" xmlns:r="http://schemas.openxmlformats.org/officeDocument/2006/relationships" xmlns:p="http://schemas.openxmlformats.org/presentationml/2006/main">
-  <p:cSld name="Slide 7">
-    <p:bg>
-      <p:bgPr>
-        <a:solidFill>
-          <a:srgbClr val="F6F4EF"/>
-        </a:solidFill>
-        <a:effectLst/>
-      </p:bgPr>
-    </p:bg>
-    <p:spTree>
-      <p:nvGrpSpPr>
-        <p:cNvPr id="1" name=""/>
-        <p:cNvGrpSpPr/>
-        <p:nvPr/>
-      </p:nvGrpSpPr>
-      <p:grpSpPr>
-        <a:xfrm>
-          <a:off x="0" y="0"/>
-          <a:ext cx="0" cy="0"/>
-          <a:chOff x="0" y="0"/>
-          <a:chExt cx="0" cy="0"/>
-        </a:xfrm>
-      </p:grpSpPr>
-      <p:sp>
-        <p:nvSpPr>
-          <p:cNvPr id="2" name="Text 0"/>
-          <p:cNvSpPr>
-            <a:spLocks noGrp="1"/>
-          </p:cNvSpPr>
-          <p:nvPr>
-            <p:ph type="title"/>
-          </p:nvPr>
-        </p:nvSpPr>
-        <p:spPr>
-          <a:xfrm>
-            <a:off x="812800" y="812800"/>
-            <a:ext cx="10883392" cy="528241"/>
-          </a:xfrm>
-          <a:prstGeom prst="rect">
-            <a:avLst/>
-          </a:prstGeom>
-          <a:noFill/>
-          <a:ln/>
-        </p:spPr>
-        <p:txBody>
-          <a:bodyPr wrap="square" lIns="0" tIns="0" rIns="0" bIns="0" rtlCol="0" anchor="t">
-            <a:normAutofit/>
-          </a:bodyPr>
-          <a:lstStyle/>
-          <a:p>
-            <a:pPr marL="0" indent="0" algn="l">
-              <a:lnSpc>
-                <a:spcPts val="3960"/>
-              </a:lnSpc>
-              <a:buNone/>
-            </a:pPr>
-            <a:r>
-              <a:rPr lang="en-US" sz="3600" b="0" i="0" dirty="0">
-                <a:solidFill>
-                  <a:srgbClr val="1B1F3A"/>
-                </a:solidFill>
-                <a:latin typeface="Georgia" pitchFamily="18" charset="0"/>
-                <a:ea typeface="Georgia" pitchFamily="18" charset="-122"/>
-                <a:cs typeface="Georgia" pitchFamily="18" charset="-120"/>
-              </a:rPr>
-              <a:t>Генерация лабиринта</a:t>
-            </a:r>
-            <a:endParaRPr lang="en-US" sz="3600" dirty="0"/>
-          </a:p>
-        </p:txBody>
-      </p:sp>
-      <p:sp>
-        <p:nvSpPr>
-          <p:cNvPr id="3" name="Text 1"/>
-          <p:cNvSpPr/>
-          <p:nvPr/>
-        </p:nvSpPr>
-        <p:spPr>
-          <a:xfrm>
-            <a:off x="849511" y="2687241"/>
-            <a:ext cx="5116124" cy="1447701"/>
-          </a:xfrm>
-          <a:prstGeom prst="rect">
-            <a:avLst/>
-          </a:prstGeom>
-          <a:noFill/>
-          <a:ln/>
-        </p:spPr>
-        <p:txBody>
-          <a:bodyPr wrap="square" lIns="0" tIns="0" rIns="0" bIns="0" rtlCol="0" anchor="t">
-            <a:normAutofit/>
-          </a:bodyPr>
-          <a:lstStyle/>
-          <a:p>
-            <a:pPr marL="217289" indent="-217289" algn="l">
-              <a:lnSpc>
-                <a:spcPts val="2240"/>
-              </a:lnSpc>
-              <a:buSzPct val="100000"/>
-              <a:buFontTx/>
-              <a:buAutoNum type="arabicPeriod"/>
-            </a:pPr>
-            <a:r>
-              <a:rPr lang="en-US" sz="1600" dirty="0">
-                <a:solidFill>
-                  <a:srgbClr val="1B1F3A"/>
-                </a:solidFill>
-                <a:latin typeface="Georgia" pitchFamily="18" charset="0"/>
-                <a:ea typeface="Georgia" pitchFamily="18" charset="-122"/>
-                <a:cs typeface="Georgia" pitchFamily="18" charset="-120"/>
-              </a:rPr>
-              <a:t>Сетка (2·rows+1) × (2·cols+1): комнаты и стены</a:t>
-            </a:r>
-            <a:endParaRPr lang="en-US" sz="1600" dirty="0"/>
-          </a:p>
-          <a:p>
-            <a:pPr marL="217289" indent="-217289" algn="l">
-              <a:lnSpc>
-                <a:spcPts val="2240"/>
-              </a:lnSpc>
-              <a:buSzPct val="100000"/>
-              <a:buFontTx/>
-              <a:buAutoNum type="arabicPeriod"/>
-            </a:pPr>
-            <a:r>
-              <a:rPr lang="en-US" sz="1600" dirty="0">
-                <a:solidFill>
-                  <a:srgbClr val="1B1F3A"/>
-                </a:solidFill>
-                <a:latin typeface="Georgia" pitchFamily="18" charset="0"/>
-                <a:ea typeface="Georgia" pitchFamily="18" charset="-122"/>
-                <a:cs typeface="Georgia" pitchFamily="18" charset="-120"/>
-              </a:rPr>
-              <a:t>Поиск в глубину с возвратом прорывает проходы на стеке, без рекурсии</a:t>
-            </a:r>
-            <a:endParaRPr lang="en-US" sz="1600" dirty="0"/>
-          </a:p>
-          <a:p>
-            <a:pPr marL="217289" indent="-217289" algn="l">
-              <a:lnSpc>
-                <a:spcPts val="2240"/>
-              </a:lnSpc>
-              <a:buSzPct val="100000"/>
-              <a:buFontTx/>
-              <a:buAutoNum type="arabicPeriod"/>
-            </a:pPr>
-            <a:r>
-              <a:rPr lang="en-US" sz="1600" dirty="0">
-                <a:solidFill>
-                  <a:srgbClr val="1B1F3A"/>
-                </a:solidFill>
-                <a:latin typeface="Georgia" pitchFamily="18" charset="0"/>
-                <a:ea typeface="Georgia" pitchFamily="18" charset="-122"/>
-                <a:cs typeface="Georgia" pitchFamily="18" charset="-120"/>
-              </a:rPr>
-              <a:t>Мышь справа внизу, сыр слева вверху, вода и ток случайно</a:t>
-            </a:r>
-            <a:endParaRPr lang="en-US" sz="1600" dirty="0"/>
-          </a:p>
-        </p:txBody>
-      </p:sp>
-      <p:pic>
-        <p:nvPicPr>
-          <p:cNvPr id="6" name="Рисунок 5">
-            <a:extLst>
-              <a:ext uri="{FF2B5EF4-FFF2-40B4-BE49-F238E27FC236}">
-                <a16:creationId xmlns:a16="http://schemas.microsoft.com/office/drawing/2014/main" id="{02E088B9-BB29-B5E9-AABA-FAC25401897E}"/>
-              </a:ext>
-            </a:extLst>
-          </p:cNvPr>
-          <p:cNvPicPr>
-            <a:picLocks noChangeAspect="1"/>
-          </p:cNvPicPr>
-          <p:nvPr/>
-        </p:nvPicPr>
-        <p:blipFill>
-          <a:blip r:embed="rId3"/>
-          <a:stretch>
-            <a:fillRect/>
-          </a:stretch>
-        </p:blipFill>
-        <p:spPr>
-          <a:xfrm>
-            <a:off x="6631499" y="1464733"/>
-            <a:ext cx="4294752" cy="3928533"/>
-          </a:xfrm>
-          <a:prstGeom prst="roundRect">
-            <a:avLst>
-              <a:gd name="adj" fmla="val 2290"/>
-            </a:avLst>
-          </a:prstGeom>
-          <a:solidFill>
-            <a:srgbClr val="FFFFFF">
-              <a:shade val="85000"/>
-            </a:srgbClr>
-          </a:solidFill>
-          <a:ln>
-            <a:noFill/>
-          </a:ln>
-          <a:effectLst/>
-        </p:spPr>
-      </p:pic>
-    </p:spTree>
-  </p:cSld>
-  <p:clrMapOvr>
-    <a:masterClrMapping/>
-  </p:clrMapOvr>
-</p:sld>
-</file>
-
-<file path=ppt/slides/slide8.xml><?xml version="1.0" encoding="utf-8"?>
+<file path=ppt/slides/slide11.xml><?xml version="1.0" encoding="utf-8"?>
 <p:sld xmlns:a="http://schemas.openxmlformats.org/drawingml/2006/main" xmlns:r="http://schemas.openxmlformats.org/officeDocument/2006/relationships" xmlns:p="http://schemas.openxmlformats.org/presentationml/2006/main">
   <p:cSld name="Slide 8">
     <p:bg>
@@ -4379,7 +2445,7 @@
 </p:sld>
 </file>
 
-<file path=ppt/slides/slide9.xml><?xml version="1.0" encoding="utf-8"?>
+<file path=ppt/slides/slide12.xml><?xml version="1.0" encoding="utf-8"?>
 <p:sld xmlns:a="http://schemas.openxmlformats.org/drawingml/2006/main" xmlns:r="http://schemas.openxmlformats.org/officeDocument/2006/relationships" xmlns:p="http://schemas.openxmlformats.org/presentationml/2006/main">
   <p:cSld name="Slide 9">
     <p:bg>
@@ -4693,6 +2759,3032 @@
           </a:p>
         </p:txBody>
       </p:sp>
+    </p:spTree>
+  </p:cSld>
+  <p:clrMapOvr>
+    <a:masterClrMapping/>
+  </p:clrMapOvr>
+</p:sld>
+</file>
+
+<file path=ppt/slides/slide13.xml><?xml version="1.0" encoding="utf-8"?>
+<p:sld xmlns:a="http://schemas.openxmlformats.org/drawingml/2006/main" xmlns:r="http://schemas.openxmlformats.org/officeDocument/2006/relationships" xmlns:p="http://schemas.openxmlformats.org/presentationml/2006/main">
+  <p:cSld>
+    <p:spTree>
+      <p:nvGrpSpPr>
+        <p:cNvPr id="1" name=""/>
+        <p:cNvGrpSpPr/>
+        <p:nvPr/>
+      </p:nvGrpSpPr>
+      <p:grpSpPr>
+        <a:xfrm>
+          <a:off x="0" y="0"/>
+          <a:ext cx="0" cy="0"/>
+          <a:chOff x="0" y="0"/>
+          <a:chExt cx="0" cy="0"/>
+        </a:xfrm>
+      </p:grpSpPr>
+      <p:sp>
+        <p:nvSpPr>
+          <p:cNvPr id="2" name="Заголовок 1">
+            <a:extLst>
+              <a:ext uri="{FF2B5EF4-FFF2-40B4-BE49-F238E27FC236}">
+                <a16:creationId xmlns:a16="http://schemas.microsoft.com/office/drawing/2014/main" id="{C6BEAB6F-FEC2-7D84-3D5C-AF3756AE28E1}"/>
+              </a:ext>
+            </a:extLst>
+          </p:cNvPr>
+          <p:cNvSpPr>
+            <a:spLocks noGrp="1"/>
+          </p:cNvSpPr>
+          <p:nvPr>
+            <p:ph type="title"/>
+          </p:nvPr>
+        </p:nvSpPr>
+        <p:spPr>
+          <a:xfrm>
+            <a:off x="812800" y="2794668"/>
+            <a:ext cx="10566400" cy="1268663"/>
+          </a:xfrm>
+        </p:spPr>
+        <p:txBody>
+          <a:bodyPr anchor="ctr"/>
+          <a:lstStyle/>
+          <a:p>
+            <a:pPr algn="ctr"/>
+            <a:r>
+              <a:rPr lang="ru-RU" sz="7200" dirty="0"/>
+              <a:t>Спасибо за внимание!</a:t>
+            </a:r>
+          </a:p>
+        </p:txBody>
+      </p:sp>
+    </p:spTree>
+    <p:extLst>
+      <p:ext uri="{BB962C8B-B14F-4D97-AF65-F5344CB8AC3E}">
+        <p14:creationId xmlns:p14="http://schemas.microsoft.com/office/powerpoint/2010/main" val="3955243229"/>
+      </p:ext>
+    </p:extLst>
+  </p:cSld>
+  <p:clrMapOvr>
+    <a:masterClrMapping/>
+  </p:clrMapOvr>
+</p:sld>
+</file>
+
+<file path=ppt/slides/slide2.xml><?xml version="1.0" encoding="utf-8"?>
+<p:sld xmlns:a="http://schemas.openxmlformats.org/drawingml/2006/main" xmlns:r="http://schemas.openxmlformats.org/officeDocument/2006/relationships" xmlns:p="http://schemas.openxmlformats.org/presentationml/2006/main">
+  <p:cSld name="Slide 2">
+    <p:bg>
+      <p:bgPr>
+        <a:solidFill>
+          <a:srgbClr val="F6F4EF"/>
+        </a:solidFill>
+        <a:effectLst/>
+      </p:bgPr>
+    </p:bg>
+    <p:spTree>
+      <p:nvGrpSpPr>
+        <p:cNvPr id="1" name=""/>
+        <p:cNvGrpSpPr/>
+        <p:nvPr/>
+      </p:nvGrpSpPr>
+      <p:grpSpPr>
+        <a:xfrm>
+          <a:off x="0" y="0"/>
+          <a:ext cx="0" cy="0"/>
+          <a:chOff x="0" y="0"/>
+          <a:chExt cx="0" cy="0"/>
+        </a:xfrm>
+      </p:grpSpPr>
+      <p:sp>
+        <p:nvSpPr>
+          <p:cNvPr id="2" name="Text 0"/>
+          <p:cNvSpPr>
+            <a:spLocks noGrp="1"/>
+          </p:cNvSpPr>
+          <p:nvPr>
+            <p:ph type="title"/>
+          </p:nvPr>
+        </p:nvSpPr>
+        <p:spPr>
+          <a:xfrm>
+            <a:off x="812800" y="812800"/>
+            <a:ext cx="10883392" cy="528241"/>
+          </a:xfrm>
+          <a:prstGeom prst="rect">
+            <a:avLst/>
+          </a:prstGeom>
+          <a:noFill/>
+          <a:ln/>
+        </p:spPr>
+        <p:txBody>
+          <a:bodyPr wrap="square" lIns="0" tIns="0" rIns="0" bIns="0" rtlCol="0" anchor="t">
+            <a:normAutofit/>
+          </a:bodyPr>
+          <a:lstStyle/>
+          <a:p>
+            <a:pPr marL="0" indent="0" algn="l">
+              <a:lnSpc>
+                <a:spcPts val="3960"/>
+              </a:lnSpc>
+              <a:buNone/>
+            </a:pPr>
+            <a:r>
+              <a:rPr lang="en-US" sz="3600" b="0" i="0" dirty="0">
+                <a:solidFill>
+                  <a:srgbClr val="1B1F3A"/>
+                </a:solidFill>
+                <a:latin typeface="Georgia" pitchFamily="18" charset="0"/>
+                <a:ea typeface="Georgia" pitchFamily="18" charset="-122"/>
+                <a:cs typeface="Georgia" pitchFamily="18" charset="-120"/>
+              </a:rPr>
+              <a:t>Проблема и подход</a:t>
+            </a:r>
+            <a:endParaRPr lang="en-US" sz="3600" dirty="0"/>
+          </a:p>
+        </p:txBody>
+      </p:sp>
+      <p:sp>
+        <p:nvSpPr>
+          <p:cNvPr id="3" name="Text 1"/>
+          <p:cNvSpPr/>
+          <p:nvPr/>
+        </p:nvSpPr>
+        <p:spPr>
+          <a:xfrm>
+            <a:off x="889508" y="2260600"/>
+            <a:ext cx="5076127" cy="2301081"/>
+          </a:xfrm>
+          <a:prstGeom prst="rect">
+            <a:avLst/>
+          </a:prstGeom>
+          <a:noFill/>
+          <a:ln/>
+        </p:spPr>
+        <p:txBody>
+          <a:bodyPr wrap="square" lIns="0" tIns="0" rIns="0" bIns="0" rtlCol="0" anchor="t">
+            <a:normAutofit/>
+          </a:bodyPr>
+          <a:lstStyle/>
+          <a:p>
+            <a:pPr marL="177292" indent="-177292" algn="l">
+              <a:lnSpc>
+                <a:spcPts val="2240"/>
+              </a:lnSpc>
+              <a:buSzPct val="100000"/>
+              <a:buChar char="•"/>
+            </a:pPr>
+            <a:r>
+              <a:rPr lang="en-US" sz="1600" dirty="0">
+                <a:solidFill>
+                  <a:srgbClr val="1B1F3A"/>
+                </a:solidFill>
+                <a:latin typeface="Georgia" pitchFamily="18" charset="0"/>
+                <a:ea typeface="Georgia" pitchFamily="18" charset="-122"/>
+                <a:cs typeface="Georgia" pitchFamily="18" charset="-120"/>
+              </a:rPr>
+              <a:t>Мышь ищет сыр в лабиринте и не знает его карты</a:t>
+            </a:r>
+            <a:endParaRPr lang="en-US" sz="1600" dirty="0"/>
+          </a:p>
+          <a:p>
+            <a:pPr marL="177292" indent="-177292" algn="l">
+              <a:lnSpc>
+                <a:spcPts val="2240"/>
+              </a:lnSpc>
+              <a:buSzPct val="100000"/>
+              <a:buChar char="•"/>
+            </a:pPr>
+            <a:r>
+              <a:rPr lang="en-US" sz="1600" dirty="0">
+                <a:solidFill>
+                  <a:srgbClr val="1B1F3A"/>
+                </a:solidFill>
+                <a:latin typeface="Georgia" pitchFamily="18" charset="0"/>
+                <a:ea typeface="Georgia" pitchFamily="18" charset="-122"/>
+                <a:cs typeface="Georgia" pitchFamily="18" charset="-120"/>
+              </a:rPr>
+              <a:t>На каждом шаге она выбирает направление, а среда сообщает выигрыш или проигрыш: это подкрепление</a:t>
+            </a:r>
+            <a:endParaRPr lang="en-US" sz="1600" dirty="0"/>
+          </a:p>
+          <a:p>
+            <a:pPr marL="177292" indent="-177292" algn="l">
+              <a:lnSpc>
+                <a:spcPts val="2240"/>
+              </a:lnSpc>
+              <a:buSzPct val="100000"/>
+              <a:buChar char="•"/>
+            </a:pPr>
+            <a:r>
+              <a:rPr lang="en-US" sz="1600" dirty="0">
+                <a:solidFill>
+                  <a:srgbClr val="1B1F3A"/>
+                </a:solidFill>
+                <a:latin typeface="Georgia" pitchFamily="18" charset="0"/>
+                <a:ea typeface="Georgia" pitchFamily="18" charset="-122"/>
+                <a:cs typeface="Georgia" pitchFamily="18" charset="-120"/>
+              </a:rPr>
+              <a:t>Цель: найти маршрут с максимальной суммарной наградой, к сыру через воду и в обход тока</a:t>
+            </a:r>
+            <a:endParaRPr lang="en-US" sz="1600" dirty="0"/>
+          </a:p>
+        </p:txBody>
+      </p:sp>
+      <p:pic>
+        <p:nvPicPr>
+          <p:cNvPr id="8" name="Рисунок 7">
+            <a:extLst>
+              <a:ext uri="{FF2B5EF4-FFF2-40B4-BE49-F238E27FC236}">
+                <a16:creationId xmlns:a16="http://schemas.microsoft.com/office/drawing/2014/main" id="{7BDDEAFF-834A-B396-9280-6B0E21057926}"/>
+              </a:ext>
+            </a:extLst>
+          </p:cNvPr>
+          <p:cNvPicPr>
+            <a:picLocks noChangeAspect="1"/>
+          </p:cNvPicPr>
+          <p:nvPr/>
+        </p:nvPicPr>
+        <p:blipFill>
+          <a:blip r:embed="rId3"/>
+          <a:srcRect l="6786" t="2296" r="12871" b="5893"/>
+          <a:stretch>
+            <a:fillRect/>
+          </a:stretch>
+        </p:blipFill>
+        <p:spPr>
+          <a:xfrm>
+            <a:off x="6988413" y="1854200"/>
+            <a:ext cx="3508138" cy="4070350"/>
+          </a:xfrm>
+          <a:prstGeom prst="roundRect">
+            <a:avLst>
+              <a:gd name="adj" fmla="val 6012"/>
+            </a:avLst>
+          </a:prstGeom>
+          <a:solidFill>
+            <a:srgbClr val="FFFFFF">
+              <a:shade val="85000"/>
+            </a:srgbClr>
+          </a:solidFill>
+          <a:ln>
+            <a:noFill/>
+          </a:ln>
+          <a:effectLst/>
+        </p:spPr>
+      </p:pic>
+    </p:spTree>
+  </p:cSld>
+  <p:clrMapOvr>
+    <a:masterClrMapping/>
+  </p:clrMapOvr>
+</p:sld>
+</file>
+
+<file path=ppt/slides/slide3.xml><?xml version="1.0" encoding="utf-8"?>
+<p:sld xmlns:a="http://schemas.openxmlformats.org/drawingml/2006/main" xmlns:r="http://schemas.openxmlformats.org/officeDocument/2006/relationships" xmlns:p="http://schemas.openxmlformats.org/presentationml/2006/main">
+  <p:cSld name="Slide 3">
+    <p:bg>
+      <p:bgPr>
+        <a:solidFill>
+          <a:srgbClr val="F6F4EF"/>
+        </a:solidFill>
+        <a:effectLst/>
+      </p:bgPr>
+    </p:bg>
+    <p:spTree>
+      <p:nvGrpSpPr>
+        <p:cNvPr id="1" name=""/>
+        <p:cNvGrpSpPr/>
+        <p:nvPr/>
+      </p:nvGrpSpPr>
+      <p:grpSpPr>
+        <a:xfrm>
+          <a:off x="0" y="0"/>
+          <a:ext cx="0" cy="0"/>
+          <a:chOff x="0" y="0"/>
+          <a:chExt cx="0" cy="0"/>
+        </a:xfrm>
+      </p:grpSpPr>
+      <p:sp>
+        <p:nvSpPr>
+          <p:cNvPr id="2" name="Text 0"/>
+          <p:cNvSpPr>
+            <a:spLocks noGrp="1"/>
+          </p:cNvSpPr>
+          <p:nvPr>
+            <p:ph type="title"/>
+          </p:nvPr>
+        </p:nvSpPr>
+        <p:spPr>
+          <a:xfrm>
+            <a:off x="812800" y="812800"/>
+            <a:ext cx="10883392" cy="528241"/>
+          </a:xfrm>
+          <a:prstGeom prst="rect">
+            <a:avLst/>
+          </a:prstGeom>
+          <a:noFill/>
+          <a:ln/>
+        </p:spPr>
+        <p:txBody>
+          <a:bodyPr wrap="square" lIns="0" tIns="0" rIns="0" bIns="0" rtlCol="0" anchor="t">
+            <a:normAutofit/>
+          </a:bodyPr>
+          <a:lstStyle/>
+          <a:p>
+            <a:pPr marL="0" indent="0" algn="l">
+              <a:lnSpc>
+                <a:spcPts val="3960"/>
+              </a:lnSpc>
+              <a:buNone/>
+            </a:pPr>
+            <a:r>
+              <a:rPr lang="en-US" sz="3600" b="0" i="0" dirty="0">
+                <a:solidFill>
+                  <a:srgbClr val="1B1F3A"/>
+                </a:solidFill>
+                <a:latin typeface="Georgia" pitchFamily="18" charset="0"/>
+                <a:ea typeface="Georgia" pitchFamily="18" charset="-122"/>
+                <a:cs typeface="Georgia" pitchFamily="18" charset="-120"/>
+              </a:rPr>
+              <a:t>Награды среды</a:t>
+            </a:r>
+            <a:endParaRPr lang="en-US" sz="3600" dirty="0"/>
+          </a:p>
+        </p:txBody>
+      </p:sp>
+      <p:sp>
+        <p:nvSpPr>
+          <p:cNvPr id="3" name="Shape 1"/>
+          <p:cNvSpPr/>
+          <p:nvPr/>
+        </p:nvSpPr>
+        <p:spPr>
+          <a:xfrm>
+            <a:off x="815975" y="1623616"/>
+            <a:ext cx="2482850" cy="2238375"/>
+          </a:xfrm>
+          <a:prstGeom prst="roundRect">
+            <a:avLst>
+              <a:gd name="adj" fmla="val 4397"/>
+            </a:avLst>
+          </a:prstGeom>
+          <a:solidFill>
+            <a:srgbClr val="FFFFFF"/>
+          </a:solidFill>
+          <a:ln w="6350">
+            <a:solidFill>
+              <a:srgbClr val="E0DCCF"/>
+            </a:solidFill>
+            <a:prstDash val="solid"/>
+          </a:ln>
+        </p:spPr>
+        <p:txBody>
+          <a:bodyPr/>
+          <a:lstStyle/>
+          <a:p>
+            <a:endParaRPr lang="ru-RU"/>
+          </a:p>
+        </p:txBody>
+      </p:sp>
+      <p:sp>
+        <p:nvSpPr>
+          <p:cNvPr id="4" name="Text 2"/>
+          <p:cNvSpPr/>
+          <p:nvPr/>
+        </p:nvSpPr>
+        <p:spPr>
+          <a:xfrm>
+            <a:off x="1073150" y="1880791"/>
+            <a:ext cx="2027555" cy="482600"/>
+          </a:xfrm>
+          <a:prstGeom prst="rect">
+            <a:avLst/>
+          </a:prstGeom>
+          <a:noFill/>
+          <a:ln/>
+        </p:spPr>
+        <p:txBody>
+          <a:bodyPr wrap="square" lIns="0" tIns="0" rIns="0" bIns="0" rtlCol="0" anchor="t">
+            <a:normAutofit/>
+          </a:bodyPr>
+          <a:lstStyle/>
+          <a:p>
+            <a:pPr marL="0" indent="0" algn="l">
+              <a:lnSpc>
+                <a:spcPts val="3600"/>
+              </a:lnSpc>
+              <a:buNone/>
+            </a:pPr>
+            <a:r>
+              <a:rPr lang="en-US" sz="3600" b="1" dirty="0">
+                <a:solidFill>
+                  <a:srgbClr val="B36B00"/>
+                </a:solidFill>
+                <a:latin typeface="Georgia" pitchFamily="18" charset="0"/>
+                <a:ea typeface="Georgia" pitchFamily="18" charset="-122"/>
+                <a:cs typeface="Georgia" pitchFamily="18" charset="-120"/>
+              </a:rPr>
+              <a:t>+10^7</a:t>
+            </a:r>
+            <a:endParaRPr lang="en-US" sz="3600" dirty="0"/>
+          </a:p>
+        </p:txBody>
+      </p:sp>
+      <p:sp>
+        <p:nvSpPr>
+          <p:cNvPr id="5" name="Text 3"/>
+          <p:cNvSpPr/>
+          <p:nvPr/>
+        </p:nvSpPr>
+        <p:spPr>
+          <a:xfrm>
+            <a:off x="1073150" y="2439591"/>
+            <a:ext cx="2027555" cy="317500"/>
+          </a:xfrm>
+          <a:prstGeom prst="rect">
+            <a:avLst/>
+          </a:prstGeom>
+          <a:noFill/>
+          <a:ln/>
+        </p:spPr>
+        <p:txBody>
+          <a:bodyPr wrap="square" lIns="0" tIns="0" rIns="0" bIns="0" rtlCol="0" anchor="t">
+            <a:normAutofit/>
+          </a:bodyPr>
+          <a:lstStyle/>
+          <a:p>
+            <a:pPr marL="0" indent="0" algn="l">
+              <a:lnSpc>
+                <a:spcPts val="2300"/>
+              </a:lnSpc>
+              <a:buNone/>
+            </a:pPr>
+            <a:r>
+              <a:rPr lang="en-US" sz="2000" b="1" dirty="0">
+                <a:solidFill>
+                  <a:srgbClr val="1B1F3A"/>
+                </a:solidFill>
+                <a:latin typeface="Georgia" pitchFamily="18" charset="0"/>
+                <a:ea typeface="Georgia" pitchFamily="18" charset="-122"/>
+                <a:cs typeface="Georgia" pitchFamily="18" charset="-120"/>
+              </a:rPr>
+              <a:t>Сыр</a:t>
+            </a:r>
+            <a:endParaRPr lang="en-US" sz="2000" dirty="0"/>
+          </a:p>
+        </p:txBody>
+      </p:sp>
+      <p:sp>
+        <p:nvSpPr>
+          <p:cNvPr id="6" name="Text 4"/>
+          <p:cNvSpPr/>
+          <p:nvPr/>
+        </p:nvSpPr>
+        <p:spPr>
+          <a:xfrm>
+            <a:off x="1073150" y="2833291"/>
+            <a:ext cx="2027555" cy="539750"/>
+          </a:xfrm>
+          <a:prstGeom prst="rect">
+            <a:avLst/>
+          </a:prstGeom>
+          <a:noFill/>
+          <a:ln/>
+        </p:spPr>
+        <p:txBody>
+          <a:bodyPr wrap="square" lIns="0" tIns="0" rIns="0" bIns="0" rtlCol="0" anchor="t">
+            <a:normAutofit/>
+          </a:bodyPr>
+          <a:lstStyle/>
+          <a:p>
+            <a:pPr marL="0" indent="0" algn="l">
+              <a:lnSpc>
+                <a:spcPts val="2025"/>
+              </a:lnSpc>
+              <a:buNone/>
+            </a:pPr>
+            <a:r>
+              <a:rPr lang="en-US" sz="1500" dirty="0">
+                <a:solidFill>
+                  <a:srgbClr val="3D4255"/>
+                </a:solidFill>
+                <a:latin typeface="Georgia" pitchFamily="18" charset="0"/>
+                <a:ea typeface="Georgia" pitchFamily="18" charset="-122"/>
+                <a:cs typeface="Georgia" pitchFamily="18" charset="-120"/>
+              </a:rPr>
+              <a:t>Главная награда, эпизод заканчивается</a:t>
+            </a:r>
+            <a:endParaRPr lang="en-US" sz="1500" dirty="0"/>
+          </a:p>
+        </p:txBody>
+      </p:sp>
+      <p:sp>
+        <p:nvSpPr>
+          <p:cNvPr id="7" name="Shape 5"/>
+          <p:cNvSpPr/>
+          <p:nvPr/>
+        </p:nvSpPr>
+        <p:spPr>
+          <a:xfrm>
+            <a:off x="3508375" y="1623616"/>
+            <a:ext cx="2482850" cy="2238375"/>
+          </a:xfrm>
+          <a:prstGeom prst="roundRect">
+            <a:avLst>
+              <a:gd name="adj" fmla="val 4397"/>
+            </a:avLst>
+          </a:prstGeom>
+          <a:solidFill>
+            <a:srgbClr val="FFFFFF"/>
+          </a:solidFill>
+          <a:ln w="6350">
+            <a:solidFill>
+              <a:srgbClr val="E0DCCF"/>
+            </a:solidFill>
+            <a:prstDash val="solid"/>
+          </a:ln>
+        </p:spPr>
+        <p:txBody>
+          <a:bodyPr/>
+          <a:lstStyle/>
+          <a:p>
+            <a:endParaRPr lang="ru-RU"/>
+          </a:p>
+        </p:txBody>
+      </p:sp>
+      <p:sp>
+        <p:nvSpPr>
+          <p:cNvPr id="8" name="Text 6"/>
+          <p:cNvSpPr/>
+          <p:nvPr/>
+        </p:nvSpPr>
+        <p:spPr>
+          <a:xfrm>
+            <a:off x="3765550" y="1880791"/>
+            <a:ext cx="2027555" cy="482600"/>
+          </a:xfrm>
+          <a:prstGeom prst="rect">
+            <a:avLst/>
+          </a:prstGeom>
+          <a:noFill/>
+          <a:ln/>
+        </p:spPr>
+        <p:txBody>
+          <a:bodyPr wrap="square" lIns="0" tIns="0" rIns="0" bIns="0" rtlCol="0" anchor="t">
+            <a:normAutofit/>
+          </a:bodyPr>
+          <a:lstStyle/>
+          <a:p>
+            <a:pPr marL="0" indent="0" algn="l">
+              <a:lnSpc>
+                <a:spcPts val="3600"/>
+              </a:lnSpc>
+              <a:buNone/>
+            </a:pPr>
+            <a:r>
+              <a:rPr lang="en-US" sz="3600" b="1" dirty="0">
+                <a:solidFill>
+                  <a:srgbClr val="B36B00"/>
+                </a:solidFill>
+                <a:latin typeface="Georgia" pitchFamily="18" charset="0"/>
+                <a:ea typeface="Georgia" pitchFamily="18" charset="-122"/>
+                <a:cs typeface="Georgia" pitchFamily="18" charset="-120"/>
+              </a:rPr>
+              <a:t>+10</a:t>
+            </a:r>
+            <a:endParaRPr lang="en-US" sz="3600" dirty="0"/>
+          </a:p>
+        </p:txBody>
+      </p:sp>
+      <p:sp>
+        <p:nvSpPr>
+          <p:cNvPr id="9" name="Text 7"/>
+          <p:cNvSpPr/>
+          <p:nvPr/>
+        </p:nvSpPr>
+        <p:spPr>
+          <a:xfrm>
+            <a:off x="3765550" y="2439591"/>
+            <a:ext cx="2027555" cy="317500"/>
+          </a:xfrm>
+          <a:prstGeom prst="rect">
+            <a:avLst/>
+          </a:prstGeom>
+          <a:noFill/>
+          <a:ln/>
+        </p:spPr>
+        <p:txBody>
+          <a:bodyPr wrap="square" lIns="0" tIns="0" rIns="0" bIns="0" rtlCol="0" anchor="t">
+            <a:normAutofit/>
+          </a:bodyPr>
+          <a:lstStyle/>
+          <a:p>
+            <a:pPr marL="0" indent="0" algn="l">
+              <a:lnSpc>
+                <a:spcPts val="2300"/>
+              </a:lnSpc>
+              <a:buNone/>
+            </a:pPr>
+            <a:r>
+              <a:rPr lang="en-US" sz="2000" b="1" dirty="0">
+                <a:solidFill>
+                  <a:srgbClr val="1B1F3A"/>
+                </a:solidFill>
+                <a:latin typeface="Georgia" pitchFamily="18" charset="0"/>
+                <a:ea typeface="Georgia" pitchFamily="18" charset="-122"/>
+                <a:cs typeface="Georgia" pitchFamily="18" charset="-120"/>
+              </a:rPr>
+              <a:t>Вода</a:t>
+            </a:r>
+            <a:endParaRPr lang="en-US" sz="2000" dirty="0"/>
+          </a:p>
+        </p:txBody>
+      </p:sp>
+      <p:sp>
+        <p:nvSpPr>
+          <p:cNvPr id="10" name="Text 8"/>
+          <p:cNvSpPr/>
+          <p:nvPr/>
+        </p:nvSpPr>
+        <p:spPr>
+          <a:xfrm>
+            <a:off x="3765550" y="2833291"/>
+            <a:ext cx="2027555" cy="282575"/>
+          </a:xfrm>
+          <a:prstGeom prst="rect">
+            <a:avLst/>
+          </a:prstGeom>
+          <a:noFill/>
+          <a:ln/>
+        </p:spPr>
+        <p:txBody>
+          <a:bodyPr wrap="square" lIns="0" tIns="0" rIns="0" bIns="0" rtlCol="0" anchor="t">
+            <a:normAutofit/>
+          </a:bodyPr>
+          <a:lstStyle/>
+          <a:p>
+            <a:pPr marL="0" indent="0" algn="l">
+              <a:lnSpc>
+                <a:spcPts val="2025"/>
+              </a:lnSpc>
+              <a:buNone/>
+            </a:pPr>
+            <a:r>
+              <a:rPr lang="en-US" sz="1500" dirty="0">
+                <a:solidFill>
+                  <a:srgbClr val="3D4255"/>
+                </a:solidFill>
+                <a:latin typeface="Georgia" pitchFamily="18" charset="0"/>
+                <a:ea typeface="Georgia" pitchFamily="18" charset="-122"/>
+                <a:cs typeface="Georgia" pitchFamily="18" charset="-120"/>
+              </a:rPr>
+              <a:t>Небольшая награда</a:t>
+            </a:r>
+            <a:endParaRPr lang="en-US" sz="1500" dirty="0"/>
+          </a:p>
+        </p:txBody>
+      </p:sp>
+      <p:sp>
+        <p:nvSpPr>
+          <p:cNvPr id="11" name="Shape 9"/>
+          <p:cNvSpPr/>
+          <p:nvPr/>
+        </p:nvSpPr>
+        <p:spPr>
+          <a:xfrm>
+            <a:off x="6200775" y="1623616"/>
+            <a:ext cx="2482850" cy="2238375"/>
+          </a:xfrm>
+          <a:prstGeom prst="roundRect">
+            <a:avLst>
+              <a:gd name="adj" fmla="val 4397"/>
+            </a:avLst>
+          </a:prstGeom>
+          <a:solidFill>
+            <a:srgbClr val="FFFFFF"/>
+          </a:solidFill>
+          <a:ln w="6350">
+            <a:solidFill>
+              <a:srgbClr val="E0DCCF"/>
+            </a:solidFill>
+            <a:prstDash val="solid"/>
+          </a:ln>
+        </p:spPr>
+        <p:txBody>
+          <a:bodyPr/>
+          <a:lstStyle/>
+          <a:p>
+            <a:endParaRPr lang="ru-RU"/>
+          </a:p>
+        </p:txBody>
+      </p:sp>
+      <p:sp>
+        <p:nvSpPr>
+          <p:cNvPr id="12" name="Text 10"/>
+          <p:cNvSpPr/>
+          <p:nvPr/>
+        </p:nvSpPr>
+        <p:spPr>
+          <a:xfrm>
+            <a:off x="6457950" y="1880791"/>
+            <a:ext cx="2027555" cy="482600"/>
+          </a:xfrm>
+          <a:prstGeom prst="rect">
+            <a:avLst/>
+          </a:prstGeom>
+          <a:noFill/>
+          <a:ln/>
+        </p:spPr>
+        <p:txBody>
+          <a:bodyPr wrap="square" lIns="0" tIns="0" rIns="0" bIns="0" rtlCol="0" anchor="t">
+            <a:normAutofit/>
+          </a:bodyPr>
+          <a:lstStyle/>
+          <a:p>
+            <a:pPr marL="0" indent="0" algn="l">
+              <a:lnSpc>
+                <a:spcPts val="3600"/>
+              </a:lnSpc>
+              <a:buNone/>
+            </a:pPr>
+            <a:r>
+              <a:rPr lang="en-US" sz="3600" b="1" dirty="0">
+                <a:solidFill>
+                  <a:srgbClr val="B36B00"/>
+                </a:solidFill>
+                <a:latin typeface="Georgia" pitchFamily="18" charset="0"/>
+                <a:ea typeface="Georgia" pitchFamily="18" charset="-122"/>
+                <a:cs typeface="Georgia" pitchFamily="18" charset="-120"/>
+              </a:rPr>
+              <a:t>−10</a:t>
+            </a:r>
+            <a:endParaRPr lang="en-US" sz="3600" dirty="0"/>
+          </a:p>
+        </p:txBody>
+      </p:sp>
+      <p:sp>
+        <p:nvSpPr>
+          <p:cNvPr id="13" name="Text 11"/>
+          <p:cNvSpPr/>
+          <p:nvPr/>
+        </p:nvSpPr>
+        <p:spPr>
+          <a:xfrm>
+            <a:off x="6457950" y="2439591"/>
+            <a:ext cx="2027555" cy="317500"/>
+          </a:xfrm>
+          <a:prstGeom prst="rect">
+            <a:avLst/>
+          </a:prstGeom>
+          <a:noFill/>
+          <a:ln/>
+        </p:spPr>
+        <p:txBody>
+          <a:bodyPr wrap="square" lIns="0" tIns="0" rIns="0" bIns="0" rtlCol="0" anchor="t">
+            <a:normAutofit/>
+          </a:bodyPr>
+          <a:lstStyle/>
+          <a:p>
+            <a:pPr marL="0" indent="0" algn="l">
+              <a:lnSpc>
+                <a:spcPts val="2300"/>
+              </a:lnSpc>
+              <a:buNone/>
+            </a:pPr>
+            <a:r>
+              <a:rPr lang="en-US" sz="2000" b="1" dirty="0">
+                <a:solidFill>
+                  <a:srgbClr val="1B1F3A"/>
+                </a:solidFill>
+                <a:latin typeface="Georgia" pitchFamily="18" charset="0"/>
+                <a:ea typeface="Georgia" pitchFamily="18" charset="-122"/>
+                <a:cs typeface="Georgia" pitchFamily="18" charset="-120"/>
+              </a:rPr>
+              <a:t>Шок</a:t>
+            </a:r>
+            <a:endParaRPr lang="en-US" sz="2000" dirty="0"/>
+          </a:p>
+        </p:txBody>
+      </p:sp>
+      <p:sp>
+        <p:nvSpPr>
+          <p:cNvPr id="14" name="Text 12"/>
+          <p:cNvSpPr/>
+          <p:nvPr/>
+        </p:nvSpPr>
+        <p:spPr>
+          <a:xfrm>
+            <a:off x="6457950" y="2833291"/>
+            <a:ext cx="2027555" cy="282575"/>
+          </a:xfrm>
+          <a:prstGeom prst="rect">
+            <a:avLst/>
+          </a:prstGeom>
+          <a:noFill/>
+          <a:ln/>
+        </p:spPr>
+        <p:txBody>
+          <a:bodyPr wrap="square" lIns="0" tIns="0" rIns="0" bIns="0" rtlCol="0" anchor="t">
+            <a:normAutofit/>
+          </a:bodyPr>
+          <a:lstStyle/>
+          <a:p>
+            <a:pPr marL="0" indent="0" algn="l">
+              <a:lnSpc>
+                <a:spcPts val="2025"/>
+              </a:lnSpc>
+              <a:buNone/>
+            </a:pPr>
+            <a:r>
+              <a:rPr lang="en-US" sz="1500" dirty="0">
+                <a:solidFill>
+                  <a:srgbClr val="3D4255"/>
+                </a:solidFill>
+                <a:latin typeface="Georgia" pitchFamily="18" charset="0"/>
+                <a:ea typeface="Georgia" pitchFamily="18" charset="-122"/>
+                <a:cs typeface="Georgia" pitchFamily="18" charset="-120"/>
+              </a:rPr>
+              <a:t>Штраф за травму</a:t>
+            </a:r>
+            <a:endParaRPr lang="en-US" sz="1500" dirty="0"/>
+          </a:p>
+        </p:txBody>
+      </p:sp>
+      <p:sp>
+        <p:nvSpPr>
+          <p:cNvPr id="15" name="Shape 13"/>
+          <p:cNvSpPr/>
+          <p:nvPr/>
+        </p:nvSpPr>
+        <p:spPr>
+          <a:xfrm>
+            <a:off x="8893175" y="1623616"/>
+            <a:ext cx="2482850" cy="2238375"/>
+          </a:xfrm>
+          <a:prstGeom prst="roundRect">
+            <a:avLst>
+              <a:gd name="adj" fmla="val 4397"/>
+            </a:avLst>
+          </a:prstGeom>
+          <a:solidFill>
+            <a:srgbClr val="FFFFFF"/>
+          </a:solidFill>
+          <a:ln w="6350">
+            <a:solidFill>
+              <a:srgbClr val="E0DCCF"/>
+            </a:solidFill>
+            <a:prstDash val="solid"/>
+          </a:ln>
+        </p:spPr>
+        <p:txBody>
+          <a:bodyPr/>
+          <a:lstStyle/>
+          <a:p>
+            <a:endParaRPr lang="ru-RU"/>
+          </a:p>
+        </p:txBody>
+      </p:sp>
+      <p:sp>
+        <p:nvSpPr>
+          <p:cNvPr id="16" name="Text 14"/>
+          <p:cNvSpPr/>
+          <p:nvPr/>
+        </p:nvSpPr>
+        <p:spPr>
+          <a:xfrm>
+            <a:off x="9150350" y="1880791"/>
+            <a:ext cx="2027555" cy="482600"/>
+          </a:xfrm>
+          <a:prstGeom prst="rect">
+            <a:avLst/>
+          </a:prstGeom>
+          <a:noFill/>
+          <a:ln/>
+        </p:spPr>
+        <p:txBody>
+          <a:bodyPr wrap="square" lIns="0" tIns="0" rIns="0" bIns="0" rtlCol="0" anchor="t">
+            <a:normAutofit/>
+          </a:bodyPr>
+          <a:lstStyle/>
+          <a:p>
+            <a:pPr marL="0" indent="0" algn="l">
+              <a:lnSpc>
+                <a:spcPts val="3600"/>
+              </a:lnSpc>
+              <a:buNone/>
+            </a:pPr>
+            <a:r>
+              <a:rPr lang="en-US" sz="3600" b="1" dirty="0">
+                <a:solidFill>
+                  <a:srgbClr val="B36B00"/>
+                </a:solidFill>
+                <a:latin typeface="Georgia" pitchFamily="18" charset="0"/>
+                <a:ea typeface="Georgia" pitchFamily="18" charset="-122"/>
+                <a:cs typeface="Georgia" pitchFamily="18" charset="-120"/>
+              </a:rPr>
+              <a:t>−1</a:t>
+            </a:r>
+            <a:endParaRPr lang="en-US" sz="3600" dirty="0"/>
+          </a:p>
+        </p:txBody>
+      </p:sp>
+      <p:sp>
+        <p:nvSpPr>
+          <p:cNvPr id="17" name="Text 15"/>
+          <p:cNvSpPr/>
+          <p:nvPr/>
+        </p:nvSpPr>
+        <p:spPr>
+          <a:xfrm>
+            <a:off x="9150350" y="2439591"/>
+            <a:ext cx="2222500" cy="317500"/>
+          </a:xfrm>
+          <a:prstGeom prst="rect">
+            <a:avLst/>
+          </a:prstGeom>
+          <a:noFill/>
+          <a:ln/>
+        </p:spPr>
+        <p:txBody>
+          <a:bodyPr wrap="square" lIns="0" tIns="0" rIns="0" bIns="0" rtlCol="0" anchor="t">
+            <a:normAutofit/>
+          </a:bodyPr>
+          <a:lstStyle/>
+          <a:p>
+            <a:pPr marL="0" indent="0" algn="l">
+              <a:lnSpc>
+                <a:spcPts val="2300"/>
+              </a:lnSpc>
+              <a:buNone/>
+            </a:pPr>
+            <a:r>
+              <a:rPr lang="en-US" sz="2000" b="1" dirty="0">
+                <a:solidFill>
+                  <a:srgbClr val="1B1F3A"/>
+                </a:solidFill>
+                <a:latin typeface="Georgia" pitchFamily="18" charset="0"/>
+                <a:ea typeface="Georgia" pitchFamily="18" charset="-122"/>
+                <a:cs typeface="Georgia" pitchFamily="18" charset="-120"/>
+              </a:rPr>
+              <a:t>Пустая клетка</a:t>
+            </a:r>
+            <a:endParaRPr lang="en-US" sz="2000" dirty="0"/>
+          </a:p>
+        </p:txBody>
+      </p:sp>
+      <p:sp>
+        <p:nvSpPr>
+          <p:cNvPr id="18" name="Text 16"/>
+          <p:cNvSpPr/>
+          <p:nvPr/>
+        </p:nvSpPr>
+        <p:spPr>
+          <a:xfrm>
+            <a:off x="9150350" y="2833291"/>
+            <a:ext cx="2027555" cy="796925"/>
+          </a:xfrm>
+          <a:prstGeom prst="rect">
+            <a:avLst/>
+          </a:prstGeom>
+          <a:noFill/>
+          <a:ln/>
+        </p:spPr>
+        <p:txBody>
+          <a:bodyPr wrap="square" lIns="0" tIns="0" rIns="0" bIns="0" rtlCol="0" anchor="t">
+            <a:normAutofit/>
+          </a:bodyPr>
+          <a:lstStyle/>
+          <a:p>
+            <a:pPr marL="0" indent="0" algn="l">
+              <a:lnSpc>
+                <a:spcPts val="2025"/>
+              </a:lnSpc>
+              <a:buNone/>
+            </a:pPr>
+            <a:r>
+              <a:rPr lang="en-US" sz="1500" dirty="0">
+                <a:solidFill>
+                  <a:srgbClr val="3D4255"/>
+                </a:solidFill>
+                <a:latin typeface="Georgia" pitchFamily="18" charset="0"/>
+                <a:ea typeface="Georgia" pitchFamily="18" charset="-122"/>
+                <a:cs typeface="Georgia" pitchFamily="18" charset="-120"/>
+              </a:rPr>
+              <a:t>Штраф за каждый шаг, чтобы путь был короче</a:t>
+            </a:r>
+            <a:endParaRPr lang="en-US" sz="1500" dirty="0"/>
+          </a:p>
+        </p:txBody>
+      </p:sp>
+      <p:sp>
+        <p:nvSpPr>
+          <p:cNvPr id="19" name="Text 17"/>
+          <p:cNvSpPr/>
+          <p:nvPr/>
+        </p:nvSpPr>
+        <p:spPr>
+          <a:xfrm>
+            <a:off x="812800" y="4169966"/>
+            <a:ext cx="10883392" cy="316805"/>
+          </a:xfrm>
+          <a:prstGeom prst="rect">
+            <a:avLst/>
+          </a:prstGeom>
+          <a:noFill/>
+          <a:ln/>
+        </p:spPr>
+        <p:txBody>
+          <a:bodyPr wrap="square" lIns="0" tIns="0" rIns="0" bIns="0" rtlCol="0" anchor="t">
+            <a:normAutofit/>
+          </a:bodyPr>
+          <a:lstStyle/>
+          <a:p>
+            <a:pPr marL="0" indent="0" algn="l">
+              <a:lnSpc>
+                <a:spcPts val="2295"/>
+              </a:lnSpc>
+              <a:buNone/>
+            </a:pPr>
+            <a:r>
+              <a:rPr lang="en-US" sz="1700" dirty="0">
+                <a:solidFill>
+                  <a:srgbClr val="1B1F3A"/>
+                </a:solidFill>
+                <a:latin typeface="Georgia" pitchFamily="18" charset="0"/>
+                <a:ea typeface="Georgia" pitchFamily="18" charset="-122"/>
+                <a:cs typeface="Georgia" pitchFamily="18" charset="-120"/>
+              </a:rPr>
+              <a:t>Агент учится максимизировать сумму наград за эпизод, а не отдельный выигрыш.</a:t>
+            </a:r>
+            <a:endParaRPr lang="en-US" sz="1700" dirty="0"/>
+          </a:p>
+        </p:txBody>
+      </p:sp>
+    </p:spTree>
+  </p:cSld>
+  <p:clrMapOvr>
+    <a:masterClrMapping/>
+  </p:clrMapOvr>
+</p:sld>
+</file>
+
+<file path=ppt/slides/slide4.xml><?xml version="1.0" encoding="utf-8"?>
+<p:sld xmlns:a="http://schemas.openxmlformats.org/drawingml/2006/main" xmlns:r="http://schemas.openxmlformats.org/officeDocument/2006/relationships" xmlns:p="http://schemas.openxmlformats.org/presentationml/2006/main">
+  <p:cSld name="Slide 4">
+    <p:bg>
+      <p:bgPr>
+        <a:solidFill>
+          <a:srgbClr val="1B1F3A"/>
+        </a:solidFill>
+        <a:effectLst/>
+      </p:bgPr>
+    </p:bg>
+    <p:spTree>
+      <p:nvGrpSpPr>
+        <p:cNvPr id="1" name=""/>
+        <p:cNvGrpSpPr/>
+        <p:nvPr/>
+      </p:nvGrpSpPr>
+      <p:grpSpPr>
+        <a:xfrm>
+          <a:off x="0" y="0"/>
+          <a:ext cx="0" cy="0"/>
+          <a:chOff x="0" y="0"/>
+          <a:chExt cx="0" cy="0"/>
+        </a:xfrm>
+      </p:grpSpPr>
+      <p:sp>
+        <p:nvSpPr>
+          <p:cNvPr id="2" name="Text 0"/>
+          <p:cNvSpPr>
+            <a:spLocks noGrp="1"/>
+          </p:cNvSpPr>
+          <p:nvPr>
+            <p:ph type="title"/>
+          </p:nvPr>
+        </p:nvSpPr>
+        <p:spPr>
+          <a:xfrm>
+            <a:off x="812800" y="812800"/>
+            <a:ext cx="10883392" cy="528241"/>
+          </a:xfrm>
+          <a:prstGeom prst="rect">
+            <a:avLst/>
+          </a:prstGeom>
+          <a:noFill/>
+          <a:ln/>
+        </p:spPr>
+        <p:txBody>
+          <a:bodyPr wrap="square" lIns="0" tIns="0" rIns="0" bIns="0" rtlCol="0" anchor="t">
+            <a:normAutofit/>
+          </a:bodyPr>
+          <a:lstStyle/>
+          <a:p>
+            <a:pPr marL="0" indent="0" algn="l">
+              <a:lnSpc>
+                <a:spcPts val="3960"/>
+              </a:lnSpc>
+              <a:buNone/>
+            </a:pPr>
+            <a:r>
+              <a:rPr lang="en-US" sz="3600" b="0" i="0" dirty="0">
+                <a:solidFill>
+                  <a:srgbClr val="F6F4EF"/>
+                </a:solidFill>
+                <a:latin typeface="Georgia" pitchFamily="18" charset="0"/>
+                <a:ea typeface="Georgia" pitchFamily="18" charset="-122"/>
+                <a:cs typeface="Georgia" pitchFamily="18" charset="-120"/>
+              </a:rPr>
+              <a:t>Q-обучение</a:t>
+            </a:r>
+            <a:endParaRPr lang="en-US" sz="3600" dirty="0"/>
+          </a:p>
+        </p:txBody>
+      </p:sp>
+      <p:sp>
+        <p:nvSpPr>
+          <p:cNvPr id="3" name="Text 1"/>
+          <p:cNvSpPr/>
+          <p:nvPr/>
+        </p:nvSpPr>
+        <p:spPr>
+          <a:xfrm>
+            <a:off x="812800" y="2127151"/>
+            <a:ext cx="10883392" cy="454620"/>
+          </a:xfrm>
+          <a:prstGeom prst="rect">
+            <a:avLst/>
+          </a:prstGeom>
+          <a:noFill/>
+          <a:ln/>
+        </p:spPr>
+        <p:txBody>
+          <a:bodyPr wrap="square" lIns="0" tIns="0" rIns="0" bIns="0" rtlCol="0" anchor="t">
+            <a:normAutofit/>
+          </a:bodyPr>
+          <a:lstStyle/>
+          <a:p>
+            <a:pPr marL="0" indent="0" algn="l">
+              <a:lnSpc>
+                <a:spcPts val="3380"/>
+              </a:lnSpc>
+              <a:buNone/>
+            </a:pPr>
+            <a:r>
+              <a:rPr lang="en-US" sz="2600" dirty="0">
+                <a:solidFill>
+                  <a:srgbClr val="F2B134"/>
+                </a:solidFill>
+                <a:latin typeface="Georgia" pitchFamily="18" charset="0"/>
+                <a:ea typeface="Georgia" pitchFamily="18" charset="-122"/>
+                <a:cs typeface="Georgia" pitchFamily="18" charset="-120"/>
+              </a:rPr>
+              <a:t>Q(s,a) += α · (r + γ · max Q(s′,·) − Q(s,a))</a:t>
+            </a:r>
+            <a:endParaRPr lang="en-US" sz="2600" dirty="0"/>
+          </a:p>
+        </p:txBody>
+      </p:sp>
+      <p:sp>
+        <p:nvSpPr>
+          <p:cNvPr id="4" name="Text 2"/>
+          <p:cNvSpPr/>
+          <p:nvPr/>
+        </p:nvSpPr>
+        <p:spPr>
+          <a:xfrm>
+            <a:off x="812800" y="2861171"/>
+            <a:ext cx="10883392" cy="282575"/>
+          </a:xfrm>
+          <a:prstGeom prst="rect">
+            <a:avLst/>
+          </a:prstGeom>
+          <a:noFill/>
+          <a:ln/>
+        </p:spPr>
+        <p:txBody>
+          <a:bodyPr wrap="square" lIns="0" tIns="0" rIns="0" bIns="0" rtlCol="0" anchor="t">
+            <a:normAutofit/>
+          </a:bodyPr>
+          <a:lstStyle/>
+          <a:p>
+            <a:pPr marL="0" indent="0" algn="l">
+              <a:lnSpc>
+                <a:spcPts val="2025"/>
+              </a:lnSpc>
+              <a:buNone/>
+            </a:pPr>
+            <a:r>
+              <a:rPr lang="en-US" sz="1500" dirty="0">
+                <a:solidFill>
+                  <a:srgbClr val="C9C6D6"/>
+                </a:solidFill>
+                <a:latin typeface="Georgia" pitchFamily="18" charset="0"/>
+                <a:ea typeface="Georgia" pitchFamily="18" charset="-122"/>
+                <a:cs typeface="Georgia" pitchFamily="18" charset="-120"/>
+              </a:rPr>
+              <a:t>Q-таблица хранит ценность каждого из 4 действий в каждой клетке лабиринта</a:t>
+            </a:r>
+            <a:endParaRPr lang="en-US" sz="1500" dirty="0"/>
+          </a:p>
+        </p:txBody>
+      </p:sp>
+      <p:sp>
+        <p:nvSpPr>
+          <p:cNvPr id="5" name="Text 3"/>
+          <p:cNvSpPr/>
+          <p:nvPr/>
+        </p:nvSpPr>
+        <p:spPr>
+          <a:xfrm>
+            <a:off x="812800" y="3423146"/>
+            <a:ext cx="3488233" cy="317500"/>
+          </a:xfrm>
+          <a:prstGeom prst="rect">
+            <a:avLst/>
+          </a:prstGeom>
+          <a:noFill/>
+          <a:ln/>
+        </p:spPr>
+        <p:txBody>
+          <a:bodyPr wrap="square" lIns="0" tIns="0" rIns="0" bIns="0" rtlCol="0" anchor="t">
+            <a:normAutofit/>
+          </a:bodyPr>
+          <a:lstStyle/>
+          <a:p>
+            <a:pPr marL="0" indent="0" algn="l">
+              <a:lnSpc>
+                <a:spcPts val="2300"/>
+              </a:lnSpc>
+              <a:buNone/>
+            </a:pPr>
+            <a:r>
+              <a:rPr lang="en-US" sz="2000" b="1" dirty="0">
+                <a:solidFill>
+                  <a:srgbClr val="F6F4EF"/>
+                </a:solidFill>
+                <a:latin typeface="Georgia" pitchFamily="18" charset="0"/>
+                <a:ea typeface="Georgia" pitchFamily="18" charset="-122"/>
+                <a:cs typeface="Georgia" pitchFamily="18" charset="-120"/>
+              </a:rPr>
+              <a:t>α = 0,5</a:t>
+            </a:r>
+            <a:endParaRPr lang="en-US" sz="2000" dirty="0"/>
+          </a:p>
+        </p:txBody>
+      </p:sp>
+      <p:sp>
+        <p:nvSpPr>
+          <p:cNvPr id="6" name="Text 4"/>
+          <p:cNvSpPr/>
+          <p:nvPr/>
+        </p:nvSpPr>
+        <p:spPr>
+          <a:xfrm>
+            <a:off x="812800" y="3791446"/>
+            <a:ext cx="3488233" cy="539750"/>
+          </a:xfrm>
+          <a:prstGeom prst="rect">
+            <a:avLst/>
+          </a:prstGeom>
+          <a:noFill/>
+          <a:ln/>
+        </p:spPr>
+        <p:txBody>
+          <a:bodyPr wrap="square" lIns="0" tIns="0" rIns="0" bIns="0" rtlCol="0" anchor="t">
+            <a:normAutofit/>
+          </a:bodyPr>
+          <a:lstStyle/>
+          <a:p>
+            <a:pPr marL="0" indent="0" algn="l">
+              <a:lnSpc>
+                <a:spcPts val="2025"/>
+              </a:lnSpc>
+              <a:buNone/>
+            </a:pPr>
+            <a:r>
+              <a:rPr lang="en-US" sz="1500" dirty="0">
+                <a:solidFill>
+                  <a:srgbClr val="C9C6D6"/>
+                </a:solidFill>
+                <a:latin typeface="Georgia" pitchFamily="18" charset="0"/>
+                <a:ea typeface="Georgia" pitchFamily="18" charset="-122"/>
+                <a:cs typeface="Georgia" pitchFamily="18" charset="-120"/>
+              </a:rPr>
+              <a:t>Скорость обучения: насколько новый опыт вытесняет старый</a:t>
+            </a:r>
+            <a:endParaRPr lang="en-US" sz="1500" dirty="0"/>
+          </a:p>
+        </p:txBody>
+      </p:sp>
+      <p:sp>
+        <p:nvSpPr>
+          <p:cNvPr id="7" name="Text 5"/>
+          <p:cNvSpPr/>
+          <p:nvPr/>
+        </p:nvSpPr>
+        <p:spPr>
+          <a:xfrm>
+            <a:off x="4402634" y="3423146"/>
+            <a:ext cx="3488335" cy="317500"/>
+          </a:xfrm>
+          <a:prstGeom prst="rect">
+            <a:avLst/>
+          </a:prstGeom>
+          <a:noFill/>
+          <a:ln/>
+        </p:spPr>
+        <p:txBody>
+          <a:bodyPr wrap="square" lIns="0" tIns="0" rIns="0" bIns="0" rtlCol="0" anchor="t">
+            <a:normAutofit/>
+          </a:bodyPr>
+          <a:lstStyle/>
+          <a:p>
+            <a:pPr marL="0" indent="0" algn="l">
+              <a:lnSpc>
+                <a:spcPts val="2300"/>
+              </a:lnSpc>
+              <a:buNone/>
+            </a:pPr>
+            <a:r>
+              <a:rPr lang="en-US" sz="2000" b="1" dirty="0">
+                <a:solidFill>
+                  <a:srgbClr val="F6F4EF"/>
+                </a:solidFill>
+                <a:latin typeface="Georgia" pitchFamily="18" charset="0"/>
+                <a:ea typeface="Georgia" pitchFamily="18" charset="-122"/>
+                <a:cs typeface="Georgia" pitchFamily="18" charset="-120"/>
+              </a:rPr>
+              <a:t>γ = 0,9</a:t>
+            </a:r>
+            <a:endParaRPr lang="en-US" sz="2000" dirty="0"/>
+          </a:p>
+        </p:txBody>
+      </p:sp>
+      <p:sp>
+        <p:nvSpPr>
+          <p:cNvPr id="8" name="Text 6"/>
+          <p:cNvSpPr/>
+          <p:nvPr/>
+        </p:nvSpPr>
+        <p:spPr>
+          <a:xfrm>
+            <a:off x="4402634" y="3791446"/>
+            <a:ext cx="3488335" cy="539750"/>
+          </a:xfrm>
+          <a:prstGeom prst="rect">
+            <a:avLst/>
+          </a:prstGeom>
+          <a:noFill/>
+          <a:ln/>
+        </p:spPr>
+        <p:txBody>
+          <a:bodyPr wrap="square" lIns="0" tIns="0" rIns="0" bIns="0" rtlCol="0" anchor="t">
+            <a:normAutofit/>
+          </a:bodyPr>
+          <a:lstStyle/>
+          <a:p>
+            <a:pPr marL="0" indent="0" algn="l">
+              <a:lnSpc>
+                <a:spcPts val="2025"/>
+              </a:lnSpc>
+              <a:buNone/>
+            </a:pPr>
+            <a:r>
+              <a:rPr lang="en-US" sz="1500" dirty="0">
+                <a:solidFill>
+                  <a:srgbClr val="C9C6D6"/>
+                </a:solidFill>
+                <a:latin typeface="Georgia" pitchFamily="18" charset="0"/>
+                <a:ea typeface="Georgia" pitchFamily="18" charset="-122"/>
+                <a:cs typeface="Georgia" pitchFamily="18" charset="-120"/>
+              </a:rPr>
+              <a:t>Дисконт: насколько важны награды в будущем</a:t>
+            </a:r>
+            <a:endParaRPr lang="en-US" sz="1500" dirty="0"/>
+          </a:p>
+        </p:txBody>
+      </p:sp>
+      <p:sp>
+        <p:nvSpPr>
+          <p:cNvPr id="9" name="Text 7"/>
+          <p:cNvSpPr/>
+          <p:nvPr/>
+        </p:nvSpPr>
+        <p:spPr>
+          <a:xfrm>
+            <a:off x="7992566" y="3423146"/>
+            <a:ext cx="3488233" cy="317500"/>
+          </a:xfrm>
+          <a:prstGeom prst="rect">
+            <a:avLst/>
+          </a:prstGeom>
+          <a:noFill/>
+          <a:ln/>
+        </p:spPr>
+        <p:txBody>
+          <a:bodyPr wrap="square" lIns="0" tIns="0" rIns="0" bIns="0" rtlCol="0" anchor="t">
+            <a:normAutofit/>
+          </a:bodyPr>
+          <a:lstStyle/>
+          <a:p>
+            <a:pPr marL="0" indent="0" algn="l">
+              <a:lnSpc>
+                <a:spcPts val="2300"/>
+              </a:lnSpc>
+              <a:buNone/>
+            </a:pPr>
+            <a:r>
+              <a:rPr lang="en-US" sz="2000" b="1" dirty="0">
+                <a:solidFill>
+                  <a:srgbClr val="F6F4EF"/>
+                </a:solidFill>
+                <a:latin typeface="Georgia" pitchFamily="18" charset="0"/>
+                <a:ea typeface="Georgia" pitchFamily="18" charset="-122"/>
+                <a:cs typeface="Georgia" pitchFamily="18" charset="-120"/>
+              </a:rPr>
+              <a:t>ε = 0,1</a:t>
+            </a:r>
+            <a:endParaRPr lang="en-US" sz="2000" dirty="0"/>
+          </a:p>
+        </p:txBody>
+      </p:sp>
+      <p:sp>
+        <p:nvSpPr>
+          <p:cNvPr id="10" name="Text 8"/>
+          <p:cNvSpPr/>
+          <p:nvPr/>
+        </p:nvSpPr>
+        <p:spPr>
+          <a:xfrm>
+            <a:off x="7992566" y="3791446"/>
+            <a:ext cx="3488233" cy="539750"/>
+          </a:xfrm>
+          <a:prstGeom prst="rect">
+            <a:avLst/>
+          </a:prstGeom>
+          <a:noFill/>
+          <a:ln/>
+        </p:spPr>
+        <p:txBody>
+          <a:bodyPr wrap="square" lIns="0" tIns="0" rIns="0" bIns="0" rtlCol="0" anchor="t">
+            <a:normAutofit/>
+          </a:bodyPr>
+          <a:lstStyle/>
+          <a:p>
+            <a:pPr marL="0" indent="0" algn="l">
+              <a:lnSpc>
+                <a:spcPts val="2025"/>
+              </a:lnSpc>
+              <a:buNone/>
+            </a:pPr>
+            <a:r>
+              <a:rPr lang="en-US" sz="1500" dirty="0">
+                <a:solidFill>
+                  <a:srgbClr val="C9C6D6"/>
+                </a:solidFill>
+                <a:latin typeface="Georgia" pitchFamily="18" charset="0"/>
+                <a:ea typeface="Georgia" pitchFamily="18" charset="-122"/>
+                <a:cs typeface="Georgia" pitchFamily="18" charset="-120"/>
+              </a:rPr>
+              <a:t>Доля случайных ходов, чтобы исследовать лабиринт</a:t>
+            </a:r>
+            <a:endParaRPr lang="en-US" sz="1500" dirty="0"/>
+          </a:p>
+        </p:txBody>
+      </p:sp>
+      <p:sp>
+        <p:nvSpPr>
+          <p:cNvPr id="13" name="Text 2">
+            <a:extLst>
+              <a:ext uri="{FF2B5EF4-FFF2-40B4-BE49-F238E27FC236}">
+                <a16:creationId xmlns:a16="http://schemas.microsoft.com/office/drawing/2014/main" id="{630ACA15-835F-5D65-D054-466657971606}"/>
+              </a:ext>
+            </a:extLst>
+          </p:cNvPr>
+          <p:cNvSpPr/>
+          <p:nvPr/>
+        </p:nvSpPr>
+        <p:spPr>
+          <a:xfrm>
+            <a:off x="812800" y="1790899"/>
+            <a:ext cx="10883392" cy="282575"/>
+          </a:xfrm>
+          <a:prstGeom prst="rect">
+            <a:avLst/>
+          </a:prstGeom>
+          <a:noFill/>
+          <a:ln/>
+        </p:spPr>
+        <p:txBody>
+          <a:bodyPr wrap="square" lIns="0" tIns="0" rIns="0" bIns="0" rtlCol="0" anchor="t">
+            <a:normAutofit/>
+          </a:bodyPr>
+          <a:lstStyle/>
+          <a:p>
+            <a:pPr marL="0" indent="0" algn="l">
+              <a:lnSpc>
+                <a:spcPts val="2025"/>
+              </a:lnSpc>
+              <a:buNone/>
+            </a:pPr>
+            <a:r>
+              <a:rPr lang="ru-RU" b="1" dirty="0">
+                <a:solidFill>
+                  <a:srgbClr val="C9C6D6"/>
+                </a:solidFill>
+                <a:latin typeface="Georgia" pitchFamily="18" charset="0"/>
+              </a:rPr>
+              <a:t>Формула Беллмана:</a:t>
+            </a:r>
+            <a:endParaRPr lang="en-US" b="1" dirty="0">
+              <a:solidFill>
+                <a:srgbClr val="C9C6D6"/>
+              </a:solidFill>
+              <a:latin typeface="Georgia" pitchFamily="18" charset="0"/>
+            </a:endParaRPr>
+          </a:p>
+        </p:txBody>
+      </p:sp>
+    </p:spTree>
+  </p:cSld>
+  <p:clrMapOvr>
+    <a:masterClrMapping/>
+  </p:clrMapOvr>
+</p:sld>
+</file>
+
+<file path=ppt/slides/slide5.xml><?xml version="1.0" encoding="utf-8"?>
+<p:sld xmlns:a="http://schemas.openxmlformats.org/drawingml/2006/main" xmlns:r="http://schemas.openxmlformats.org/officeDocument/2006/relationships" xmlns:p="http://schemas.openxmlformats.org/presentationml/2006/main">
+  <p:cSld name="Slide 5">
+    <p:bg>
+      <p:bgPr>
+        <a:solidFill>
+          <a:srgbClr val="F6F4EF"/>
+        </a:solidFill>
+        <a:effectLst/>
+      </p:bgPr>
+    </p:bg>
+    <p:spTree>
+      <p:nvGrpSpPr>
+        <p:cNvPr id="1" name=""/>
+        <p:cNvGrpSpPr/>
+        <p:nvPr/>
+      </p:nvGrpSpPr>
+      <p:grpSpPr>
+        <a:xfrm>
+          <a:off x="0" y="0"/>
+          <a:ext cx="0" cy="0"/>
+          <a:chOff x="0" y="0"/>
+          <a:chExt cx="0" cy="0"/>
+        </a:xfrm>
+      </p:grpSpPr>
+      <p:sp>
+        <p:nvSpPr>
+          <p:cNvPr id="2" name="Text 0"/>
+          <p:cNvSpPr>
+            <a:spLocks noGrp="1"/>
+          </p:cNvSpPr>
+          <p:nvPr>
+            <p:ph type="title"/>
+          </p:nvPr>
+        </p:nvSpPr>
+        <p:spPr>
+          <a:xfrm>
+            <a:off x="812800" y="812800"/>
+            <a:ext cx="10883392" cy="528241"/>
+          </a:xfrm>
+          <a:prstGeom prst="rect">
+            <a:avLst/>
+          </a:prstGeom>
+          <a:noFill/>
+          <a:ln/>
+        </p:spPr>
+        <p:txBody>
+          <a:bodyPr wrap="square" lIns="0" tIns="0" rIns="0" bIns="0" rtlCol="0" anchor="t">
+            <a:normAutofit/>
+          </a:bodyPr>
+          <a:lstStyle/>
+          <a:p>
+            <a:pPr marL="0" indent="0" algn="l">
+              <a:lnSpc>
+                <a:spcPts val="3960"/>
+              </a:lnSpc>
+              <a:buNone/>
+            </a:pPr>
+            <a:r>
+              <a:rPr lang="ru-RU" sz="3600" dirty="0"/>
+              <a:t>Диаграмма прецедентов</a:t>
+            </a:r>
+            <a:endParaRPr lang="en-US" sz="3600" dirty="0"/>
+          </a:p>
+        </p:txBody>
+      </p:sp>
+      <p:pic>
+        <p:nvPicPr>
+          <p:cNvPr id="4" name="Рисунок 3">
+            <a:extLst>
+              <a:ext uri="{FF2B5EF4-FFF2-40B4-BE49-F238E27FC236}">
+                <a16:creationId xmlns:a16="http://schemas.microsoft.com/office/drawing/2014/main" id="{F3C76DA2-37D5-A7F8-350B-A85E1646544E}"/>
+              </a:ext>
+            </a:extLst>
+          </p:cNvPr>
+          <p:cNvPicPr>
+            <a:picLocks noChangeAspect="1"/>
+          </p:cNvPicPr>
+          <p:nvPr/>
+        </p:nvPicPr>
+        <p:blipFill>
+          <a:blip r:embed="rId3" cstate="print">
+            <a:extLst>
+              <a:ext uri="{28A0092B-C50C-407E-A947-70E740481C1C}">
+                <a14:useLocalDpi xmlns:a14="http://schemas.microsoft.com/office/drawing/2010/main" val="0"/>
+              </a:ext>
+            </a:extLst>
+          </a:blip>
+          <a:srcRect/>
+          <a:stretch>
+            <a:fillRect/>
+          </a:stretch>
+        </p:blipFill>
+        <p:spPr bwMode="auto">
+          <a:xfrm>
+            <a:off x="869382" y="1813521"/>
+            <a:ext cx="10453236" cy="4339964"/>
+          </a:xfrm>
+          <a:prstGeom prst="roundRect">
+            <a:avLst>
+              <a:gd name="adj" fmla="val 8594"/>
+            </a:avLst>
+          </a:prstGeom>
+          <a:solidFill>
+            <a:srgbClr val="FFFFFF">
+              <a:shade val="85000"/>
+            </a:srgbClr>
+          </a:solidFill>
+          <a:ln>
+            <a:noFill/>
+          </a:ln>
+          <a:effectLst/>
+        </p:spPr>
+      </p:pic>
+    </p:spTree>
+  </p:cSld>
+  <p:clrMapOvr>
+    <a:masterClrMapping/>
+  </p:clrMapOvr>
+</p:sld>
+</file>
+
+<file path=ppt/slides/slide6.xml><?xml version="1.0" encoding="utf-8"?>
+<p:sld xmlns:a="http://schemas.openxmlformats.org/drawingml/2006/main" xmlns:r="http://schemas.openxmlformats.org/officeDocument/2006/relationships" xmlns:p="http://schemas.openxmlformats.org/presentationml/2006/main">
+  <p:cSld>
+    <p:bg>
+      <p:bgPr>
+        <a:solidFill>
+          <a:srgbClr val="F6F4EF"/>
+        </a:solidFill>
+        <a:effectLst/>
+      </p:bgPr>
+    </p:bg>
+    <p:spTree>
+      <p:nvGrpSpPr>
+        <p:cNvPr id="1" name="">
+          <a:extLst>
+            <a:ext uri="{FF2B5EF4-FFF2-40B4-BE49-F238E27FC236}">
+              <a16:creationId xmlns:a16="http://schemas.microsoft.com/office/drawing/2014/main" id="{46733C85-59DB-7169-E452-BEB75A0FA948}"/>
+            </a:ext>
+          </a:extLst>
+        </p:cNvPr>
+        <p:cNvGrpSpPr/>
+        <p:nvPr/>
+      </p:nvGrpSpPr>
+      <p:grpSpPr>
+        <a:xfrm>
+          <a:off x="0" y="0"/>
+          <a:ext cx="0" cy="0"/>
+          <a:chOff x="0" y="0"/>
+          <a:chExt cx="0" cy="0"/>
+        </a:xfrm>
+      </p:grpSpPr>
+      <p:sp>
+        <p:nvSpPr>
+          <p:cNvPr id="2" name="Text 0">
+            <a:extLst>
+              <a:ext uri="{FF2B5EF4-FFF2-40B4-BE49-F238E27FC236}">
+                <a16:creationId xmlns:a16="http://schemas.microsoft.com/office/drawing/2014/main" id="{720C64EA-B900-D30A-E650-79159C33C86E}"/>
+              </a:ext>
+            </a:extLst>
+          </p:cNvPr>
+          <p:cNvSpPr>
+            <a:spLocks noGrp="1"/>
+          </p:cNvSpPr>
+          <p:nvPr>
+            <p:ph type="title"/>
+          </p:nvPr>
+        </p:nvSpPr>
+        <p:spPr>
+          <a:xfrm>
+            <a:off x="812800" y="812800"/>
+            <a:ext cx="10883392" cy="528241"/>
+          </a:xfrm>
+          <a:prstGeom prst="rect">
+            <a:avLst/>
+          </a:prstGeom>
+          <a:noFill/>
+          <a:ln/>
+        </p:spPr>
+        <p:txBody>
+          <a:bodyPr wrap="square" lIns="0" tIns="0" rIns="0" bIns="0" rtlCol="0" anchor="t">
+            <a:normAutofit/>
+          </a:bodyPr>
+          <a:lstStyle/>
+          <a:p>
+            <a:pPr marL="0" indent="0" algn="l">
+              <a:lnSpc>
+                <a:spcPts val="3960"/>
+              </a:lnSpc>
+              <a:buNone/>
+            </a:pPr>
+            <a:r>
+              <a:rPr lang="ru-RU" sz="3600" dirty="0"/>
+              <a:t>Диаграмма </a:t>
+            </a:r>
+            <a:r>
+              <a:rPr lang="ru-RU" dirty="0"/>
+              <a:t>состояний</a:t>
+            </a:r>
+            <a:endParaRPr lang="en-US" sz="3600" dirty="0"/>
+          </a:p>
+        </p:txBody>
+      </p:sp>
+      <p:pic>
+        <p:nvPicPr>
+          <p:cNvPr id="5" name="Рисунок 4">
+            <a:extLst>
+              <a:ext uri="{FF2B5EF4-FFF2-40B4-BE49-F238E27FC236}">
+                <a16:creationId xmlns:a16="http://schemas.microsoft.com/office/drawing/2014/main" id="{0F681316-48EA-72D6-E489-3D9D4A358262}"/>
+              </a:ext>
+            </a:extLst>
+          </p:cNvPr>
+          <p:cNvPicPr>
+            <a:picLocks noChangeAspect="1"/>
+          </p:cNvPicPr>
+          <p:nvPr/>
+        </p:nvPicPr>
+        <p:blipFill>
+          <a:blip r:embed="rId3" cstate="print">
+            <a:extLst>
+              <a:ext uri="{28A0092B-C50C-407E-A947-70E740481C1C}">
+                <a14:useLocalDpi xmlns:a14="http://schemas.microsoft.com/office/drawing/2010/main" val="0"/>
+              </a:ext>
+            </a:extLst>
+          </a:blip>
+          <a:srcRect/>
+          <a:stretch>
+            <a:fillRect/>
+          </a:stretch>
+        </p:blipFill>
+        <p:spPr bwMode="auto">
+          <a:xfrm>
+            <a:off x="2831253" y="1734989"/>
+            <a:ext cx="6754760" cy="4548903"/>
+          </a:xfrm>
+          <a:prstGeom prst="roundRect">
+            <a:avLst>
+              <a:gd name="adj" fmla="val 8594"/>
+            </a:avLst>
+          </a:prstGeom>
+          <a:solidFill>
+            <a:srgbClr val="FFFFFF">
+              <a:shade val="85000"/>
+            </a:srgbClr>
+          </a:solidFill>
+          <a:ln>
+            <a:noFill/>
+          </a:ln>
+          <a:effectLst/>
+        </p:spPr>
+      </p:pic>
+    </p:spTree>
+    <p:extLst>
+      <p:ext uri="{BB962C8B-B14F-4D97-AF65-F5344CB8AC3E}">
+        <p14:creationId xmlns:p14="http://schemas.microsoft.com/office/powerpoint/2010/main" val="283074577"/>
+      </p:ext>
+    </p:extLst>
+  </p:cSld>
+  <p:clrMapOvr>
+    <a:masterClrMapping/>
+  </p:clrMapOvr>
+</p:sld>
+</file>
+
+<file path=ppt/slides/slide7.xml><?xml version="1.0" encoding="utf-8"?>
+<p:sld xmlns:a="http://schemas.openxmlformats.org/drawingml/2006/main" xmlns:r="http://schemas.openxmlformats.org/officeDocument/2006/relationships" xmlns:p="http://schemas.openxmlformats.org/presentationml/2006/main">
+  <p:cSld>
+    <p:bg>
+      <p:bgPr>
+        <a:solidFill>
+          <a:srgbClr val="F6F4EF"/>
+        </a:solidFill>
+        <a:effectLst/>
+      </p:bgPr>
+    </p:bg>
+    <p:spTree>
+      <p:nvGrpSpPr>
+        <p:cNvPr id="1" name="">
+          <a:extLst>
+            <a:ext uri="{FF2B5EF4-FFF2-40B4-BE49-F238E27FC236}">
+              <a16:creationId xmlns:a16="http://schemas.microsoft.com/office/drawing/2014/main" id="{55D6EEE7-9675-12DB-E224-EF674EB1B7F3}"/>
+            </a:ext>
+          </a:extLst>
+        </p:cNvPr>
+        <p:cNvGrpSpPr/>
+        <p:nvPr/>
+      </p:nvGrpSpPr>
+      <p:grpSpPr>
+        <a:xfrm>
+          <a:off x="0" y="0"/>
+          <a:ext cx="0" cy="0"/>
+          <a:chOff x="0" y="0"/>
+          <a:chExt cx="0" cy="0"/>
+        </a:xfrm>
+      </p:grpSpPr>
+      <p:sp>
+        <p:nvSpPr>
+          <p:cNvPr id="2" name="Text 0">
+            <a:extLst>
+              <a:ext uri="{FF2B5EF4-FFF2-40B4-BE49-F238E27FC236}">
+                <a16:creationId xmlns:a16="http://schemas.microsoft.com/office/drawing/2014/main" id="{BB319285-FD39-6323-315E-53AE1CED8A77}"/>
+              </a:ext>
+            </a:extLst>
+          </p:cNvPr>
+          <p:cNvSpPr>
+            <a:spLocks noGrp="1"/>
+          </p:cNvSpPr>
+          <p:nvPr>
+            <p:ph type="title"/>
+          </p:nvPr>
+        </p:nvSpPr>
+        <p:spPr>
+          <a:xfrm>
+            <a:off x="812800" y="812800"/>
+            <a:ext cx="10883392" cy="528241"/>
+          </a:xfrm>
+          <a:prstGeom prst="rect">
+            <a:avLst/>
+          </a:prstGeom>
+          <a:noFill/>
+          <a:ln/>
+        </p:spPr>
+        <p:txBody>
+          <a:bodyPr wrap="square" lIns="0" tIns="0" rIns="0" bIns="0" rtlCol="0" anchor="t">
+            <a:normAutofit/>
+          </a:bodyPr>
+          <a:lstStyle/>
+          <a:p>
+            <a:pPr marL="0" indent="0" algn="l">
+              <a:lnSpc>
+                <a:spcPts val="3960"/>
+              </a:lnSpc>
+              <a:buNone/>
+            </a:pPr>
+            <a:r>
+              <a:rPr lang="en-US" sz="3600" b="0" i="0" dirty="0" err="1">
+                <a:solidFill>
+                  <a:srgbClr val="1B1F3A"/>
+                </a:solidFill>
+                <a:latin typeface="Georgia" pitchFamily="18" charset="0"/>
+                <a:ea typeface="Georgia" pitchFamily="18" charset="-122"/>
+                <a:cs typeface="Georgia" pitchFamily="18" charset="-120"/>
+              </a:rPr>
+              <a:t>Архитектура</a:t>
+            </a:r>
+            <a:endParaRPr lang="en-US" sz="3600" dirty="0"/>
+          </a:p>
+        </p:txBody>
+      </p:sp>
+      <p:sp>
+        <p:nvSpPr>
+          <p:cNvPr id="3" name="Text 1">
+            <a:extLst>
+              <a:ext uri="{FF2B5EF4-FFF2-40B4-BE49-F238E27FC236}">
+                <a16:creationId xmlns:a16="http://schemas.microsoft.com/office/drawing/2014/main" id="{CB233203-6C0D-B335-43C3-E86D4C36CD08}"/>
+              </a:ext>
+            </a:extLst>
+          </p:cNvPr>
+          <p:cNvSpPr/>
+          <p:nvPr/>
+        </p:nvSpPr>
+        <p:spPr>
+          <a:xfrm>
+            <a:off x="684108" y="2408327"/>
+            <a:ext cx="4666825" cy="2941340"/>
+          </a:xfrm>
+          <a:prstGeom prst="rect">
+            <a:avLst/>
+          </a:prstGeom>
+          <a:noFill/>
+          <a:ln/>
+        </p:spPr>
+        <p:txBody>
+          <a:bodyPr wrap="square" lIns="0" tIns="0" rIns="0" bIns="0" rtlCol="0" anchor="t">
+            <a:noAutofit/>
+          </a:bodyPr>
+          <a:lstStyle/>
+          <a:p>
+            <a:pPr marL="177292" indent="-177292" algn="l">
+              <a:lnSpc>
+                <a:spcPct val="150000"/>
+              </a:lnSpc>
+              <a:buSzPct val="100000"/>
+              <a:buChar char="•"/>
+            </a:pPr>
+            <a:r>
+              <a:rPr lang="en-US" sz="1600" b="1" dirty="0">
+                <a:solidFill>
+                  <a:srgbClr val="1B1F3A"/>
+                </a:solidFill>
+                <a:latin typeface="Georgia" pitchFamily="18" charset="0"/>
+                <a:ea typeface="Georgia" pitchFamily="18" charset="-122"/>
+                <a:cs typeface="Georgia" pitchFamily="18" charset="-120"/>
+              </a:rPr>
+              <a:t>Maze, </a:t>
+            </a:r>
+            <a:r>
+              <a:rPr lang="en-US" sz="1600" b="1" dirty="0" err="1">
+                <a:solidFill>
+                  <a:srgbClr val="1B1F3A"/>
+                </a:solidFill>
+                <a:latin typeface="Georgia" pitchFamily="18" charset="0"/>
+                <a:ea typeface="Georgia" pitchFamily="18" charset="-122"/>
+                <a:cs typeface="Georgia" pitchFamily="18" charset="-120"/>
+              </a:rPr>
+              <a:t>MazeGenerator</a:t>
+            </a:r>
+            <a:r>
+              <a:rPr lang="en-US" sz="1600" dirty="0">
+                <a:solidFill>
+                  <a:srgbClr val="1B1F3A"/>
+                </a:solidFill>
+                <a:latin typeface="Georgia" pitchFamily="18" charset="0"/>
+                <a:ea typeface="Georgia" pitchFamily="18" charset="-122"/>
+                <a:cs typeface="Georgia" pitchFamily="18" charset="-120"/>
+              </a:rPr>
+              <a:t> </a:t>
+            </a:r>
+            <a:r>
+              <a:rPr lang="ru-RU" sz="1600" dirty="0">
+                <a:solidFill>
+                  <a:srgbClr val="1B1F3A"/>
+                </a:solidFill>
+                <a:latin typeface="Georgia" pitchFamily="18" charset="0"/>
+                <a:ea typeface="Georgia" pitchFamily="18" charset="-122"/>
+                <a:cs typeface="Georgia" pitchFamily="18" charset="-120"/>
+              </a:rPr>
+              <a:t>отвечает за </a:t>
+            </a:r>
+            <a:r>
+              <a:rPr lang="en-US" sz="1600" dirty="0" err="1">
+                <a:solidFill>
+                  <a:srgbClr val="1B1F3A"/>
+                </a:solidFill>
+                <a:latin typeface="Georgia" pitchFamily="18" charset="0"/>
+                <a:ea typeface="Georgia" pitchFamily="18" charset="-122"/>
+                <a:cs typeface="Georgia" pitchFamily="18" charset="-120"/>
+              </a:rPr>
+              <a:t>лабиринт</a:t>
+            </a:r>
+            <a:r>
+              <a:rPr lang="en-US" sz="1600" dirty="0">
+                <a:solidFill>
+                  <a:srgbClr val="1B1F3A"/>
+                </a:solidFill>
+                <a:latin typeface="Georgia" pitchFamily="18" charset="0"/>
+                <a:ea typeface="Georgia" pitchFamily="18" charset="-122"/>
+                <a:cs typeface="Georgia" pitchFamily="18" charset="-120"/>
+              </a:rPr>
+              <a:t> и </a:t>
+            </a:r>
+            <a:r>
+              <a:rPr lang="en-US" sz="1600" dirty="0" err="1">
+                <a:solidFill>
+                  <a:srgbClr val="1B1F3A"/>
+                </a:solidFill>
+                <a:latin typeface="Georgia" pitchFamily="18" charset="0"/>
+                <a:ea typeface="Georgia" pitchFamily="18" charset="-122"/>
+                <a:cs typeface="Georgia" pitchFamily="18" charset="-120"/>
+              </a:rPr>
+              <a:t>его</a:t>
+            </a:r>
+            <a:r>
+              <a:rPr lang="en-US" sz="1600" dirty="0">
+                <a:solidFill>
+                  <a:srgbClr val="1B1F3A"/>
+                </a:solidFill>
+                <a:latin typeface="Georgia" pitchFamily="18" charset="0"/>
+                <a:ea typeface="Georgia" pitchFamily="18" charset="-122"/>
+                <a:cs typeface="Georgia" pitchFamily="18" charset="-120"/>
+              </a:rPr>
+              <a:t> </a:t>
+            </a:r>
+            <a:r>
+              <a:rPr lang="en-US" sz="1600" dirty="0" err="1">
+                <a:solidFill>
+                  <a:srgbClr val="1B1F3A"/>
+                </a:solidFill>
+                <a:latin typeface="Georgia" pitchFamily="18" charset="0"/>
+                <a:ea typeface="Georgia" pitchFamily="18" charset="-122"/>
+                <a:cs typeface="Georgia" pitchFamily="18" charset="-120"/>
+              </a:rPr>
+              <a:t>генераци</a:t>
+            </a:r>
+            <a:r>
+              <a:rPr lang="ru-RU" sz="1600" dirty="0">
+                <a:solidFill>
+                  <a:srgbClr val="1B1F3A"/>
+                </a:solidFill>
+                <a:latin typeface="Georgia" pitchFamily="18" charset="0"/>
+                <a:ea typeface="Georgia" pitchFamily="18" charset="-122"/>
+                <a:cs typeface="Georgia" pitchFamily="18" charset="-120"/>
+              </a:rPr>
+              <a:t>ю</a:t>
+            </a:r>
+          </a:p>
+          <a:p>
+            <a:pPr marL="177292" indent="-177292" algn="l">
+              <a:lnSpc>
+                <a:spcPct val="150000"/>
+              </a:lnSpc>
+              <a:buSzPct val="100000"/>
+              <a:buChar char="•"/>
+            </a:pPr>
+            <a:r>
+              <a:rPr lang="en-US" sz="1600" b="1" dirty="0">
+                <a:solidFill>
+                  <a:srgbClr val="1B1F3A"/>
+                </a:solidFill>
+                <a:latin typeface="Georgia" pitchFamily="18" charset="0"/>
+                <a:ea typeface="Georgia" pitchFamily="18" charset="-122"/>
+                <a:cs typeface="Georgia" pitchFamily="18" charset="-120"/>
+              </a:rPr>
+              <a:t>Environment</a:t>
+            </a:r>
+            <a:r>
+              <a:rPr lang="ru-RU" sz="1600" b="1" dirty="0">
+                <a:solidFill>
+                  <a:srgbClr val="1B1F3A"/>
+                </a:solidFill>
+                <a:latin typeface="Georgia" pitchFamily="18" charset="0"/>
+                <a:ea typeface="Georgia" pitchFamily="18" charset="-122"/>
+                <a:cs typeface="Georgia" pitchFamily="18" charset="-120"/>
+              </a:rPr>
+              <a:t> </a:t>
+            </a:r>
+            <a:r>
+              <a:rPr lang="ru-RU" sz="1600" dirty="0">
+                <a:solidFill>
+                  <a:srgbClr val="1B1F3A"/>
+                </a:solidFill>
+                <a:latin typeface="Georgia" pitchFamily="18" charset="0"/>
+                <a:ea typeface="Georgia" pitchFamily="18" charset="-122"/>
+                <a:cs typeface="Georgia" pitchFamily="18" charset="-120"/>
+              </a:rPr>
+              <a:t>за</a:t>
+            </a:r>
+            <a:r>
+              <a:rPr lang="en-US" sz="1600" dirty="0">
+                <a:solidFill>
+                  <a:srgbClr val="1B1F3A"/>
+                </a:solidFill>
+                <a:latin typeface="Georgia" pitchFamily="18" charset="0"/>
+                <a:ea typeface="Georgia" pitchFamily="18" charset="-122"/>
+                <a:cs typeface="Georgia" pitchFamily="18" charset="-120"/>
+              </a:rPr>
+              <a:t> шаги, награды, </a:t>
+            </a:r>
+            <a:r>
+              <a:rPr lang="en-US" sz="1600" dirty="0" err="1">
+                <a:solidFill>
+                  <a:srgbClr val="1B1F3A"/>
+                </a:solidFill>
+                <a:latin typeface="Georgia" pitchFamily="18" charset="0"/>
+                <a:ea typeface="Georgia" pitchFamily="18" charset="-122"/>
+                <a:cs typeface="Georgia" pitchFamily="18" charset="-120"/>
+              </a:rPr>
+              <a:t>эпохи</a:t>
+            </a:r>
+            <a:endParaRPr lang="ru-RU" sz="1600" dirty="0">
+              <a:solidFill>
+                <a:srgbClr val="1B1F3A"/>
+              </a:solidFill>
+              <a:latin typeface="Georgia" pitchFamily="18" charset="0"/>
+              <a:ea typeface="Georgia" pitchFamily="18" charset="-122"/>
+              <a:cs typeface="Georgia" pitchFamily="18" charset="-120"/>
+            </a:endParaRPr>
+          </a:p>
+          <a:p>
+            <a:pPr marL="177292" indent="-177292" algn="l">
+              <a:lnSpc>
+                <a:spcPct val="150000"/>
+              </a:lnSpc>
+              <a:buSzPct val="100000"/>
+              <a:buChar char="•"/>
+            </a:pPr>
+            <a:r>
+              <a:rPr lang="en-US" sz="1600" b="1" dirty="0">
+                <a:solidFill>
+                  <a:srgbClr val="1B1F3A"/>
+                </a:solidFill>
+                <a:latin typeface="Georgia" pitchFamily="18" charset="0"/>
+                <a:ea typeface="Georgia" pitchFamily="18" charset="-122"/>
+                <a:cs typeface="Georgia" pitchFamily="18" charset="-120"/>
+              </a:rPr>
+              <a:t>Agent, Policy</a:t>
+            </a:r>
+            <a:r>
+              <a:rPr lang="ru-RU" sz="1600" b="1" dirty="0">
+                <a:solidFill>
+                  <a:srgbClr val="1B1F3A"/>
+                </a:solidFill>
+                <a:latin typeface="Georgia" pitchFamily="18" charset="0"/>
+                <a:ea typeface="Georgia" pitchFamily="18" charset="-122"/>
+                <a:cs typeface="Georgia" pitchFamily="18" charset="-120"/>
+              </a:rPr>
+              <a:t> </a:t>
+            </a:r>
+            <a:r>
+              <a:rPr lang="ru-RU" sz="1600" dirty="0">
+                <a:solidFill>
+                  <a:srgbClr val="1B1F3A"/>
+                </a:solidFill>
+                <a:latin typeface="Georgia" pitchFamily="18" charset="0"/>
+                <a:ea typeface="Georgia" pitchFamily="18" charset="-122"/>
+                <a:cs typeface="Georgia" pitchFamily="18" charset="-120"/>
+              </a:rPr>
+              <a:t>за</a:t>
+            </a:r>
+            <a:r>
+              <a:rPr lang="ru-RU" sz="1600" b="1" dirty="0">
+                <a:solidFill>
+                  <a:srgbClr val="1B1F3A"/>
+                </a:solidFill>
+                <a:latin typeface="Georgia" pitchFamily="18" charset="0"/>
+                <a:ea typeface="Georgia" pitchFamily="18" charset="-122"/>
+                <a:cs typeface="Georgia" pitchFamily="18" charset="-120"/>
+              </a:rPr>
+              <a:t> </a:t>
+            </a:r>
+            <a:r>
+              <a:rPr lang="en-US" sz="1600" dirty="0" err="1">
+                <a:solidFill>
+                  <a:srgbClr val="1B1F3A"/>
+                </a:solidFill>
+                <a:latin typeface="Georgia" pitchFamily="18" charset="0"/>
+                <a:ea typeface="Georgia" pitchFamily="18" charset="-122"/>
+                <a:cs typeface="Georgia" pitchFamily="18" charset="-120"/>
+              </a:rPr>
+              <a:t>выбор</a:t>
+            </a:r>
+            <a:r>
+              <a:rPr lang="en-US" sz="1600" dirty="0">
+                <a:solidFill>
+                  <a:srgbClr val="1B1F3A"/>
+                </a:solidFill>
+                <a:latin typeface="Georgia" pitchFamily="18" charset="0"/>
+                <a:ea typeface="Georgia" pitchFamily="18" charset="-122"/>
+                <a:cs typeface="Georgia" pitchFamily="18" charset="-120"/>
+              </a:rPr>
+              <a:t> действия и </a:t>
+            </a:r>
+            <a:r>
+              <a:rPr lang="ru-RU" sz="1600" dirty="0">
+                <a:solidFill>
+                  <a:srgbClr val="1B1F3A"/>
+                </a:solidFill>
+                <a:latin typeface="Georgia" pitchFamily="18" charset="0"/>
+                <a:ea typeface="Georgia" pitchFamily="18" charset="-122"/>
+                <a:cs typeface="Georgia" pitchFamily="18" charset="-120"/>
+              </a:rPr>
+              <a:t>формирование </a:t>
+            </a:r>
+            <a:r>
+              <a:rPr lang="en-US" sz="1600" dirty="0">
+                <a:solidFill>
+                  <a:srgbClr val="1B1F3A"/>
+                </a:solidFill>
+                <a:latin typeface="Georgia" pitchFamily="18" charset="0"/>
+                <a:ea typeface="Georgia" pitchFamily="18" charset="-122"/>
+                <a:cs typeface="Georgia" pitchFamily="18" charset="-120"/>
+              </a:rPr>
+              <a:t>Q-</a:t>
+            </a:r>
+            <a:r>
+              <a:rPr lang="en-US" sz="1600" dirty="0" err="1">
+                <a:solidFill>
+                  <a:srgbClr val="1B1F3A"/>
+                </a:solidFill>
+                <a:latin typeface="Georgia" pitchFamily="18" charset="0"/>
+                <a:ea typeface="Georgia" pitchFamily="18" charset="-122"/>
+                <a:cs typeface="Georgia" pitchFamily="18" charset="-120"/>
+              </a:rPr>
+              <a:t>таблиц</a:t>
+            </a:r>
+            <a:r>
+              <a:rPr lang="ru-RU" sz="1600" dirty="0">
+                <a:solidFill>
+                  <a:srgbClr val="1B1F3A"/>
+                </a:solidFill>
+                <a:latin typeface="Georgia" pitchFamily="18" charset="0"/>
+                <a:ea typeface="Georgia" pitchFamily="18" charset="-122"/>
+                <a:cs typeface="Georgia" pitchFamily="18" charset="-120"/>
+              </a:rPr>
+              <a:t>ы</a:t>
+            </a:r>
+          </a:p>
+          <a:p>
+            <a:pPr marL="177292" indent="-177292" algn="l">
+              <a:lnSpc>
+                <a:spcPct val="150000"/>
+              </a:lnSpc>
+              <a:buSzPct val="100000"/>
+              <a:buChar char="•"/>
+            </a:pPr>
+            <a:r>
+              <a:rPr lang="en-US" sz="1600" b="1" dirty="0" err="1">
+                <a:solidFill>
+                  <a:srgbClr val="1B1F3A"/>
+                </a:solidFill>
+                <a:latin typeface="Georgia" pitchFamily="18" charset="0"/>
+                <a:ea typeface="Georgia" pitchFamily="18" charset="-122"/>
+                <a:cs typeface="Georgia" pitchFamily="18" charset="-120"/>
+              </a:rPr>
+              <a:t>MazeTrainerFrame</a:t>
+            </a:r>
+            <a:r>
+              <a:rPr lang="en-US" sz="1600" b="1" dirty="0">
+                <a:solidFill>
+                  <a:srgbClr val="1B1F3A"/>
+                </a:solidFill>
+                <a:latin typeface="Georgia" pitchFamily="18" charset="0"/>
+                <a:ea typeface="Georgia" pitchFamily="18" charset="-122"/>
+                <a:cs typeface="Georgia" pitchFamily="18" charset="-120"/>
+              </a:rPr>
+              <a:t>, </a:t>
+            </a:r>
+            <a:r>
+              <a:rPr lang="en-US" sz="1600" b="1" dirty="0" err="1">
+                <a:solidFill>
+                  <a:srgbClr val="1B1F3A"/>
+                </a:solidFill>
+                <a:latin typeface="Georgia" pitchFamily="18" charset="0"/>
+                <a:ea typeface="Georgia" pitchFamily="18" charset="-122"/>
+                <a:cs typeface="Georgia" pitchFamily="18" charset="-120"/>
+              </a:rPr>
+              <a:t>MazePanel</a:t>
+            </a:r>
+            <a:r>
+              <a:rPr lang="ru-RU" sz="1600" b="1" dirty="0">
+                <a:solidFill>
+                  <a:srgbClr val="1B1F3A"/>
+                </a:solidFill>
+                <a:latin typeface="Georgia" pitchFamily="18" charset="0"/>
+                <a:ea typeface="Georgia" pitchFamily="18" charset="-122"/>
+                <a:cs typeface="Georgia" pitchFamily="18" charset="-120"/>
+              </a:rPr>
+              <a:t> –</a:t>
+            </a:r>
+            <a:r>
+              <a:rPr lang="en-US" sz="1600" dirty="0">
+                <a:solidFill>
+                  <a:srgbClr val="1B1F3A"/>
+                </a:solidFill>
+                <a:latin typeface="Georgia" pitchFamily="18" charset="0"/>
+                <a:ea typeface="Georgia" pitchFamily="18" charset="-122"/>
+                <a:cs typeface="Georgia" pitchFamily="18" charset="-120"/>
+              </a:rPr>
+              <a:t> окно и отрисовка</a:t>
+            </a:r>
+            <a:endParaRPr lang="en-US" sz="1600" dirty="0"/>
+          </a:p>
+        </p:txBody>
+      </p:sp>
+      <p:pic>
+        <p:nvPicPr>
+          <p:cNvPr id="6" name="Рисунок 5">
+            <a:extLst>
+              <a:ext uri="{FF2B5EF4-FFF2-40B4-BE49-F238E27FC236}">
+                <a16:creationId xmlns:a16="http://schemas.microsoft.com/office/drawing/2014/main" id="{62FE5FEA-CB1B-19B2-3015-79D019471C3B}"/>
+              </a:ext>
+            </a:extLst>
+          </p:cNvPr>
+          <p:cNvPicPr>
+            <a:picLocks noChangeAspect="1"/>
+          </p:cNvPicPr>
+          <p:nvPr/>
+        </p:nvPicPr>
+        <p:blipFill>
+          <a:blip r:embed="rId3"/>
+          <a:stretch>
+            <a:fillRect/>
+          </a:stretch>
+        </p:blipFill>
+        <p:spPr>
+          <a:xfrm>
+            <a:off x="6049592" y="1476508"/>
+            <a:ext cx="5252900" cy="4804978"/>
+          </a:xfrm>
+          <a:prstGeom prst="roundRect">
+            <a:avLst>
+              <a:gd name="adj" fmla="val 2290"/>
+            </a:avLst>
+          </a:prstGeom>
+          <a:solidFill>
+            <a:srgbClr val="FFFFFF">
+              <a:shade val="85000"/>
+            </a:srgbClr>
+          </a:solidFill>
+          <a:ln>
+            <a:noFill/>
+          </a:ln>
+          <a:effectLst/>
+        </p:spPr>
+      </p:pic>
+    </p:spTree>
+    <p:extLst>
+      <p:ext uri="{BB962C8B-B14F-4D97-AF65-F5344CB8AC3E}">
+        <p14:creationId xmlns:p14="http://schemas.microsoft.com/office/powerpoint/2010/main" val="3960835627"/>
+      </p:ext>
+    </p:extLst>
+  </p:cSld>
+  <p:clrMapOvr>
+    <a:masterClrMapping/>
+  </p:clrMapOvr>
+</p:sld>
+</file>
+
+<file path=ppt/slides/slide8.xml><?xml version="1.0" encoding="utf-8"?>
+<p:sld xmlns:a="http://schemas.openxmlformats.org/drawingml/2006/main" xmlns:r="http://schemas.openxmlformats.org/officeDocument/2006/relationships" xmlns:p="http://schemas.openxmlformats.org/presentationml/2006/main">
+  <p:cSld name="Slide 6">
+    <p:bg>
+      <p:bgPr>
+        <a:solidFill>
+          <a:srgbClr val="F6F4EF"/>
+        </a:solidFill>
+        <a:effectLst/>
+      </p:bgPr>
+    </p:bg>
+    <p:spTree>
+      <p:nvGrpSpPr>
+        <p:cNvPr id="1" name=""/>
+        <p:cNvGrpSpPr/>
+        <p:nvPr/>
+      </p:nvGrpSpPr>
+      <p:grpSpPr>
+        <a:xfrm>
+          <a:off x="0" y="0"/>
+          <a:ext cx="0" cy="0"/>
+          <a:chOff x="0" y="0"/>
+          <a:chExt cx="0" cy="0"/>
+        </a:xfrm>
+      </p:grpSpPr>
+      <p:sp>
+        <p:nvSpPr>
+          <p:cNvPr id="2" name="Text 0"/>
+          <p:cNvSpPr>
+            <a:spLocks noGrp="1"/>
+          </p:cNvSpPr>
+          <p:nvPr>
+            <p:ph type="title"/>
+          </p:nvPr>
+        </p:nvSpPr>
+        <p:spPr>
+          <a:xfrm>
+            <a:off x="812800" y="812800"/>
+            <a:ext cx="10883392" cy="528241"/>
+          </a:xfrm>
+          <a:prstGeom prst="rect">
+            <a:avLst/>
+          </a:prstGeom>
+          <a:noFill/>
+          <a:ln/>
+        </p:spPr>
+        <p:txBody>
+          <a:bodyPr wrap="square" lIns="0" tIns="0" rIns="0" bIns="0" rtlCol="0" anchor="t">
+            <a:normAutofit/>
+          </a:bodyPr>
+          <a:lstStyle/>
+          <a:p>
+            <a:pPr marL="0" indent="0" algn="l">
+              <a:lnSpc>
+                <a:spcPts val="3960"/>
+              </a:lnSpc>
+              <a:buNone/>
+            </a:pPr>
+            <a:r>
+              <a:rPr lang="ru-RU" sz="3600" b="0" i="0" dirty="0">
+                <a:solidFill>
+                  <a:srgbClr val="1B1F3A"/>
+                </a:solidFill>
+                <a:latin typeface="Georgia" pitchFamily="18" charset="0"/>
+                <a:ea typeface="Georgia" pitchFamily="18" charset="-122"/>
+                <a:cs typeface="Georgia" pitchFamily="18" charset="-120"/>
+              </a:rPr>
+              <a:t>Диаграмма деятельности</a:t>
+            </a:r>
+            <a:endParaRPr lang="en-US" sz="3600" dirty="0"/>
+          </a:p>
+        </p:txBody>
+      </p:sp>
+      <p:sp>
+        <p:nvSpPr>
+          <p:cNvPr id="5" name="Text 3"/>
+          <p:cNvSpPr/>
+          <p:nvPr/>
+        </p:nvSpPr>
+        <p:spPr>
+          <a:xfrm>
+            <a:off x="765429" y="1626592"/>
+            <a:ext cx="4492371" cy="3604816"/>
+          </a:xfrm>
+          <a:prstGeom prst="rect">
+            <a:avLst/>
+          </a:prstGeom>
+          <a:noFill/>
+          <a:ln/>
+        </p:spPr>
+        <p:txBody>
+          <a:bodyPr wrap="square" lIns="0" tIns="0" rIns="0" bIns="0" rtlCol="0" anchor="t">
+            <a:normAutofit/>
+          </a:bodyPr>
+          <a:lstStyle/>
+          <a:p>
+            <a:pPr marL="342900" indent="-342900" algn="l">
+              <a:lnSpc>
+                <a:spcPct val="150000"/>
+              </a:lnSpc>
+              <a:buFont typeface="+mj-lt"/>
+              <a:buAutoNum type="arabicPeriod"/>
+            </a:pPr>
+            <a:r>
+              <a:rPr lang="en-US" sz="2000" dirty="0">
+                <a:solidFill>
+                  <a:srgbClr val="1B1F3A"/>
+                </a:solidFill>
+                <a:latin typeface="Georgia" pitchFamily="18" charset="0"/>
+                <a:ea typeface="Georgia" pitchFamily="18" charset="-122"/>
+                <a:cs typeface="Georgia" pitchFamily="18" charset="-120"/>
+              </a:rPr>
+              <a:t>Среда находит </a:t>
+            </a:r>
+            <a:r>
+              <a:rPr lang="en-US" sz="2000" dirty="0" err="1">
+                <a:solidFill>
+                  <a:srgbClr val="1B1F3A"/>
+                </a:solidFill>
+                <a:latin typeface="Georgia" pitchFamily="18" charset="0"/>
+                <a:ea typeface="Georgia" pitchFamily="18" charset="-122"/>
+                <a:cs typeface="Georgia" pitchFamily="18" charset="-120"/>
+              </a:rPr>
+              <a:t>доступные</a:t>
+            </a:r>
+            <a:r>
+              <a:rPr lang="en-US" sz="2000" dirty="0">
+                <a:solidFill>
+                  <a:srgbClr val="1B1F3A"/>
+                </a:solidFill>
+                <a:latin typeface="Georgia" pitchFamily="18" charset="0"/>
+                <a:ea typeface="Georgia" pitchFamily="18" charset="-122"/>
+                <a:cs typeface="Georgia" pitchFamily="18" charset="-120"/>
+              </a:rPr>
+              <a:t> </a:t>
+            </a:r>
+            <a:r>
+              <a:rPr lang="en-US" sz="2000" dirty="0" err="1">
+                <a:solidFill>
+                  <a:srgbClr val="1B1F3A"/>
+                </a:solidFill>
+                <a:latin typeface="Georgia" pitchFamily="18" charset="0"/>
+                <a:ea typeface="Georgia" pitchFamily="18" charset="-122"/>
+                <a:cs typeface="Georgia" pitchFamily="18" charset="-120"/>
+              </a:rPr>
+              <a:t>ходы</a:t>
+            </a:r>
+            <a:r>
+              <a:rPr lang="en-US" sz="2000" dirty="0">
+                <a:solidFill>
+                  <a:srgbClr val="1B1F3A"/>
+                </a:solidFill>
+                <a:latin typeface="Georgia" pitchFamily="18" charset="0"/>
+                <a:ea typeface="Georgia" pitchFamily="18" charset="-122"/>
+                <a:cs typeface="Georgia" pitchFamily="18" charset="-120"/>
+              </a:rPr>
+              <a:t> </a:t>
+            </a:r>
+          </a:p>
+          <a:p>
+            <a:pPr marL="342900" indent="-342900" algn="l">
+              <a:lnSpc>
+                <a:spcPct val="150000"/>
+              </a:lnSpc>
+              <a:buFont typeface="+mj-lt"/>
+              <a:buAutoNum type="arabicPeriod"/>
+            </a:pPr>
+            <a:r>
+              <a:rPr lang="ru-RU" sz="2000" dirty="0">
+                <a:solidFill>
+                  <a:srgbClr val="1B1F3A"/>
+                </a:solidFill>
+                <a:latin typeface="Georgia" pitchFamily="18" charset="0"/>
+                <a:ea typeface="Georgia" pitchFamily="18" charset="-122"/>
+                <a:cs typeface="Georgia" pitchFamily="18" charset="-120"/>
+              </a:rPr>
+              <a:t>А</a:t>
+            </a:r>
+            <a:r>
+              <a:rPr lang="en-US" sz="2000" dirty="0" err="1">
+                <a:solidFill>
+                  <a:srgbClr val="1B1F3A"/>
+                </a:solidFill>
+                <a:latin typeface="Georgia" pitchFamily="18" charset="0"/>
+                <a:ea typeface="Georgia" pitchFamily="18" charset="-122"/>
+                <a:cs typeface="Georgia" pitchFamily="18" charset="-120"/>
+              </a:rPr>
+              <a:t>гент</a:t>
+            </a:r>
+            <a:r>
+              <a:rPr lang="en-US" sz="2000" dirty="0">
+                <a:solidFill>
+                  <a:srgbClr val="1B1F3A"/>
+                </a:solidFill>
+                <a:latin typeface="Georgia" pitchFamily="18" charset="0"/>
+                <a:ea typeface="Georgia" pitchFamily="18" charset="-122"/>
+                <a:cs typeface="Georgia" pitchFamily="18" charset="-120"/>
+              </a:rPr>
+              <a:t> выбирает </a:t>
+            </a:r>
+            <a:r>
+              <a:rPr lang="en-US" sz="2000" dirty="0" err="1">
+                <a:solidFill>
+                  <a:srgbClr val="1B1F3A"/>
+                </a:solidFill>
+                <a:latin typeface="Georgia" pitchFamily="18" charset="0"/>
+                <a:ea typeface="Georgia" pitchFamily="18" charset="-122"/>
+                <a:cs typeface="Georgia" pitchFamily="18" charset="-120"/>
+              </a:rPr>
+              <a:t>действие</a:t>
+            </a:r>
+            <a:r>
+              <a:rPr lang="en-US" sz="2000" dirty="0">
+                <a:solidFill>
+                  <a:srgbClr val="1B1F3A"/>
+                </a:solidFill>
+                <a:latin typeface="Georgia" pitchFamily="18" charset="0"/>
+                <a:ea typeface="Georgia" pitchFamily="18" charset="-122"/>
+                <a:cs typeface="Georgia" pitchFamily="18" charset="-120"/>
+              </a:rPr>
+              <a:t> ε-</a:t>
+            </a:r>
+            <a:r>
+              <a:rPr lang="en-US" sz="2000" dirty="0" err="1">
+                <a:solidFill>
+                  <a:srgbClr val="1B1F3A"/>
+                </a:solidFill>
+                <a:latin typeface="Georgia" pitchFamily="18" charset="0"/>
+                <a:ea typeface="Georgia" pitchFamily="18" charset="-122"/>
+                <a:cs typeface="Georgia" pitchFamily="18" charset="-120"/>
+              </a:rPr>
+              <a:t>жадно</a:t>
+            </a:r>
+            <a:endParaRPr lang="ru-RU" sz="2000" dirty="0">
+              <a:solidFill>
+                <a:srgbClr val="1B1F3A"/>
+              </a:solidFill>
+              <a:latin typeface="Georgia" pitchFamily="18" charset="0"/>
+              <a:ea typeface="Georgia" pitchFamily="18" charset="-122"/>
+              <a:cs typeface="Georgia" pitchFamily="18" charset="-120"/>
+            </a:endParaRPr>
+          </a:p>
+          <a:p>
+            <a:pPr marL="342900" indent="-342900" algn="l">
+              <a:lnSpc>
+                <a:spcPct val="150000"/>
+              </a:lnSpc>
+              <a:buFont typeface="+mj-lt"/>
+              <a:buAutoNum type="arabicPeriod"/>
+            </a:pPr>
+            <a:r>
+              <a:rPr lang="ru-RU" sz="2000" dirty="0">
+                <a:solidFill>
+                  <a:srgbClr val="1B1F3A"/>
+                </a:solidFill>
+                <a:latin typeface="Georgia" pitchFamily="18" charset="0"/>
+                <a:ea typeface="Georgia" pitchFamily="18" charset="-122"/>
+                <a:cs typeface="Georgia" pitchFamily="18" charset="-120"/>
+              </a:rPr>
+              <a:t>С</a:t>
+            </a:r>
+            <a:r>
+              <a:rPr lang="en-US" sz="2000" dirty="0" err="1">
+                <a:solidFill>
+                  <a:srgbClr val="1B1F3A"/>
+                </a:solidFill>
+                <a:latin typeface="Georgia" pitchFamily="18" charset="0"/>
+                <a:ea typeface="Georgia" pitchFamily="18" charset="-122"/>
+                <a:cs typeface="Georgia" pitchFamily="18" charset="-120"/>
+              </a:rPr>
+              <a:t>реда</a:t>
+            </a:r>
+            <a:r>
+              <a:rPr lang="en-US" sz="2000" dirty="0">
+                <a:solidFill>
+                  <a:srgbClr val="1B1F3A"/>
+                </a:solidFill>
+                <a:latin typeface="Georgia" pitchFamily="18" charset="0"/>
+                <a:ea typeface="Georgia" pitchFamily="18" charset="-122"/>
+                <a:cs typeface="Georgia" pitchFamily="18" charset="-120"/>
+              </a:rPr>
+              <a:t> </a:t>
+            </a:r>
+            <a:r>
+              <a:rPr lang="en-US" sz="2000" dirty="0" err="1">
+                <a:solidFill>
+                  <a:srgbClr val="1B1F3A"/>
+                </a:solidFill>
+                <a:latin typeface="Georgia" pitchFamily="18" charset="0"/>
+                <a:ea typeface="Georgia" pitchFamily="18" charset="-122"/>
+                <a:cs typeface="Georgia" pitchFamily="18" charset="-120"/>
+              </a:rPr>
+              <a:t>выдаёт</a:t>
+            </a:r>
+            <a:r>
+              <a:rPr lang="en-US" sz="2000" dirty="0">
+                <a:solidFill>
+                  <a:srgbClr val="1B1F3A"/>
+                </a:solidFill>
+                <a:latin typeface="Georgia" pitchFamily="18" charset="0"/>
+                <a:ea typeface="Georgia" pitchFamily="18" charset="-122"/>
+                <a:cs typeface="Georgia" pitchFamily="18" charset="-120"/>
+              </a:rPr>
+              <a:t> </a:t>
+            </a:r>
+            <a:r>
+              <a:rPr lang="en-US" sz="2000" dirty="0" err="1">
+                <a:solidFill>
+                  <a:srgbClr val="1B1F3A"/>
+                </a:solidFill>
+                <a:latin typeface="Georgia" pitchFamily="18" charset="0"/>
+                <a:ea typeface="Georgia" pitchFamily="18" charset="-122"/>
+                <a:cs typeface="Georgia" pitchFamily="18" charset="-120"/>
+              </a:rPr>
+              <a:t>награду</a:t>
+            </a:r>
+            <a:r>
+              <a:rPr lang="en-US" sz="2000" dirty="0">
+                <a:solidFill>
+                  <a:srgbClr val="1B1F3A"/>
+                </a:solidFill>
+                <a:latin typeface="Georgia" pitchFamily="18" charset="0"/>
+                <a:ea typeface="Georgia" pitchFamily="18" charset="-122"/>
+                <a:cs typeface="Georgia" pitchFamily="18" charset="-120"/>
+              </a:rPr>
+              <a:t> </a:t>
+            </a:r>
+          </a:p>
+          <a:p>
+            <a:pPr marL="342900" indent="-342900" algn="l">
+              <a:lnSpc>
+                <a:spcPct val="150000"/>
+              </a:lnSpc>
+              <a:buFont typeface="+mj-lt"/>
+              <a:buAutoNum type="arabicPeriod"/>
+            </a:pPr>
+            <a:r>
+              <a:rPr lang="en-US" sz="2000" dirty="0">
+                <a:solidFill>
+                  <a:srgbClr val="1B1F3A"/>
+                </a:solidFill>
+                <a:latin typeface="Georgia" pitchFamily="18" charset="0"/>
+                <a:ea typeface="Georgia" pitchFamily="18" charset="-122"/>
+                <a:cs typeface="Georgia" pitchFamily="18" charset="-120"/>
+              </a:rPr>
+              <a:t>Q-</a:t>
+            </a:r>
+            <a:r>
+              <a:rPr lang="en-US" sz="2000" dirty="0" err="1">
+                <a:solidFill>
+                  <a:srgbClr val="1B1F3A"/>
+                </a:solidFill>
+                <a:latin typeface="Georgia" pitchFamily="18" charset="0"/>
+                <a:ea typeface="Georgia" pitchFamily="18" charset="-122"/>
+                <a:cs typeface="Georgia" pitchFamily="18" charset="-120"/>
+              </a:rPr>
+              <a:t>таблица</a:t>
+            </a:r>
+            <a:r>
+              <a:rPr lang="en-US" sz="2000" dirty="0">
+                <a:solidFill>
+                  <a:srgbClr val="1B1F3A"/>
+                </a:solidFill>
+                <a:latin typeface="Georgia" pitchFamily="18" charset="0"/>
+                <a:ea typeface="Georgia" pitchFamily="18" charset="-122"/>
+                <a:cs typeface="Georgia" pitchFamily="18" charset="-120"/>
+              </a:rPr>
+              <a:t> обновляется.</a:t>
+            </a:r>
+            <a:endParaRPr lang="en-US" sz="2000" dirty="0"/>
+          </a:p>
+        </p:txBody>
+      </p:sp>
+      <p:pic>
+        <p:nvPicPr>
+          <p:cNvPr id="7" name="Рисунок 6">
+            <a:extLst>
+              <a:ext uri="{FF2B5EF4-FFF2-40B4-BE49-F238E27FC236}">
+                <a16:creationId xmlns:a16="http://schemas.microsoft.com/office/drawing/2014/main" id="{D7254567-1044-3F4C-5791-AF9D5FA54352}"/>
+              </a:ext>
+            </a:extLst>
+          </p:cNvPr>
+          <p:cNvPicPr>
+            <a:picLocks noChangeAspect="1"/>
+          </p:cNvPicPr>
+          <p:nvPr/>
+        </p:nvPicPr>
+        <p:blipFill>
+          <a:blip r:embed="rId3"/>
+          <a:stretch>
+            <a:fillRect/>
+          </a:stretch>
+        </p:blipFill>
+        <p:spPr>
+          <a:xfrm>
+            <a:off x="6619610" y="812800"/>
+            <a:ext cx="5076582" cy="5573521"/>
+          </a:xfrm>
+          <a:prstGeom prst="roundRect">
+            <a:avLst>
+              <a:gd name="adj" fmla="val 4967"/>
+            </a:avLst>
+          </a:prstGeom>
+          <a:solidFill>
+            <a:srgbClr val="FFFFFF">
+              <a:shade val="85000"/>
+            </a:srgbClr>
+          </a:solidFill>
+          <a:ln>
+            <a:noFill/>
+          </a:ln>
+          <a:effectLst/>
+        </p:spPr>
+      </p:pic>
+    </p:spTree>
+  </p:cSld>
+  <p:clrMapOvr>
+    <a:masterClrMapping/>
+  </p:clrMapOvr>
+</p:sld>
+</file>
+
+<file path=ppt/slides/slide9.xml><?xml version="1.0" encoding="utf-8"?>
+<p:sld xmlns:a="http://schemas.openxmlformats.org/drawingml/2006/main" xmlns:r="http://schemas.openxmlformats.org/officeDocument/2006/relationships" xmlns:p="http://schemas.openxmlformats.org/presentationml/2006/main">
+  <p:cSld name="Slide 7">
+    <p:bg>
+      <p:bgPr>
+        <a:solidFill>
+          <a:srgbClr val="F6F4EF"/>
+        </a:solidFill>
+        <a:effectLst/>
+      </p:bgPr>
+    </p:bg>
+    <p:spTree>
+      <p:nvGrpSpPr>
+        <p:cNvPr id="1" name=""/>
+        <p:cNvGrpSpPr/>
+        <p:nvPr/>
+      </p:nvGrpSpPr>
+      <p:grpSpPr>
+        <a:xfrm>
+          <a:off x="0" y="0"/>
+          <a:ext cx="0" cy="0"/>
+          <a:chOff x="0" y="0"/>
+          <a:chExt cx="0" cy="0"/>
+        </a:xfrm>
+      </p:grpSpPr>
+      <p:sp>
+        <p:nvSpPr>
+          <p:cNvPr id="2" name="Text 0"/>
+          <p:cNvSpPr>
+            <a:spLocks noGrp="1"/>
+          </p:cNvSpPr>
+          <p:nvPr>
+            <p:ph type="title"/>
+          </p:nvPr>
+        </p:nvSpPr>
+        <p:spPr>
+          <a:xfrm>
+            <a:off x="812800" y="812800"/>
+            <a:ext cx="10883392" cy="528241"/>
+          </a:xfrm>
+          <a:prstGeom prst="rect">
+            <a:avLst/>
+          </a:prstGeom>
+          <a:noFill/>
+          <a:ln/>
+        </p:spPr>
+        <p:txBody>
+          <a:bodyPr wrap="square" lIns="0" tIns="0" rIns="0" bIns="0" rtlCol="0" anchor="t">
+            <a:normAutofit/>
+          </a:bodyPr>
+          <a:lstStyle/>
+          <a:p>
+            <a:pPr marL="0" indent="0" algn="l">
+              <a:lnSpc>
+                <a:spcPts val="3960"/>
+              </a:lnSpc>
+              <a:buNone/>
+            </a:pPr>
+            <a:r>
+              <a:rPr lang="en-US" sz="3600" b="0" i="0" dirty="0">
+                <a:solidFill>
+                  <a:srgbClr val="1B1F3A"/>
+                </a:solidFill>
+                <a:latin typeface="Georgia" pitchFamily="18" charset="0"/>
+                <a:ea typeface="Georgia" pitchFamily="18" charset="-122"/>
+                <a:cs typeface="Georgia" pitchFamily="18" charset="-120"/>
+              </a:rPr>
+              <a:t>Генерация лабиринта</a:t>
+            </a:r>
+            <a:endParaRPr lang="en-US" sz="3600" dirty="0"/>
+          </a:p>
+        </p:txBody>
+      </p:sp>
+      <p:sp>
+        <p:nvSpPr>
+          <p:cNvPr id="3" name="Text 1"/>
+          <p:cNvSpPr/>
+          <p:nvPr/>
+        </p:nvSpPr>
+        <p:spPr>
+          <a:xfrm>
+            <a:off x="849511" y="2305858"/>
+            <a:ext cx="5116124" cy="2954946"/>
+          </a:xfrm>
+          <a:prstGeom prst="rect">
+            <a:avLst/>
+          </a:prstGeom>
+          <a:noFill/>
+          <a:ln/>
+        </p:spPr>
+        <p:txBody>
+          <a:bodyPr wrap="square" lIns="0" tIns="0" rIns="0" bIns="0" rtlCol="0" anchor="t">
+            <a:noAutofit/>
+          </a:bodyPr>
+          <a:lstStyle/>
+          <a:p>
+            <a:pPr marL="285750" indent="-285750" algn="l">
+              <a:lnSpc>
+                <a:spcPct val="150000"/>
+              </a:lnSpc>
+              <a:buSzPct val="100000"/>
+              <a:buFont typeface="Arial" panose="020B0604020202020204" pitchFamily="34" charset="0"/>
+              <a:buChar char="•"/>
+            </a:pPr>
+            <a:r>
+              <a:rPr lang="en-US" dirty="0">
+                <a:solidFill>
+                  <a:srgbClr val="1B1F3A"/>
+                </a:solidFill>
+                <a:latin typeface="Georgia" pitchFamily="18" charset="0"/>
+                <a:ea typeface="Georgia" pitchFamily="18" charset="-122"/>
+                <a:cs typeface="Georgia" pitchFamily="18" charset="-120"/>
+              </a:rPr>
+              <a:t>Сетка (2·rows+1) × (2·cols+1): комнаты и стены</a:t>
+            </a:r>
+            <a:endParaRPr lang="en-US" dirty="0"/>
+          </a:p>
+          <a:p>
+            <a:pPr marL="285750" indent="-285750" algn="l">
+              <a:lnSpc>
+                <a:spcPct val="150000"/>
+              </a:lnSpc>
+              <a:buSzPct val="100000"/>
+              <a:buFont typeface="Arial" panose="020B0604020202020204" pitchFamily="34" charset="0"/>
+              <a:buChar char="•"/>
+            </a:pPr>
+            <a:r>
+              <a:rPr lang="en-US" dirty="0">
+                <a:solidFill>
+                  <a:srgbClr val="1B1F3A"/>
+                </a:solidFill>
+                <a:latin typeface="Georgia" pitchFamily="18" charset="0"/>
+                <a:ea typeface="Georgia" pitchFamily="18" charset="-122"/>
+                <a:cs typeface="Georgia" pitchFamily="18" charset="-120"/>
+              </a:rPr>
+              <a:t>Поиск в глубину с возвратом прорывает проходы на стеке, без рекурсии</a:t>
+            </a:r>
+            <a:endParaRPr lang="en-US" dirty="0"/>
+          </a:p>
+          <a:p>
+            <a:pPr marL="285750" indent="-285750" algn="l">
+              <a:lnSpc>
+                <a:spcPct val="150000"/>
+              </a:lnSpc>
+              <a:buSzPct val="100000"/>
+              <a:buFont typeface="Arial" panose="020B0604020202020204" pitchFamily="34" charset="0"/>
+              <a:buChar char="•"/>
+            </a:pPr>
+            <a:r>
+              <a:rPr lang="en-US" dirty="0">
+                <a:solidFill>
+                  <a:srgbClr val="1B1F3A"/>
+                </a:solidFill>
+                <a:latin typeface="Georgia" pitchFamily="18" charset="0"/>
+                <a:ea typeface="Georgia" pitchFamily="18" charset="-122"/>
+                <a:cs typeface="Georgia" pitchFamily="18" charset="-120"/>
+              </a:rPr>
+              <a:t>Мышь справа внизу, сыр слева вверху, вода и </a:t>
+            </a:r>
+            <a:r>
+              <a:rPr lang="en-US" dirty="0" err="1">
+                <a:solidFill>
+                  <a:srgbClr val="1B1F3A"/>
+                </a:solidFill>
+                <a:latin typeface="Georgia" pitchFamily="18" charset="0"/>
+                <a:ea typeface="Georgia" pitchFamily="18" charset="-122"/>
+                <a:cs typeface="Georgia" pitchFamily="18" charset="-120"/>
+              </a:rPr>
+              <a:t>ток</a:t>
+            </a:r>
+            <a:r>
+              <a:rPr lang="ru-RU" dirty="0">
+                <a:solidFill>
+                  <a:srgbClr val="1B1F3A"/>
+                </a:solidFill>
+                <a:latin typeface="Georgia" pitchFamily="18" charset="0"/>
+                <a:ea typeface="Georgia" pitchFamily="18" charset="-122"/>
+                <a:cs typeface="Georgia" pitchFamily="18" charset="-120"/>
+              </a:rPr>
+              <a:t> располагаются</a:t>
+            </a:r>
+            <a:r>
+              <a:rPr lang="en-US" dirty="0">
+                <a:solidFill>
+                  <a:srgbClr val="1B1F3A"/>
+                </a:solidFill>
+                <a:latin typeface="Georgia" pitchFamily="18" charset="0"/>
+                <a:ea typeface="Georgia" pitchFamily="18" charset="-122"/>
+                <a:cs typeface="Georgia" pitchFamily="18" charset="-120"/>
+              </a:rPr>
+              <a:t> случайно</a:t>
+            </a:r>
+            <a:endParaRPr lang="en-US" dirty="0"/>
+          </a:p>
+        </p:txBody>
+      </p:sp>
+      <p:pic>
+        <p:nvPicPr>
+          <p:cNvPr id="5" name="Рисунок 4">
+            <a:extLst>
+              <a:ext uri="{FF2B5EF4-FFF2-40B4-BE49-F238E27FC236}">
+                <a16:creationId xmlns:a16="http://schemas.microsoft.com/office/drawing/2014/main" id="{5BFE245D-4D00-801F-FE55-2EE12825E481}"/>
+              </a:ext>
+            </a:extLst>
+          </p:cNvPr>
+          <p:cNvPicPr>
+            <a:picLocks noChangeAspect="1"/>
+          </p:cNvPicPr>
+          <p:nvPr/>
+        </p:nvPicPr>
+        <p:blipFill>
+          <a:blip r:embed="rId3"/>
+          <a:srcRect b="12176"/>
+          <a:stretch>
+            <a:fillRect/>
+          </a:stretch>
+        </p:blipFill>
+        <p:spPr>
+          <a:xfrm>
+            <a:off x="6454988" y="1930319"/>
+            <a:ext cx="5317066" cy="3951238"/>
+          </a:xfrm>
+          <a:prstGeom prst="roundRect">
+            <a:avLst>
+              <a:gd name="adj" fmla="val 8594"/>
+            </a:avLst>
+          </a:prstGeom>
+          <a:solidFill>
+            <a:srgbClr val="FFFFFF">
+              <a:shade val="85000"/>
+            </a:srgbClr>
+          </a:solidFill>
+          <a:ln>
+            <a:noFill/>
+          </a:ln>
+          <a:effectLst/>
+        </p:spPr>
+      </p:pic>
     </p:spTree>
   </p:cSld>
   <p:clrMapOvr>

--- a/Java/lab2/Presentation.pptx
+++ b/Java/lab2/Presentation.pptx
@@ -2044,6 +2044,18 @@
   <p:clrMapOvr>
     <a:masterClrMapping/>
   </p:clrMapOvr>
+  <mc:AlternateContent xmlns:mc="http://schemas.openxmlformats.org/markup-compatibility/2006" xmlns:p14="http://schemas.microsoft.com/office/powerpoint/2010/main">
+    <mc:Choice Requires="p14">
+      <p:transition spd="slow" p14:dur="1500">
+        <p:random/>
+      </p:transition>
+    </mc:Choice>
+    <mc:Fallback xmlns="">
+      <p:transition spd="slow">
+        <p:random/>
+      </p:transition>
+    </mc:Fallback>
+  </mc:AlternateContent>
 </p:sld>
 </file>
 
@@ -2187,6 +2199,18 @@
   <p:clrMapOvr>
     <a:masterClrMapping/>
   </p:clrMapOvr>
+  <mc:AlternateContent xmlns:mc="http://schemas.openxmlformats.org/markup-compatibility/2006" xmlns:p14="http://schemas.microsoft.com/office/powerpoint/2010/main">
+    <mc:Choice Requires="p14">
+      <p:transition spd="slow" p14:dur="1500">
+        <p:random/>
+      </p:transition>
+    </mc:Choice>
+    <mc:Fallback xmlns="">
+      <p:transition spd="slow">
+        <p:random/>
+      </p:transition>
+    </mc:Fallback>
+  </mc:AlternateContent>
 </p:sld>
 </file>
 
@@ -2423,15 +2447,16 @@
               <a:buNone/>
             </a:pPr>
             <a:r>
-              <a:rPr lang="en-US" sz="1500" dirty="0">
-                <a:solidFill>
-                  <a:srgbClr val="1B1F3A"/>
-                </a:solidFill>
-                <a:latin typeface="Georgia" pitchFamily="18" charset="0"/>
-                <a:ea typeface="Georgia" pitchFamily="18" charset="-122"/>
-                <a:cs typeface="Georgia" pitchFamily="18" charset="-120"/>
-              </a:rPr>
-              <a:t>Результат: [число эпох до сходимости], [итоговая награда], [длина найденного пути]</a:t>
+              <a:rPr lang="ru-RU" sz="1500" dirty="0"/>
+              <a:t>В среднем обучение мыши проходить лабиринт 7</a:t>
+            </a:r>
+            <a:r>
+              <a:rPr lang="en-US" sz="1500" dirty="0"/>
+              <a:t>x</a:t>
+            </a:r>
+            <a:r>
+              <a:rPr lang="ru-RU" sz="1500" dirty="0"/>
+              <a:t>7 клеток занимает 200 эпох</a:t>
             </a:r>
             <a:endParaRPr lang="en-US" sz="1500" dirty="0"/>
           </a:p>
@@ -2442,6 +2467,18 @@
   <p:clrMapOvr>
     <a:masterClrMapping/>
   </p:clrMapOvr>
+  <mc:AlternateContent xmlns:mc="http://schemas.openxmlformats.org/markup-compatibility/2006" xmlns:p14="http://schemas.microsoft.com/office/powerpoint/2010/main">
+    <mc:Choice Requires="p14">
+      <p:transition spd="slow" p14:dur="1500">
+        <p:random/>
+      </p:transition>
+    </mc:Choice>
+    <mc:Fallback xmlns="">
+      <p:transition spd="slow">
+        <p:random/>
+      </p:transition>
+    </mc:Fallback>
+  </mc:AlternateContent>
 </p:sld>
 </file>
 
@@ -2764,6 +2801,18 @@
   <p:clrMapOvr>
     <a:masterClrMapping/>
   </p:clrMapOvr>
+  <mc:AlternateContent xmlns:mc="http://schemas.openxmlformats.org/markup-compatibility/2006" xmlns:p14="http://schemas.microsoft.com/office/powerpoint/2010/main">
+    <mc:Choice Requires="p14">
+      <p:transition spd="slow" p14:dur="1500">
+        <p:random/>
+      </p:transition>
+    </mc:Choice>
+    <mc:Fallback xmlns="">
+      <p:transition spd="slow">
+        <p:random/>
+      </p:transition>
+    </mc:Fallback>
+  </mc:AlternateContent>
 </p:sld>
 </file>
 
@@ -2828,6 +2877,18 @@
   <p:clrMapOvr>
     <a:masterClrMapping/>
   </p:clrMapOvr>
+  <mc:AlternateContent xmlns:mc="http://schemas.openxmlformats.org/markup-compatibility/2006" xmlns:p14="http://schemas.microsoft.com/office/powerpoint/2010/main">
+    <mc:Choice Requires="p14">
+      <p:transition spd="slow" p14:dur="1500">
+        <p:random/>
+      </p:transition>
+    </mc:Choice>
+    <mc:Fallback xmlns="">
+      <p:transition spd="slow">
+        <p:random/>
+      </p:transition>
+    </mc:Fallback>
+  </mc:AlternateContent>
 </p:sld>
 </file>
 
@@ -3038,6 +3099,18 @@
   <p:clrMapOvr>
     <a:masterClrMapping/>
   </p:clrMapOvr>
+  <mc:AlternateContent xmlns:mc="http://schemas.openxmlformats.org/markup-compatibility/2006" xmlns:p14="http://schemas.microsoft.com/office/powerpoint/2010/main">
+    <mc:Choice Requires="p14">
+      <p:transition spd="slow" p14:dur="1500">
+        <p:random/>
+      </p:transition>
+    </mc:Choice>
+    <mc:Fallback xmlns="">
+      <p:transition spd="slow">
+        <p:random/>
+      </p:transition>
+    </mc:Fallback>
+  </mc:AlternateContent>
 </p:sld>
 </file>
 
@@ -3186,7 +3259,7 @@
                 <a:ea typeface="Georgia" pitchFamily="18" charset="-122"/>
                 <a:cs typeface="Georgia" pitchFamily="18" charset="-120"/>
               </a:rPr>
-              <a:t>+10^7</a:t>
+              <a:t>+10^6</a:t>
             </a:r>
             <a:endParaRPr lang="en-US" sz="3600" dirty="0"/>
           </a:p>
@@ -3352,7 +3425,7 @@
                 <a:ea typeface="Georgia" pitchFamily="18" charset="-122"/>
                 <a:cs typeface="Georgia" pitchFamily="18" charset="-120"/>
               </a:rPr>
-              <a:t>+10</a:t>
+              <a:t>+15</a:t>
             </a:r>
             <a:endParaRPr lang="en-US" sz="3600" dirty="0"/>
           </a:p>
@@ -3518,7 +3591,7 @@
                 <a:ea typeface="Georgia" pitchFamily="18" charset="-122"/>
                 <a:cs typeface="Georgia" pitchFamily="18" charset="-120"/>
               </a:rPr>
-              <a:t>−10</a:t>
+              <a:t>−15</a:t>
             </a:r>
             <a:endParaRPr lang="en-US" sz="3600" dirty="0"/>
           </a:p>
@@ -3827,6 +3900,18 @@
   <p:clrMapOvr>
     <a:masterClrMapping/>
   </p:clrMapOvr>
+  <mc:AlternateContent xmlns:mc="http://schemas.openxmlformats.org/markup-compatibility/2006" xmlns:p14="http://schemas.microsoft.com/office/powerpoint/2010/main">
+    <mc:Choice Requires="p14">
+      <p:transition spd="slow" p14:dur="1500">
+        <p:random/>
+      </p:transition>
+    </mc:Choice>
+    <mc:Fallback xmlns="">
+      <p:transition spd="slow">
+        <p:random/>
+      </p:transition>
+    </mc:Fallback>
+  </mc:AlternateContent>
 </p:sld>
 </file>
 
@@ -4313,6 +4398,18 @@
   <p:clrMapOvr>
     <a:masterClrMapping/>
   </p:clrMapOvr>
+  <mc:AlternateContent xmlns:mc="http://schemas.openxmlformats.org/markup-compatibility/2006" xmlns:p14="http://schemas.microsoft.com/office/powerpoint/2010/main">
+    <mc:Choice Requires="p14">
+      <p:transition spd="slow" p14:dur="1500">
+        <p:random/>
+      </p:transition>
+    </mc:Choice>
+    <mc:Fallback xmlns="">
+      <p:transition spd="slow">
+        <p:random/>
+      </p:transition>
+    </mc:Fallback>
+  </mc:AlternateContent>
 </p:sld>
 </file>
 
@@ -4435,6 +4532,18 @@
   <p:clrMapOvr>
     <a:masterClrMapping/>
   </p:clrMapOvr>
+  <mc:AlternateContent xmlns:mc="http://schemas.openxmlformats.org/markup-compatibility/2006" xmlns:p14="http://schemas.microsoft.com/office/powerpoint/2010/main">
+    <mc:Choice Requires="p14">
+      <p:transition spd="slow" p14:dur="1500">
+        <p:random/>
+      </p:transition>
+    </mc:Choice>
+    <mc:Fallback xmlns="">
+      <p:transition spd="slow">
+        <p:random/>
+      </p:transition>
+    </mc:Fallback>
+  </mc:AlternateContent>
 </p:sld>
 </file>
 
@@ -4578,6 +4687,18 @@
   <p:clrMapOvr>
     <a:masterClrMapping/>
   </p:clrMapOvr>
+  <mc:AlternateContent xmlns:mc="http://schemas.openxmlformats.org/markup-compatibility/2006" xmlns:p14="http://schemas.microsoft.com/office/powerpoint/2010/main">
+    <mc:Choice Requires="p14">
+      <p:transition spd="slow" p14:dur="1500">
+        <p:random/>
+      </p:transition>
+    </mc:Choice>
+    <mc:Fallback xmlns="">
+      <p:transition spd="slow">
+        <p:random/>
+      </p:transition>
+    </mc:Fallback>
+  </mc:AlternateContent>
 </p:sld>
 </file>
 
@@ -5122,6 +5243,18 @@
   <p:clrMapOvr>
     <a:masterClrMapping/>
   </p:clrMapOvr>
+  <mc:AlternateContent xmlns:mc="http://schemas.openxmlformats.org/markup-compatibility/2006" xmlns:p14="http://schemas.microsoft.com/office/powerpoint/2010/main">
+    <mc:Choice Requires="p14">
+      <p:transition spd="slow" p14:dur="1500">
+        <p:random/>
+      </p:transition>
+    </mc:Choice>
+    <mc:Fallback xmlns="">
+      <p:transition spd="slow">
+        <p:random/>
+      </p:transition>
+    </mc:Fallback>
+  </mc:AlternateContent>
 </p:sld>
 </file>
 
@@ -5544,6 +5677,18 @@
   <p:clrMapOvr>
     <a:masterClrMapping/>
   </p:clrMapOvr>
+  <mc:AlternateContent xmlns:mc="http://schemas.openxmlformats.org/markup-compatibility/2006" xmlns:p14="http://schemas.microsoft.com/office/powerpoint/2010/main">
+    <mc:Choice Requires="p14">
+      <p:transition spd="slow" p14:dur="1500">
+        <p:random/>
+      </p:transition>
+    </mc:Choice>
+    <mc:Fallback xmlns="">
+      <p:transition spd="slow">
+        <p:random/>
+      </p:transition>
+    </mc:Fallback>
+  </mc:AlternateContent>
 </p:sld>
 </file>
 
@@ -5790,6 +5935,18 @@
   <p:clrMapOvr>
     <a:masterClrMapping/>
   </p:clrMapOvr>
+  <mc:AlternateContent xmlns:mc="http://schemas.openxmlformats.org/markup-compatibility/2006" xmlns:p14="http://schemas.microsoft.com/office/powerpoint/2010/main">
+    <mc:Choice Requires="p14">
+      <p:transition spd="slow" p14:dur="1500">
+        <p:random/>
+      </p:transition>
+    </mc:Choice>
+    <mc:Fallback xmlns="">
+      <p:transition spd="slow">
+        <p:random/>
+      </p:transition>
+    </mc:Fallback>
+  </mc:AlternateContent>
 </p:sld>
 </file>
 

--- a/Java/lab2/Presentation.pptx
+++ b/Java/lab2/Presentation.pptx
@@ -4011,13 +4011,34 @@
           </a:bodyPr>
           <a:lstStyle/>
           <a:p>
-            <a:pPr marL="0" indent="0" algn="l">
+            <a:pPr>
               <a:lnSpc>
                 <a:spcPts val="3380"/>
               </a:lnSpc>
-              <a:buNone/>
             </a:pPr>
             <a:r>
+              <a:rPr lang="en-US" sz="2600" dirty="0" err="1">
+                <a:solidFill>
+                  <a:srgbClr val="F2B134"/>
+                </a:solidFill>
+                <a:latin typeface="Georgia" pitchFamily="18" charset="0"/>
+                <a:ea typeface="Georgia" pitchFamily="18" charset="-122"/>
+                <a:cs typeface="Georgia" pitchFamily="18" charset="-120"/>
+              </a:rPr>
+              <a:t>Q</a:t>
+            </a:r>
+            <a:r>
+              <a:rPr lang="en-US" sz="2600" baseline="-25000" dirty="0" err="1">
+                <a:solidFill>
+                  <a:srgbClr val="F2B134"/>
+                </a:solidFill>
+                <a:latin typeface="Georgia" pitchFamily="18" charset="0"/>
+                <a:ea typeface="Georgia" pitchFamily="18" charset="-122"/>
+                <a:cs typeface="Georgia" pitchFamily="18" charset="-120"/>
+              </a:rPr>
+              <a:t>new</a:t>
+            </a:r>
+            <a:r>
               <a:rPr lang="en-US" sz="2600" dirty="0">
                 <a:solidFill>
                   <a:srgbClr val="F2B134"/>
@@ -4026,7 +4047,73 @@
                 <a:ea typeface="Georgia" pitchFamily="18" charset="-122"/>
                 <a:cs typeface="Georgia" pitchFamily="18" charset="-120"/>
               </a:rPr>
-              <a:t>Q(s,a) += α · (r + γ · max Q(s′,·) − Q(s,a))</a:t>
+              <a:t>(s,</a:t>
+            </a:r>
+            <a:r>
+              <a:rPr lang="ru-RU" sz="2600" dirty="0">
+                <a:solidFill>
+                  <a:srgbClr val="F2B134"/>
+                </a:solidFill>
+                <a:latin typeface="Georgia" pitchFamily="18" charset="0"/>
+                <a:ea typeface="Georgia" pitchFamily="18" charset="-122"/>
+                <a:cs typeface="Georgia" pitchFamily="18" charset="-120"/>
+              </a:rPr>
+              <a:t> </a:t>
+            </a:r>
+            <a:r>
+              <a:rPr lang="en-US" sz="2600" dirty="0">
+                <a:solidFill>
+                  <a:srgbClr val="F2B134"/>
+                </a:solidFill>
+                <a:latin typeface="Georgia" pitchFamily="18" charset="0"/>
+                <a:ea typeface="Georgia" pitchFamily="18" charset="-122"/>
+                <a:cs typeface="Georgia" pitchFamily="18" charset="-120"/>
+              </a:rPr>
+              <a:t>a) = Q(s,</a:t>
+            </a:r>
+            <a:r>
+              <a:rPr lang="ru-RU" sz="2600" dirty="0">
+                <a:solidFill>
+                  <a:srgbClr val="F2B134"/>
+                </a:solidFill>
+                <a:latin typeface="Georgia" pitchFamily="18" charset="0"/>
+                <a:ea typeface="Georgia" pitchFamily="18" charset="-122"/>
+                <a:cs typeface="Georgia" pitchFamily="18" charset="-120"/>
+              </a:rPr>
+              <a:t> </a:t>
+            </a:r>
+            <a:r>
+              <a:rPr lang="en-US" sz="2600" dirty="0">
+                <a:solidFill>
+                  <a:srgbClr val="F2B134"/>
+                </a:solidFill>
+                <a:latin typeface="Georgia" pitchFamily="18" charset="0"/>
+                <a:ea typeface="Georgia" pitchFamily="18" charset="-122"/>
+                <a:cs typeface="Georgia" pitchFamily="18" charset="-120"/>
+              </a:rPr>
+              <a:t>a) + α · (r + γ · max Q(s′, a′) − Q(s,</a:t>
+            </a:r>
+            <a:r>
+              <a:rPr lang="ru-RU" sz="2600" dirty="0">
+                <a:solidFill>
+                  <a:srgbClr val="F2B134"/>
+                </a:solidFill>
+                <a:latin typeface="Georgia" pitchFamily="18" charset="0"/>
+                <a:ea typeface="Georgia" pitchFamily="18" charset="-122"/>
+                <a:cs typeface="Georgia" pitchFamily="18" charset="-120"/>
+              </a:rPr>
+              <a:t> </a:t>
+            </a:r>
+            <a:r>
+              <a:rPr lang="en-US" sz="2600" dirty="0">
+                <a:solidFill>
+                  <a:srgbClr val="F2B134"/>
+                </a:solidFill>
+                <a:latin typeface="Georgia" pitchFamily="18" charset="0"/>
+                <a:ea typeface="Georgia" pitchFamily="18" charset="-122"/>
+                <a:cs typeface="Georgia" pitchFamily="18" charset="-120"/>
+              </a:rPr>
+              <a:t>a))</a:t>
             </a:r>
             <a:endParaRPr lang="en-US" sz="2600" dirty="0"/>
           </a:p>
@@ -4150,6 +4237,17 @@
               <a:buNone/>
             </a:pPr>
             <a:r>
+              <a:rPr lang="ru-RU" sz="1500" dirty="0">
+                <a:solidFill>
+                  <a:srgbClr val="C9C6D6"/>
+                </a:solidFill>
+                <a:latin typeface="Georgia" pitchFamily="18" charset="0"/>
+                <a:ea typeface="Georgia" pitchFamily="18" charset="-122"/>
+                <a:cs typeface="Georgia" pitchFamily="18" charset="-120"/>
+              </a:rPr>
+              <a:t>Коэффициент обучения</a:t>
+            </a:r>
+            <a:r>
               <a:rPr lang="en-US" sz="1500" dirty="0">
                 <a:solidFill>
                   <a:srgbClr val="C9C6D6"/>
@@ -4158,7 +4256,7 @@
                 <a:ea typeface="Georgia" pitchFamily="18" charset="-122"/>
                 <a:cs typeface="Georgia" pitchFamily="18" charset="-120"/>
               </a:rPr>
-              <a:t>Скорость обучения: насколько новый опыт вытесняет старый</a:t>
+              <a:t>: насколько новый опыт вытесняет старый</a:t>
             </a:r>
             <a:endParaRPr lang="en-US" sz="1500" dirty="0"/>
           </a:p>
@@ -4238,6 +4336,39 @@
               <a:buNone/>
             </a:pPr>
             <a:r>
+              <a:rPr lang="ru-RU" sz="1500" dirty="0">
+                <a:solidFill>
+                  <a:srgbClr val="C9C6D6"/>
+                </a:solidFill>
+                <a:latin typeface="Georgia" pitchFamily="18" charset="0"/>
+                <a:ea typeface="Georgia" pitchFamily="18" charset="-122"/>
+                <a:cs typeface="Georgia" pitchFamily="18" charset="-120"/>
+              </a:rPr>
+              <a:t>Коэффициент д</a:t>
+            </a:r>
+            <a:r>
+              <a:rPr lang="en-US" sz="1500" dirty="0" err="1">
+                <a:solidFill>
+                  <a:srgbClr val="C9C6D6"/>
+                </a:solidFill>
+                <a:latin typeface="Georgia" pitchFamily="18" charset="0"/>
+                <a:ea typeface="Georgia" pitchFamily="18" charset="-122"/>
+                <a:cs typeface="Georgia" pitchFamily="18" charset="-120"/>
+              </a:rPr>
+              <a:t>исконт</a:t>
+            </a:r>
+            <a:r>
+              <a:rPr lang="ru-RU" sz="1500" dirty="0" err="1">
+                <a:solidFill>
+                  <a:srgbClr val="C9C6D6"/>
+                </a:solidFill>
+                <a:latin typeface="Georgia" pitchFamily="18" charset="0"/>
+                <a:ea typeface="Georgia" pitchFamily="18" charset="-122"/>
+                <a:cs typeface="Georgia" pitchFamily="18" charset="-120"/>
+              </a:rPr>
+              <a:t>ирования</a:t>
+            </a:r>
+            <a:r>
               <a:rPr lang="en-US" sz="1500" dirty="0">
                 <a:solidFill>
                   <a:srgbClr val="C9C6D6"/>
@@ -4246,7 +4377,7 @@
                 <a:ea typeface="Georgia" pitchFamily="18" charset="-122"/>
                 <a:cs typeface="Georgia" pitchFamily="18" charset="-120"/>
               </a:rPr>
-              <a:t>Дисконт: насколько важны награды в будущем</a:t>
+              <a:t>: насколько важны награды в будущем</a:t>
             </a:r>
             <a:endParaRPr lang="en-US" sz="1500" dirty="0"/>
           </a:p>
